--- a/reports/CopilotStudio_ハッカソン_事前相談会報告.pptx
+++ b/reports/CopilotStudio_ハッカソン_事前相談会報告.pptx
@@ -4845,8 +4845,8 @@
         </p:nvSpPr>
         <p:spPr>
           <a:xfrm>
-            <a:off x="502920" y="1170432"/>
-            <a:ext cx="11247120" cy="320040"/>
+            <a:off x="502920" y="1152144"/>
+            <a:ext cx="11247120" cy="292608"/>
           </a:xfrm>
           <a:prstGeom prst="rect">
             <a:avLst/>
@@ -4865,71 +4865,27 @@
               </a:lnSpc>
             </a:pPr>
             <a:r>
-              <a:rPr sz="1150" b="0" i="0">
+              <a:rPr sz="1100" b="0" i="0">
                 <a:solidFill>
                   <a:srgbClr val="252A31"/>
                 </a:solidFill>
                 <a:latin typeface="Meiryo"/>
               </a:rPr>
-              <a:t>1案への絞り込み状況と、相談会で挙がった主要な質疑応答（各チーム1〜2件を要約）を整理。</a:t>
-            </a:r>
-          </a:p>
-        </p:txBody>
-      </p:sp>
-      <p:sp>
-        <p:nvSpPr>
-          <p:cNvPr id="13" name="Rectangle 12"/>
-          <p:cNvSpPr/>
+              <a:t>「絞り込み」は1案への確定状況（済／未）、「進捗レベル」は下記4段階の到達点を4つの矢印で表示。質疑は各チーム1〜2件を要約。</a:t>
+            </a:r>
+          </a:p>
+        </p:txBody>
+      </p:sp>
+      <p:sp>
+        <p:nvSpPr>
+          <p:cNvPr id="13" name="TextBox 12"/>
+          <p:cNvSpPr txBox="1"/>
           <p:nvPr/>
         </p:nvSpPr>
         <p:spPr>
           <a:xfrm>
             <a:off x="502920" y="1463040"/>
-            <a:ext cx="146304" cy="146304"/>
-          </a:xfrm>
-          <a:prstGeom prst="rect">
-            <a:avLst/>
-          </a:prstGeom>
-          <a:solidFill>
-            <a:srgbClr val="3F8F5B"/>
-          </a:solidFill>
-          <a:ln>
-            <a:noFill/>
-          </a:ln>
-          <a:effectLst/>
-        </p:spPr>
-        <p:style>
-          <a:lnRef idx="1">
-            <a:schemeClr val="accent1"/>
-          </a:lnRef>
-          <a:fillRef idx="3">
-            <a:schemeClr val="accent1"/>
-          </a:fillRef>
-          <a:effectRef idx="2">
-            <a:schemeClr val="accent1"/>
-          </a:effectRef>
-          <a:fontRef idx="minor">
-            <a:schemeClr val="lt1"/>
-          </a:fontRef>
-        </p:style>
-        <p:txBody>
-          <a:bodyPr rtlCol="0" anchor="ctr"/>
-          <a:lstStyle/>
-          <a:p>
-            <a:pPr algn="ctr"/>
-          </a:p>
-        </p:txBody>
-      </p:sp>
-      <p:sp>
-        <p:nvSpPr>
-          <p:cNvPr id="14" name="TextBox 13"/>
-          <p:cNvSpPr txBox="1"/>
-          <p:nvPr/>
-        </p:nvSpPr>
-        <p:spPr>
-          <a:xfrm>
-            <a:off x="685800" y="1389888"/>
-            <a:ext cx="1371600" cy="274320"/>
+            <a:ext cx="11247120" cy="457200"/>
           </a:xfrm>
           <a:prstGeom prst="rect">
             <a:avLst/>
@@ -4944,281 +4900,32 @@
           <a:p>
             <a:pPr algn="l">
               <a:lnSpc>
-                <a:spcPct val="100000"/>
+                <a:spcPct val="110000"/>
               </a:lnSpc>
             </a:pPr>
             <a:r>
-              <a:rPr sz="950" b="1" i="0">
+              <a:rPr sz="950" b="0" i="0">
                 <a:solidFill>
-                  <a:srgbClr val="252A31"/>
+                  <a:srgbClr val="555D68"/>
                 </a:solidFill>
                 <a:latin typeface="Meiryo"/>
               </a:rPr>
-              <a:t>◎ 完了</a:t>
-            </a:r>
-          </a:p>
-        </p:txBody>
-      </p:sp>
-      <p:sp>
-        <p:nvSpPr>
-          <p:cNvPr id="15" name="Rectangle 14"/>
-          <p:cNvSpPr/>
-          <p:nvPr/>
-        </p:nvSpPr>
-        <p:spPr>
-          <a:xfrm>
-            <a:off x="2011680" y="1463040"/>
-            <a:ext cx="146304" cy="146304"/>
-          </a:xfrm>
-          <a:prstGeom prst="rect">
-            <a:avLst/>
-          </a:prstGeom>
-          <a:solidFill>
-            <a:srgbClr val="2E8B9E"/>
-          </a:solidFill>
-          <a:ln>
-            <a:noFill/>
-          </a:ln>
-          <a:effectLst/>
-        </p:spPr>
-        <p:style>
-          <a:lnRef idx="1">
-            <a:schemeClr val="accent1"/>
-          </a:lnRef>
-          <a:fillRef idx="3">
-            <a:schemeClr val="accent1"/>
-          </a:fillRef>
-          <a:effectRef idx="2">
-            <a:schemeClr val="accent1"/>
-          </a:effectRef>
-          <a:fontRef idx="minor">
-            <a:schemeClr val="lt1"/>
-          </a:fontRef>
-        </p:style>
-        <p:txBody>
-          <a:bodyPr rtlCol="0" anchor="ctr"/>
-          <a:lstStyle/>
-          <a:p>
-            <a:pPr algn="ctr"/>
-          </a:p>
-        </p:txBody>
-      </p:sp>
-      <p:sp>
-        <p:nvSpPr>
-          <p:cNvPr id="16" name="TextBox 15"/>
-          <p:cNvSpPr txBox="1"/>
-          <p:nvPr/>
-        </p:nvSpPr>
-        <p:spPr>
-          <a:xfrm>
-            <a:off x="2194560" y="1389888"/>
-            <a:ext cx="1371600" cy="274320"/>
-          </a:xfrm>
-          <a:prstGeom prst="rect">
-            <a:avLst/>
-          </a:prstGeom>
-          <a:noFill/>
-        </p:spPr>
-        <p:txBody>
-          <a:bodyPr wrap="square" anchor="t" lIns="25400" rIns="25400" tIns="12700" bIns="12700">
-            <a:spAutoFit/>
-          </a:bodyPr>
-          <a:lstStyle/>
-          <a:p>
-            <a:pPr algn="l">
-              <a:lnSpc>
-                <a:spcPct val="100000"/>
-              </a:lnSpc>
-            </a:pPr>
-            <a:r>
-              <a:rPr sz="950" b="1" i="0">
-                <a:solidFill>
-                  <a:srgbClr val="252A31"/>
-                </a:solidFill>
-                <a:latin typeface="Meiryo"/>
-              </a:rPr>
-              <a:t>○ 概ね完了</a:t>
-            </a:r>
-          </a:p>
-        </p:txBody>
-      </p:sp>
-      <p:sp>
-        <p:nvSpPr>
-          <p:cNvPr id="17" name="Rectangle 16"/>
-          <p:cNvSpPr/>
-          <p:nvPr/>
-        </p:nvSpPr>
-        <p:spPr>
-          <a:xfrm>
-            <a:off x="3520440" y="1463040"/>
-            <a:ext cx="146304" cy="146304"/>
-          </a:xfrm>
-          <a:prstGeom prst="rect">
-            <a:avLst/>
-          </a:prstGeom>
-          <a:solidFill>
-            <a:srgbClr val="C98A1B"/>
-          </a:solidFill>
-          <a:ln>
-            <a:noFill/>
-          </a:ln>
-          <a:effectLst/>
-        </p:spPr>
-        <p:style>
-          <a:lnRef idx="1">
-            <a:schemeClr val="accent1"/>
-          </a:lnRef>
-          <a:fillRef idx="3">
-            <a:schemeClr val="accent1"/>
-          </a:fillRef>
-          <a:effectRef idx="2">
-            <a:schemeClr val="accent1"/>
-          </a:effectRef>
-          <a:fontRef idx="minor">
-            <a:schemeClr val="lt1"/>
-          </a:fontRef>
-        </p:style>
-        <p:txBody>
-          <a:bodyPr rtlCol="0" anchor="ctr"/>
-          <a:lstStyle/>
-          <a:p>
-            <a:pPr algn="ctr"/>
-          </a:p>
-        </p:txBody>
-      </p:sp>
-      <p:sp>
-        <p:nvSpPr>
-          <p:cNvPr id="18" name="TextBox 17"/>
-          <p:cNvSpPr txBox="1"/>
-          <p:nvPr/>
-        </p:nvSpPr>
-        <p:spPr>
-          <a:xfrm>
-            <a:off x="3703320" y="1389888"/>
-            <a:ext cx="1371600" cy="274320"/>
-          </a:xfrm>
-          <a:prstGeom prst="rect">
-            <a:avLst/>
-          </a:prstGeom>
-          <a:noFill/>
-        </p:spPr>
-        <p:txBody>
-          <a:bodyPr wrap="square" anchor="t" lIns="25400" rIns="25400" tIns="12700" bIns="12700">
-            <a:spAutoFit/>
-          </a:bodyPr>
-          <a:lstStyle/>
-          <a:p>
-            <a:pPr algn="l">
-              <a:lnSpc>
-                <a:spcPct val="100000"/>
-              </a:lnSpc>
-            </a:pPr>
-            <a:r>
-              <a:rPr sz="950" b="1" i="0">
-                <a:solidFill>
-                  <a:srgbClr val="252A31"/>
-                </a:solidFill>
-                <a:latin typeface="Meiryo"/>
-              </a:rPr>
-              <a:t>△ 検討中</a:t>
-            </a:r>
-          </a:p>
-        </p:txBody>
-      </p:sp>
-      <p:sp>
-        <p:nvSpPr>
-          <p:cNvPr id="19" name="Rectangle 18"/>
-          <p:cNvSpPr/>
-          <p:nvPr/>
-        </p:nvSpPr>
-        <p:spPr>
-          <a:xfrm>
-            <a:off x="5029200" y="1463040"/>
-            <a:ext cx="146304" cy="146304"/>
-          </a:xfrm>
-          <a:prstGeom prst="rect">
-            <a:avLst/>
-          </a:prstGeom>
-          <a:solidFill>
-            <a:srgbClr val="B03A2E"/>
-          </a:solidFill>
-          <a:ln>
-            <a:noFill/>
-          </a:ln>
-          <a:effectLst/>
-        </p:spPr>
-        <p:style>
-          <a:lnRef idx="1">
-            <a:schemeClr val="accent1"/>
-          </a:lnRef>
-          <a:fillRef idx="3">
-            <a:schemeClr val="accent1"/>
-          </a:fillRef>
-          <a:effectRef idx="2">
-            <a:schemeClr val="accent1"/>
-          </a:effectRef>
-          <a:fontRef idx="minor">
-            <a:schemeClr val="lt1"/>
-          </a:fontRef>
-        </p:style>
-        <p:txBody>
-          <a:bodyPr rtlCol="0" anchor="ctr"/>
-          <a:lstStyle/>
-          <a:p>
-            <a:pPr algn="ctr"/>
-          </a:p>
-        </p:txBody>
-      </p:sp>
-      <p:sp>
-        <p:nvSpPr>
-          <p:cNvPr id="20" name="TextBox 19"/>
-          <p:cNvSpPr txBox="1"/>
-          <p:nvPr/>
-        </p:nvSpPr>
-        <p:spPr>
-          <a:xfrm>
-            <a:off x="5212080" y="1389888"/>
-            <a:ext cx="1371600" cy="274320"/>
-          </a:xfrm>
-          <a:prstGeom prst="rect">
-            <a:avLst/>
-          </a:prstGeom>
-          <a:noFill/>
-        </p:spPr>
-        <p:txBody>
-          <a:bodyPr wrap="square" anchor="t" lIns="25400" rIns="25400" tIns="12700" bIns="12700">
-            <a:spAutoFit/>
-          </a:bodyPr>
-          <a:lstStyle/>
-          <a:p>
-            <a:pPr algn="l">
-              <a:lnSpc>
-                <a:spcPct val="100000"/>
-              </a:lnSpc>
-            </a:pPr>
-            <a:r>
-              <a:rPr sz="950" b="1" i="0">
-                <a:solidFill>
-                  <a:srgbClr val="252A31"/>
-                </a:solidFill>
-                <a:latin typeface="Meiryo"/>
-              </a:rPr>
-              <a:t>× 未着手</a:t>
+              <a:t>進捗レベルの目安 ▶ Lv1：案の絞り込み（複数案・検討中）／ Lv2：1案確定・スコープ/機能理解は途上／ Lv3：To-Be・使用アプリ/アーキが具体化／ Lv4：定量効果まで概ね完成</a:t>
             </a:r>
           </a:p>
         </p:txBody>
       </p:sp>
       <p:graphicFrame>
         <p:nvGraphicFramePr>
-          <p:cNvPr id="21" name="Table 20"/>
+          <p:cNvPr id="14" name="Table 13"/>
           <p:cNvGraphicFramePr>
             <a:graphicFrameLocks noGrp="1"/>
           </p:cNvGraphicFramePr>
           <p:nvPr/>
         </p:nvGraphicFramePr>
         <p:xfrm>
-          <a:off x="502920" y="1783080"/>
-          <a:ext cx="11201400" cy="4709160"/>
+          <a:off x="502920" y="1938528"/>
+          <a:ext cx="11201400" cy="4590288"/>
         </p:xfrm>
         <a:graphic>
           <a:graphicData uri="http://schemas.openxmlformats.org/drawingml/2006/table">
@@ -5227,12 +4934,13 @@
                 <a:tableStyleId>{5C22544A-7EE6-4342-B048-85BDC9FD1C3A}</a:tableStyleId>
               </a:tblPr>
               <a:tblGrid>
-                <a:gridCol w="1600200"/>
-                <a:gridCol w="2971800"/>
-                <a:gridCol w="3291840"/>
-                <a:gridCol w="3337560"/>
+                <a:gridCol w="685800"/>
+                <a:gridCol w="960120"/>
+                <a:gridCol w="1828800"/>
+                <a:gridCol w="3840480"/>
+                <a:gridCol w="3886200"/>
               </a:tblGrid>
-              <a:tr h="384048">
+              <a:tr h="365760">
                 <a:tc>
                   <a:txBody>
                     <a:bodyPr wrap="square"/>
@@ -5250,7 +4958,7 @@
                           </a:solidFill>
                           <a:latin typeface="Meiryo"/>
                         </a:rPr>
-                        <a:t>チーム / 絞り込み</a:t>
+                        <a:t>チーム</a:t>
                       </a:r>
                     </a:p>
                   </a:txBody>
@@ -5277,7 +4985,34 @@
                           </a:solidFill>
                           <a:latin typeface="Meiryo"/>
                         </a:rPr>
-                        <a:t>1案への絞り込み状況</a:t>
+                        <a:t>絞り込み</a:t>
+                      </a:r>
+                    </a:p>
+                  </a:txBody>
+                  <a:tcPr marL="63500" marR="63500" marT="25400" marB="25400" anchor="ctr">
+                    <a:solidFill>
+                      <a:srgbClr val="1F385C"/>
+                    </a:solidFill>
+                  </a:tcPr>
+                </a:tc>
+                <a:tc>
+                  <a:txBody>
+                    <a:bodyPr wrap="square"/>
+                    <a:lstStyle/>
+                    <a:p>
+                      <a:pPr algn="ctr">
+                        <a:lnSpc>
+                          <a:spcPct val="98000"/>
+                        </a:lnSpc>
+                      </a:pPr>
+                      <a:r>
+                        <a:rPr sz="1050" b="1">
+                          <a:solidFill>
+                            <a:srgbClr val="FFFFFF"/>
+                          </a:solidFill>
+                          <a:latin typeface="Meiryo"/>
+                        </a:rPr>
+                        <a:t>進捗レベル</a:t>
                       </a:r>
                     </a:p>
                   </a:txBody>
@@ -5342,7 +5077,7 @@
                   </a:tcPr>
                 </a:tc>
               </a:tr>
-              <a:tr h="393192">
+              <a:tr h="384048">
                 <a:tc>
                   <a:txBody>
                     <a:bodyPr wrap="square"/>
@@ -5354,13 +5089,13 @@
                         </a:lnSpc>
                       </a:pPr>
                       <a:r>
-                        <a:rPr sz="1100" b="1">
+                        <a:rPr sz="1050" b="1">
                           <a:solidFill>
-                            <a:srgbClr val="C98A1B"/>
+                            <a:srgbClr val="1F385C"/>
                           </a:solidFill>
                           <a:latin typeface="Meiryo"/>
                         </a:rPr>
-                        <a:t>チーム 1   △</a:t>
+                        <a:t>チーム1</a:t>
                       </a:r>
                     </a:p>
                   </a:txBody>
@@ -5381,13 +5116,40 @@
                         </a:lnSpc>
                       </a:pPr>
                       <a:r>
-                        <a:rPr sz="1000" b="1">
+                        <a:rPr sz="1100" b="1">
+                          <a:solidFill>
+                            <a:srgbClr val="C98A1B"/>
+                          </a:solidFill>
+                          <a:latin typeface="Meiryo"/>
+                        </a:rPr>
+                        <a:t>未</a:t>
+                      </a:r>
+                    </a:p>
+                  </a:txBody>
+                  <a:tcPr marL="63500" marR="63500" marT="25400" marB="25400" anchor="ctr">
+                    <a:solidFill>
+                      <a:srgbClr val="FBF0DA"/>
+                    </a:solidFill>
+                  </a:tcPr>
+                </a:tc>
+                <a:tc>
+                  <a:txBody>
+                    <a:bodyPr wrap="square"/>
+                    <a:lstStyle/>
+                    <a:p>
+                      <a:pPr algn="l">
+                        <a:lnSpc>
+                          <a:spcPct val="98000"/>
+                        </a:lnSpc>
+                      </a:pPr>
+                      <a:r>
+                        <a:rPr sz="900" b="0">
                           <a:solidFill>
                             <a:srgbClr val="252A31"/>
                           </a:solidFill>
                           <a:latin typeface="Meiryo"/>
                         </a:rPr>
-                        <a:t>2案（未確定）</a:t>
+                        <a:t/>
                       </a:r>
                     </a:p>
                   </a:txBody>
@@ -5408,7 +5170,7 @@
                         </a:lnSpc>
                       </a:pPr>
                       <a:r>
-                        <a:rPr sz="930" b="0">
+                        <a:rPr sz="919" b="0">
                           <a:solidFill>
                             <a:srgbClr val="252A31"/>
                           </a:solidFill>
@@ -5435,7 +5197,7 @@
                         </a:lnSpc>
                       </a:pPr>
                       <a:r>
-                        <a:rPr sz="930" b="0">
+                        <a:rPr sz="919" b="0">
                           <a:solidFill>
                             <a:srgbClr val="252A31"/>
                           </a:solidFill>
@@ -5452,7 +5214,7 @@
                   </a:tcPr>
                 </a:tc>
               </a:tr>
-              <a:tr h="393192">
+              <a:tr h="384048">
                 <a:tc>
                   <a:txBody>
                     <a:bodyPr wrap="square"/>
@@ -5464,13 +5226,13 @@
                         </a:lnSpc>
                       </a:pPr>
                       <a:r>
-                        <a:rPr sz="1100" b="1">
+                        <a:rPr sz="1050" b="1">
                           <a:solidFill>
-                            <a:srgbClr val="C98A1B"/>
+                            <a:srgbClr val="1F385C"/>
                           </a:solidFill>
                           <a:latin typeface="Meiryo"/>
                         </a:rPr>
-                        <a:t>チーム 2   △</a:t>
+                        <a:t>チーム2</a:t>
                       </a:r>
                     </a:p>
                   </a:txBody>
@@ -5491,13 +5253,40 @@
                         </a:lnSpc>
                       </a:pPr>
                       <a:r>
-                        <a:rPr sz="1000" b="1">
+                        <a:rPr sz="1100" b="1">
+                          <a:solidFill>
+                            <a:srgbClr val="C98A1B"/>
+                          </a:solidFill>
+                          <a:latin typeface="Meiryo"/>
+                        </a:rPr>
+                        <a:t>未</a:t>
+                      </a:r>
+                    </a:p>
+                  </a:txBody>
+                  <a:tcPr marL="63500" marR="63500" marT="25400" marB="25400" anchor="ctr">
+                    <a:solidFill>
+                      <a:srgbClr val="FBF0DA"/>
+                    </a:solidFill>
+                  </a:tcPr>
+                </a:tc>
+                <a:tc>
+                  <a:txBody>
+                    <a:bodyPr wrap="square"/>
+                    <a:lstStyle/>
+                    <a:p>
+                      <a:pPr algn="l">
+                        <a:lnSpc>
+                          <a:spcPct val="98000"/>
+                        </a:lnSpc>
+                      </a:pPr>
+                      <a:r>
+                        <a:rPr sz="900" b="0">
                           <a:solidFill>
                             <a:srgbClr val="252A31"/>
                           </a:solidFill>
                           <a:latin typeface="Meiryo"/>
                         </a:rPr>
-                        <a:t>有力案あり</a:t>
+                        <a:t/>
                       </a:r>
                     </a:p>
                   </a:txBody>
@@ -5518,7 +5307,7 @@
                         </a:lnSpc>
                       </a:pPr>
                       <a:r>
-                        <a:rPr sz="930" b="0">
+                        <a:rPr sz="919" b="0">
                           <a:solidFill>
                             <a:srgbClr val="252A31"/>
                           </a:solidFill>
@@ -5545,7 +5334,7 @@
                         </a:lnSpc>
                       </a:pPr>
                       <a:r>
-                        <a:rPr sz="930" b="0">
+                        <a:rPr sz="919" b="0">
                           <a:solidFill>
                             <a:srgbClr val="252A31"/>
                           </a:solidFill>
@@ -5562,7 +5351,7 @@
                   </a:tcPr>
                 </a:tc>
               </a:tr>
-              <a:tr h="393192">
+              <a:tr h="384048">
                 <a:tc>
                   <a:txBody>
                     <a:bodyPr wrap="square"/>
@@ -5574,13 +5363,13 @@
                         </a:lnSpc>
                       </a:pPr>
                       <a:r>
-                        <a:rPr sz="1100" b="1">
+                        <a:rPr sz="1050" b="1">
                           <a:solidFill>
-                            <a:srgbClr val="2E8B9E"/>
+                            <a:srgbClr val="1F385C"/>
                           </a:solidFill>
                           <a:latin typeface="Meiryo"/>
                         </a:rPr>
-                        <a:t>チーム 3   ○</a:t>
+                        <a:t>チーム3</a:t>
                       </a:r>
                     </a:p>
                   </a:txBody>
@@ -5601,13 +5390,40 @@
                         </a:lnSpc>
                       </a:pPr>
                       <a:r>
-                        <a:rPr sz="1000" b="1">
+                        <a:rPr sz="1100" b="1">
+                          <a:solidFill>
+                            <a:srgbClr val="3F8F5B"/>
+                          </a:solidFill>
+                          <a:latin typeface="Meiryo"/>
+                        </a:rPr>
+                        <a:t>済</a:t>
+                      </a:r>
+                    </a:p>
+                  </a:txBody>
+                  <a:tcPr marL="63500" marR="63500" marT="25400" marB="25400" anchor="ctr">
+                    <a:solidFill>
+                      <a:srgbClr val="E4F1E9"/>
+                    </a:solidFill>
+                  </a:tcPr>
+                </a:tc>
+                <a:tc>
+                  <a:txBody>
+                    <a:bodyPr wrap="square"/>
+                    <a:lstStyle/>
+                    <a:p>
+                      <a:pPr algn="l">
+                        <a:lnSpc>
+                          <a:spcPct val="98000"/>
+                        </a:lnSpc>
+                      </a:pPr>
+                      <a:r>
+                        <a:rPr sz="900" b="0">
                           <a:solidFill>
                             <a:srgbClr val="252A31"/>
                           </a:solidFill>
                           <a:latin typeface="Meiryo"/>
                         </a:rPr>
-                        <a:t>1案（仮案）</a:t>
+                        <a:t/>
                       </a:r>
                     </a:p>
                   </a:txBody>
@@ -5628,7 +5444,7 @@
                         </a:lnSpc>
                       </a:pPr>
                       <a:r>
-                        <a:rPr sz="930" b="0">
+                        <a:rPr sz="919" b="0">
                           <a:solidFill>
                             <a:srgbClr val="252A31"/>
                           </a:solidFill>
@@ -5655,7 +5471,7 @@
                         </a:lnSpc>
                       </a:pPr>
                       <a:r>
-                        <a:rPr sz="930" b="0">
+                        <a:rPr sz="919" b="0">
                           <a:solidFill>
                             <a:srgbClr val="252A31"/>
                           </a:solidFill>
@@ -5672,7 +5488,7 @@
                   </a:tcPr>
                 </a:tc>
               </a:tr>
-              <a:tr h="393192">
+              <a:tr h="384048">
                 <a:tc>
                   <a:txBody>
                     <a:bodyPr wrap="square"/>
@@ -5684,13 +5500,13 @@
                         </a:lnSpc>
                       </a:pPr>
                       <a:r>
-                        <a:rPr sz="1100" b="1">
+                        <a:rPr sz="1050" b="1">
                           <a:solidFill>
-                            <a:srgbClr val="2E8B9E"/>
+                            <a:srgbClr val="1F385C"/>
                           </a:solidFill>
                           <a:latin typeface="Meiryo"/>
                         </a:rPr>
-                        <a:t>チーム 4   ○</a:t>
+                        <a:t>チーム4</a:t>
                       </a:r>
                     </a:p>
                   </a:txBody>
@@ -5711,13 +5527,40 @@
                         </a:lnSpc>
                       </a:pPr>
                       <a:r>
-                        <a:rPr sz="1000" b="1">
+                        <a:rPr sz="1100" b="1">
+                          <a:solidFill>
+                            <a:srgbClr val="3F8F5B"/>
+                          </a:solidFill>
+                          <a:latin typeface="Meiryo"/>
+                        </a:rPr>
+                        <a:t>済</a:t>
+                      </a:r>
+                    </a:p>
+                  </a:txBody>
+                  <a:tcPr marL="63500" marR="63500" marT="25400" marB="25400" anchor="ctr">
+                    <a:solidFill>
+                      <a:srgbClr val="E4F1E9"/>
+                    </a:solidFill>
+                  </a:tcPr>
+                </a:tc>
+                <a:tc>
+                  <a:txBody>
+                    <a:bodyPr wrap="square"/>
+                    <a:lstStyle/>
+                    <a:p>
+                      <a:pPr algn="l">
+                        <a:lnSpc>
+                          <a:spcPct val="98000"/>
+                        </a:lnSpc>
+                      </a:pPr>
+                      <a:r>
+                        <a:rPr sz="900" b="0">
                           <a:solidFill>
                             <a:srgbClr val="252A31"/>
                           </a:solidFill>
                           <a:latin typeface="Meiryo"/>
                         </a:rPr>
-                        <a:t>1案（仮案）</a:t>
+                        <a:t/>
                       </a:r>
                     </a:p>
                   </a:txBody>
@@ -5738,7 +5581,7 @@
                         </a:lnSpc>
                       </a:pPr>
                       <a:r>
-                        <a:rPr sz="930" b="0">
+                        <a:rPr sz="919" b="0">
                           <a:solidFill>
                             <a:srgbClr val="252A31"/>
                           </a:solidFill>
@@ -5765,7 +5608,7 @@
                         </a:lnSpc>
                       </a:pPr>
                       <a:r>
-                        <a:rPr sz="930" b="0">
+                        <a:rPr sz="919" b="0">
                           <a:solidFill>
                             <a:srgbClr val="252A31"/>
                           </a:solidFill>
@@ -5782,7 +5625,7 @@
                   </a:tcPr>
                 </a:tc>
               </a:tr>
-              <a:tr h="393192">
+              <a:tr h="384048">
                 <a:tc>
                   <a:txBody>
                     <a:bodyPr wrap="square"/>
@@ -5794,13 +5637,13 @@
                         </a:lnSpc>
                       </a:pPr>
                       <a:r>
-                        <a:rPr sz="1100" b="1">
+                        <a:rPr sz="1050" b="1">
                           <a:solidFill>
-                            <a:srgbClr val="C98A1B"/>
+                            <a:srgbClr val="1F385C"/>
                           </a:solidFill>
                           <a:latin typeface="Meiryo"/>
                         </a:rPr>
-                        <a:t>チーム 5   △</a:t>
+                        <a:t>チーム5</a:t>
                       </a:r>
                     </a:p>
                   </a:txBody>
@@ -5821,13 +5664,40 @@
                         </a:lnSpc>
                       </a:pPr>
                       <a:r>
-                        <a:rPr sz="1000" b="1">
+                        <a:rPr sz="1100" b="1">
+                          <a:solidFill>
+                            <a:srgbClr val="C98A1B"/>
+                          </a:solidFill>
+                          <a:latin typeface="Meiryo"/>
+                        </a:rPr>
+                        <a:t>未</a:t>
+                      </a:r>
+                    </a:p>
+                  </a:txBody>
+                  <a:tcPr marL="63500" marR="63500" marT="25400" marB="25400" anchor="ctr">
+                    <a:solidFill>
+                      <a:srgbClr val="FBF0DA"/>
+                    </a:solidFill>
+                  </a:tcPr>
+                </a:tc>
+                <a:tc>
+                  <a:txBody>
+                    <a:bodyPr wrap="square"/>
+                    <a:lstStyle/>
+                    <a:p>
+                      <a:pPr algn="l">
+                        <a:lnSpc>
+                          <a:spcPct val="98000"/>
+                        </a:lnSpc>
+                      </a:pPr>
+                      <a:r>
+                        <a:rPr sz="900" b="0">
                           <a:solidFill>
                             <a:srgbClr val="252A31"/>
                           </a:solidFill>
                           <a:latin typeface="Meiryo"/>
                         </a:rPr>
-                        <a:t>検討中</a:t>
+                        <a:t/>
                       </a:r>
                     </a:p>
                   </a:txBody>
@@ -5848,7 +5718,7 @@
                         </a:lnSpc>
                       </a:pPr>
                       <a:r>
-                        <a:rPr sz="930" b="0">
+                        <a:rPr sz="919" b="0">
                           <a:solidFill>
                             <a:srgbClr val="252A31"/>
                           </a:solidFill>
@@ -5875,7 +5745,7 @@
                         </a:lnSpc>
                       </a:pPr>
                       <a:r>
-                        <a:rPr sz="930" b="0">
+                        <a:rPr sz="919" b="0">
                           <a:solidFill>
                             <a:srgbClr val="252A31"/>
                           </a:solidFill>
@@ -5892,7 +5762,7 @@
                   </a:tcPr>
                 </a:tc>
               </a:tr>
-              <a:tr h="393192">
+              <a:tr h="384048">
                 <a:tc>
                   <a:txBody>
                     <a:bodyPr wrap="square"/>
@@ -5904,13 +5774,13 @@
                         </a:lnSpc>
                       </a:pPr>
                       <a:r>
-                        <a:rPr sz="1100" b="1">
+                        <a:rPr sz="1050" b="1">
                           <a:solidFill>
-                            <a:srgbClr val="C98A1B"/>
+                            <a:srgbClr val="1F385C"/>
                           </a:solidFill>
                           <a:latin typeface="Meiryo"/>
                         </a:rPr>
-                        <a:t>チーム 6   △</a:t>
+                        <a:t>チーム6</a:t>
                       </a:r>
                     </a:p>
                   </a:txBody>
@@ -5931,13 +5801,40 @@
                         </a:lnSpc>
                       </a:pPr>
                       <a:r>
-                        <a:rPr sz="1000" b="1">
+                        <a:rPr sz="1100" b="1">
+                          <a:solidFill>
+                            <a:srgbClr val="C98A1B"/>
+                          </a:solidFill>
+                          <a:latin typeface="Meiryo"/>
+                        </a:rPr>
+                        <a:t>未</a:t>
+                      </a:r>
+                    </a:p>
+                  </a:txBody>
+                  <a:tcPr marL="63500" marR="63500" marT="25400" marB="25400" anchor="ctr">
+                    <a:solidFill>
+                      <a:srgbClr val="FBF0DA"/>
+                    </a:solidFill>
+                  </a:tcPr>
+                </a:tc>
+                <a:tc>
+                  <a:txBody>
+                    <a:bodyPr wrap="square"/>
+                    <a:lstStyle/>
+                    <a:p>
+                      <a:pPr algn="l">
+                        <a:lnSpc>
+                          <a:spcPct val="98000"/>
+                        </a:lnSpc>
+                      </a:pPr>
+                      <a:r>
+                        <a:rPr sz="900" b="0">
                           <a:solidFill>
                             <a:srgbClr val="252A31"/>
                           </a:solidFill>
                           <a:latin typeface="Meiryo"/>
                         </a:rPr>
-                        <a:t>内容未固化</a:t>
+                        <a:t/>
                       </a:r>
                     </a:p>
                   </a:txBody>
@@ -5958,7 +5855,7 @@
                         </a:lnSpc>
                       </a:pPr>
                       <a:r>
-                        <a:rPr sz="930" b="0">
+                        <a:rPr sz="919" b="0">
                           <a:solidFill>
                             <a:srgbClr val="252A31"/>
                           </a:solidFill>
@@ -5985,7 +5882,7 @@
                         </a:lnSpc>
                       </a:pPr>
                       <a:r>
-                        <a:rPr sz="930" b="0">
+                        <a:rPr sz="919" b="0">
                           <a:solidFill>
                             <a:srgbClr val="252A31"/>
                           </a:solidFill>
@@ -6002,7 +5899,7 @@
                   </a:tcPr>
                 </a:tc>
               </a:tr>
-              <a:tr h="393192">
+              <a:tr h="384048">
                 <a:tc>
                   <a:txBody>
                     <a:bodyPr wrap="square"/>
@@ -6014,13 +5911,13 @@
                         </a:lnSpc>
                       </a:pPr>
                       <a:r>
-                        <a:rPr sz="1100" b="1">
+                        <a:rPr sz="1050" b="1">
                           <a:solidFill>
-                            <a:srgbClr val="3F8F5B"/>
+                            <a:srgbClr val="1F385C"/>
                           </a:solidFill>
                           <a:latin typeface="Meiryo"/>
                         </a:rPr>
-                        <a:t>チーム 7   ◎</a:t>
+                        <a:t>チーム7</a:t>
                       </a:r>
                     </a:p>
                   </a:txBody>
@@ -6041,13 +5938,40 @@
                         </a:lnSpc>
                       </a:pPr>
                       <a:r>
-                        <a:rPr sz="1000" b="1">
+                        <a:rPr sz="1100" b="1">
+                          <a:solidFill>
+                            <a:srgbClr val="3F8F5B"/>
+                          </a:solidFill>
+                          <a:latin typeface="Meiryo"/>
+                        </a:rPr>
+                        <a:t>済</a:t>
+                      </a:r>
+                    </a:p>
+                  </a:txBody>
+                  <a:tcPr marL="63500" marR="63500" marT="25400" marB="25400" anchor="ctr">
+                    <a:solidFill>
+                      <a:srgbClr val="E4F1E9"/>
+                    </a:solidFill>
+                  </a:tcPr>
+                </a:tc>
+                <a:tc>
+                  <a:txBody>
+                    <a:bodyPr wrap="square"/>
+                    <a:lstStyle/>
+                    <a:p>
+                      <a:pPr algn="l">
+                        <a:lnSpc>
+                          <a:spcPct val="98000"/>
+                        </a:lnSpc>
+                      </a:pPr>
+                      <a:r>
+                        <a:rPr sz="900" b="0">
                           <a:solidFill>
                             <a:srgbClr val="252A31"/>
                           </a:solidFill>
                           <a:latin typeface="Meiryo"/>
                         </a:rPr>
-                        <a:t>ほぼ完成</a:t>
+                        <a:t/>
                       </a:r>
                     </a:p>
                   </a:txBody>
@@ -6068,7 +5992,7 @@
                         </a:lnSpc>
                       </a:pPr>
                       <a:r>
-                        <a:rPr sz="930" b="0">
+                        <a:rPr sz="919" b="0">
                           <a:solidFill>
                             <a:srgbClr val="252A31"/>
                           </a:solidFill>
@@ -6095,7 +6019,7 @@
                         </a:lnSpc>
                       </a:pPr>
                       <a:r>
-                        <a:rPr sz="930" b="0">
+                        <a:rPr sz="919" b="0">
                           <a:solidFill>
                             <a:srgbClr val="252A31"/>
                           </a:solidFill>
@@ -6112,7 +6036,7 @@
                   </a:tcPr>
                 </a:tc>
               </a:tr>
-              <a:tr h="393192">
+              <a:tr h="384048">
                 <a:tc>
                   <a:txBody>
                     <a:bodyPr wrap="square"/>
@@ -6124,13 +6048,13 @@
                         </a:lnSpc>
                       </a:pPr>
                       <a:r>
-                        <a:rPr sz="1100" b="1">
+                        <a:rPr sz="1050" b="1">
                           <a:solidFill>
-                            <a:srgbClr val="C98A1B"/>
+                            <a:srgbClr val="1F385C"/>
                           </a:solidFill>
                           <a:latin typeface="Meiryo"/>
                         </a:rPr>
-                        <a:t>チーム 8   △</a:t>
+                        <a:t>チーム8</a:t>
                       </a:r>
                     </a:p>
                   </a:txBody>
@@ -6151,13 +6075,40 @@
                         </a:lnSpc>
                       </a:pPr>
                       <a:r>
-                        <a:rPr sz="1000" b="1">
+                        <a:rPr sz="1100" b="1">
+                          <a:solidFill>
+                            <a:srgbClr val="C98A1B"/>
+                          </a:solidFill>
+                          <a:latin typeface="Meiryo"/>
+                        </a:rPr>
+                        <a:t>未</a:t>
+                      </a:r>
+                    </a:p>
+                  </a:txBody>
+                  <a:tcPr marL="63500" marR="63500" marT="25400" marB="25400" anchor="ctr">
+                    <a:solidFill>
+                      <a:srgbClr val="FBF0DA"/>
+                    </a:solidFill>
+                  </a:tcPr>
+                </a:tc>
+                <a:tc>
+                  <a:txBody>
+                    <a:bodyPr wrap="square"/>
+                    <a:lstStyle/>
+                    <a:p>
+                      <a:pPr algn="l">
+                        <a:lnSpc>
+                          <a:spcPct val="98000"/>
+                        </a:lnSpc>
+                      </a:pPr>
+                      <a:r>
+                        <a:rPr sz="900" b="0">
                           <a:solidFill>
                             <a:srgbClr val="252A31"/>
                           </a:solidFill>
                           <a:latin typeface="Meiryo"/>
                         </a:rPr>
-                        <a:t>絞込み相談中</a:t>
+                        <a:t/>
                       </a:r>
                     </a:p>
                   </a:txBody>
@@ -6178,7 +6129,7 @@
                         </a:lnSpc>
                       </a:pPr>
                       <a:r>
-                        <a:rPr sz="930" b="0">
+                        <a:rPr sz="919" b="0">
                           <a:solidFill>
                             <a:srgbClr val="252A31"/>
                           </a:solidFill>
@@ -6205,7 +6156,7 @@
                         </a:lnSpc>
                       </a:pPr>
                       <a:r>
-                        <a:rPr sz="930" b="0">
+                        <a:rPr sz="919" b="0">
                           <a:solidFill>
                             <a:srgbClr val="252A31"/>
                           </a:solidFill>
@@ -6222,7 +6173,7 @@
                   </a:tcPr>
                 </a:tc>
               </a:tr>
-              <a:tr h="393192">
+              <a:tr h="384048">
                 <a:tc>
                   <a:txBody>
                     <a:bodyPr wrap="square"/>
@@ -6234,13 +6185,13 @@
                         </a:lnSpc>
                       </a:pPr>
                       <a:r>
-                        <a:rPr sz="1100" b="1">
+                        <a:rPr sz="1050" b="1">
                           <a:solidFill>
-                            <a:srgbClr val="B03A2E"/>
+                            <a:srgbClr val="1F385C"/>
                           </a:solidFill>
                           <a:latin typeface="Meiryo"/>
                         </a:rPr>
-                        <a:t>チーム 9   ×</a:t>
+                        <a:t>チーム9</a:t>
                       </a:r>
                     </a:p>
                   </a:txBody>
@@ -6261,13 +6212,40 @@
                         </a:lnSpc>
                       </a:pPr>
                       <a:r>
-                        <a:rPr sz="1000" b="1">
+                        <a:rPr sz="1100" b="1">
+                          <a:solidFill>
+                            <a:srgbClr val="C98A1B"/>
+                          </a:solidFill>
+                          <a:latin typeface="Meiryo"/>
+                        </a:rPr>
+                        <a:t>未</a:t>
+                      </a:r>
+                    </a:p>
+                  </a:txBody>
+                  <a:tcPr marL="63500" marR="63500" marT="25400" marB="25400" anchor="ctr">
+                    <a:solidFill>
+                      <a:srgbClr val="FBF0DA"/>
+                    </a:solidFill>
+                  </a:tcPr>
+                </a:tc>
+                <a:tc>
+                  <a:txBody>
+                    <a:bodyPr wrap="square"/>
+                    <a:lstStyle/>
+                    <a:p>
+                      <a:pPr algn="l">
+                        <a:lnSpc>
+                          <a:spcPct val="98000"/>
+                        </a:lnSpc>
+                      </a:pPr>
+                      <a:r>
+                        <a:rPr sz="900" b="0">
                           <a:solidFill>
                             <a:srgbClr val="252A31"/>
                           </a:solidFill>
                           <a:latin typeface="Meiryo"/>
                         </a:rPr>
-                        <a:t>未集約</a:t>
+                        <a:t/>
                       </a:r>
                     </a:p>
                   </a:txBody>
@@ -6288,7 +6266,7 @@
                         </a:lnSpc>
                       </a:pPr>
                       <a:r>
-                        <a:rPr sz="930" b="0">
+                        <a:rPr sz="919" b="0">
                           <a:solidFill>
                             <a:srgbClr val="252A31"/>
                           </a:solidFill>
@@ -6315,7 +6293,7 @@
                         </a:lnSpc>
                       </a:pPr>
                       <a:r>
-                        <a:rPr sz="930" b="0">
+                        <a:rPr sz="919" b="0">
                           <a:solidFill>
                             <a:srgbClr val="252A31"/>
                           </a:solidFill>
@@ -6332,7 +6310,7 @@
                   </a:tcPr>
                 </a:tc>
               </a:tr>
-              <a:tr h="393192">
+              <a:tr h="384048">
                 <a:tc>
                   <a:txBody>
                     <a:bodyPr wrap="square"/>
@@ -6344,13 +6322,13 @@
                         </a:lnSpc>
                       </a:pPr>
                       <a:r>
-                        <a:rPr sz="1100" b="1">
+                        <a:rPr sz="1050" b="1">
                           <a:solidFill>
-                            <a:srgbClr val="3F8F5B"/>
+                            <a:srgbClr val="1F385C"/>
                           </a:solidFill>
                           <a:latin typeface="Meiryo"/>
                         </a:rPr>
-                        <a:t>チーム 10   ◎</a:t>
+                        <a:t>チーム10</a:t>
                       </a:r>
                     </a:p>
                   </a:txBody>
@@ -6371,13 +6349,40 @@
                         </a:lnSpc>
                       </a:pPr>
                       <a:r>
-                        <a:rPr sz="1000" b="1">
+                        <a:rPr sz="1100" b="1">
+                          <a:solidFill>
+                            <a:srgbClr val="3F8F5B"/>
+                          </a:solidFill>
+                          <a:latin typeface="Meiryo"/>
+                        </a:rPr>
+                        <a:t>済</a:t>
+                      </a:r>
+                    </a:p>
+                  </a:txBody>
+                  <a:tcPr marL="63500" marR="63500" marT="25400" marB="25400" anchor="ctr">
+                    <a:solidFill>
+                      <a:srgbClr val="E4F1E9"/>
+                    </a:solidFill>
+                  </a:tcPr>
+                </a:tc>
+                <a:tc>
+                  <a:txBody>
+                    <a:bodyPr wrap="square"/>
+                    <a:lstStyle/>
+                    <a:p>
+                      <a:pPr algn="l">
+                        <a:lnSpc>
+                          <a:spcPct val="98000"/>
+                        </a:lnSpc>
+                      </a:pPr>
+                      <a:r>
+                        <a:rPr sz="900" b="0">
                           <a:solidFill>
                             <a:srgbClr val="252A31"/>
                           </a:solidFill>
                           <a:latin typeface="Meiryo"/>
                         </a:rPr>
-                        <a:t>叩き台完成</a:t>
+                        <a:t/>
                       </a:r>
                     </a:p>
                   </a:txBody>
@@ -6398,7 +6403,7 @@
                         </a:lnSpc>
                       </a:pPr>
                       <a:r>
-                        <a:rPr sz="930" b="0">
+                        <a:rPr sz="919" b="0">
                           <a:solidFill>
                             <a:srgbClr val="252A31"/>
                           </a:solidFill>
@@ -6425,7 +6430,7 @@
                         </a:lnSpc>
                       </a:pPr>
                       <a:r>
-                        <a:rPr sz="930" b="0">
+                        <a:rPr sz="919" b="0">
                           <a:solidFill>
                             <a:srgbClr val="252A31"/>
                           </a:solidFill>
@@ -6442,7 +6447,7 @@
                   </a:tcPr>
                 </a:tc>
               </a:tr>
-              <a:tr h="393192">
+              <a:tr h="384048">
                 <a:tc>
                   <a:txBody>
                     <a:bodyPr wrap="square"/>
@@ -6454,13 +6459,13 @@
                         </a:lnSpc>
                       </a:pPr>
                       <a:r>
-                        <a:rPr sz="1100" b="1">
+                        <a:rPr sz="1050" b="1">
                           <a:solidFill>
-                            <a:srgbClr val="C98A1B"/>
+                            <a:srgbClr val="1F385C"/>
                           </a:solidFill>
                           <a:latin typeface="Meiryo"/>
                         </a:rPr>
-                        <a:t>チーム 11   △</a:t>
+                        <a:t>チーム11</a:t>
                       </a:r>
                     </a:p>
                   </a:txBody>
@@ -6481,13 +6486,40 @@
                         </a:lnSpc>
                       </a:pPr>
                       <a:r>
-                        <a:rPr sz="1000" b="1">
+                        <a:rPr sz="1100" b="1">
+                          <a:solidFill>
+                            <a:srgbClr val="C98A1B"/>
+                          </a:solidFill>
+                          <a:latin typeface="Meiryo"/>
+                        </a:rPr>
+                        <a:t>未</a:t>
+                      </a:r>
+                    </a:p>
+                  </a:txBody>
+                  <a:tcPr marL="63500" marR="63500" marT="25400" marB="25400" anchor="ctr">
+                    <a:solidFill>
+                      <a:srgbClr val="FBF0DA"/>
+                    </a:solidFill>
+                  </a:tcPr>
+                </a:tc>
+                <a:tc>
+                  <a:txBody>
+                    <a:bodyPr wrap="square"/>
+                    <a:lstStyle/>
+                    <a:p>
+                      <a:pPr algn="l">
+                        <a:lnSpc>
+                          <a:spcPct val="98000"/>
+                        </a:lnSpc>
+                      </a:pPr>
+                      <a:r>
+                        <a:rPr sz="900" b="0">
                           <a:solidFill>
                             <a:srgbClr val="252A31"/>
                           </a:solidFill>
                           <a:latin typeface="Meiryo"/>
                         </a:rPr>
-                        <a:t>2案（絞込中）</a:t>
+                        <a:t/>
                       </a:r>
                     </a:p>
                   </a:txBody>
@@ -6508,7 +6540,7 @@
                         </a:lnSpc>
                       </a:pPr>
                       <a:r>
-                        <a:rPr sz="930" b="0">
+                        <a:rPr sz="919" b="0">
                           <a:solidFill>
                             <a:srgbClr val="252A31"/>
                           </a:solidFill>
@@ -6535,7 +6567,7 @@
                         </a:lnSpc>
                       </a:pPr>
                       <a:r>
-                        <a:rPr sz="930" b="0">
+                        <a:rPr sz="919" b="0">
                           <a:solidFill>
                             <a:srgbClr val="252A31"/>
                           </a:solidFill>
@@ -6556,6 +6588,2371 @@
           </a:graphicData>
         </a:graphic>
       </p:graphicFrame>
+      <p:sp>
+        <p:nvSpPr>
+          <p:cNvPr id="15" name="Chevron 14"/>
+          <p:cNvSpPr/>
+          <p:nvPr/>
+        </p:nvSpPr>
+        <p:spPr>
+          <a:xfrm>
+            <a:off x="2276856" y="2418588"/>
+            <a:ext cx="274320" cy="155448"/>
+          </a:xfrm>
+          <a:prstGeom prst="chevron">
+            <a:avLst/>
+          </a:prstGeom>
+          <a:solidFill>
+            <a:srgbClr val="C98A1B"/>
+          </a:solidFill>
+          <a:ln>
+            <a:noFill/>
+          </a:ln>
+          <a:effectLst/>
+        </p:spPr>
+        <p:style>
+          <a:lnRef idx="1">
+            <a:schemeClr val="accent1"/>
+          </a:lnRef>
+          <a:fillRef idx="3">
+            <a:schemeClr val="accent1"/>
+          </a:fillRef>
+          <a:effectRef idx="2">
+            <a:schemeClr val="accent1"/>
+          </a:effectRef>
+          <a:fontRef idx="minor">
+            <a:schemeClr val="lt1"/>
+          </a:fontRef>
+        </p:style>
+        <p:txBody>
+          <a:bodyPr rtlCol="0" anchor="ctr"/>
+          <a:lstStyle/>
+          <a:p>
+            <a:pPr algn="ctr"/>
+          </a:p>
+        </p:txBody>
+      </p:sp>
+      <p:sp>
+        <p:nvSpPr>
+          <p:cNvPr id="16" name="Chevron 15"/>
+          <p:cNvSpPr/>
+          <p:nvPr/>
+        </p:nvSpPr>
+        <p:spPr>
+          <a:xfrm>
+            <a:off x="2528316" y="2418588"/>
+            <a:ext cx="274320" cy="155448"/>
+          </a:xfrm>
+          <a:prstGeom prst="chevron">
+            <a:avLst/>
+          </a:prstGeom>
+          <a:solidFill>
+            <a:srgbClr val="DDE1E7"/>
+          </a:solidFill>
+          <a:ln>
+            <a:noFill/>
+          </a:ln>
+          <a:effectLst/>
+        </p:spPr>
+        <p:style>
+          <a:lnRef idx="1">
+            <a:schemeClr val="accent1"/>
+          </a:lnRef>
+          <a:fillRef idx="3">
+            <a:schemeClr val="accent1"/>
+          </a:fillRef>
+          <a:effectRef idx="2">
+            <a:schemeClr val="accent1"/>
+          </a:effectRef>
+          <a:fontRef idx="minor">
+            <a:schemeClr val="lt1"/>
+          </a:fontRef>
+        </p:style>
+        <p:txBody>
+          <a:bodyPr rtlCol="0" anchor="ctr"/>
+          <a:lstStyle/>
+          <a:p>
+            <a:pPr algn="ctr"/>
+          </a:p>
+        </p:txBody>
+      </p:sp>
+      <p:sp>
+        <p:nvSpPr>
+          <p:cNvPr id="17" name="Chevron 16"/>
+          <p:cNvSpPr/>
+          <p:nvPr/>
+        </p:nvSpPr>
+        <p:spPr>
+          <a:xfrm>
+            <a:off x="2779776" y="2418588"/>
+            <a:ext cx="274320" cy="155448"/>
+          </a:xfrm>
+          <a:prstGeom prst="chevron">
+            <a:avLst/>
+          </a:prstGeom>
+          <a:solidFill>
+            <a:srgbClr val="DDE1E7"/>
+          </a:solidFill>
+          <a:ln>
+            <a:noFill/>
+          </a:ln>
+          <a:effectLst/>
+        </p:spPr>
+        <p:style>
+          <a:lnRef idx="1">
+            <a:schemeClr val="accent1"/>
+          </a:lnRef>
+          <a:fillRef idx="3">
+            <a:schemeClr val="accent1"/>
+          </a:fillRef>
+          <a:effectRef idx="2">
+            <a:schemeClr val="accent1"/>
+          </a:effectRef>
+          <a:fontRef idx="minor">
+            <a:schemeClr val="lt1"/>
+          </a:fontRef>
+        </p:style>
+        <p:txBody>
+          <a:bodyPr rtlCol="0" anchor="ctr"/>
+          <a:lstStyle/>
+          <a:p>
+            <a:pPr algn="ctr"/>
+          </a:p>
+        </p:txBody>
+      </p:sp>
+      <p:sp>
+        <p:nvSpPr>
+          <p:cNvPr id="18" name="Chevron 17"/>
+          <p:cNvSpPr/>
+          <p:nvPr/>
+        </p:nvSpPr>
+        <p:spPr>
+          <a:xfrm>
+            <a:off x="3031236" y="2418588"/>
+            <a:ext cx="274320" cy="155448"/>
+          </a:xfrm>
+          <a:prstGeom prst="chevron">
+            <a:avLst/>
+          </a:prstGeom>
+          <a:solidFill>
+            <a:srgbClr val="DDE1E7"/>
+          </a:solidFill>
+          <a:ln>
+            <a:noFill/>
+          </a:ln>
+          <a:effectLst/>
+        </p:spPr>
+        <p:style>
+          <a:lnRef idx="1">
+            <a:schemeClr val="accent1"/>
+          </a:lnRef>
+          <a:fillRef idx="3">
+            <a:schemeClr val="accent1"/>
+          </a:fillRef>
+          <a:effectRef idx="2">
+            <a:schemeClr val="accent1"/>
+          </a:effectRef>
+          <a:fontRef idx="minor">
+            <a:schemeClr val="lt1"/>
+          </a:fontRef>
+        </p:style>
+        <p:txBody>
+          <a:bodyPr rtlCol="0" anchor="ctr"/>
+          <a:lstStyle/>
+          <a:p>
+            <a:pPr algn="ctr"/>
+          </a:p>
+        </p:txBody>
+      </p:sp>
+      <p:sp>
+        <p:nvSpPr>
+          <p:cNvPr id="19" name="TextBox 18"/>
+          <p:cNvSpPr txBox="1"/>
+          <p:nvPr/>
+        </p:nvSpPr>
+        <p:spPr>
+          <a:xfrm>
+            <a:off x="3300984" y="2395728"/>
+            <a:ext cx="566928" cy="219456"/>
+          </a:xfrm>
+          <a:prstGeom prst="rect">
+            <a:avLst/>
+          </a:prstGeom>
+          <a:noFill/>
+        </p:spPr>
+        <p:txBody>
+          <a:bodyPr wrap="square" anchor="ctr" lIns="25400" rIns="25400" tIns="12700" bIns="12700">
+            <a:spAutoFit/>
+          </a:bodyPr>
+          <a:lstStyle/>
+          <a:p>
+            <a:pPr algn="l">
+              <a:lnSpc>
+                <a:spcPct val="100000"/>
+              </a:lnSpc>
+            </a:pPr>
+            <a:r>
+              <a:rPr sz="900" b="1" i="0">
+                <a:solidFill>
+                  <a:srgbClr val="C98A1B"/>
+                </a:solidFill>
+                <a:latin typeface="Meiryo"/>
+              </a:rPr>
+              <a:t>Lv1</a:t>
+            </a:r>
+          </a:p>
+        </p:txBody>
+      </p:sp>
+      <p:sp>
+        <p:nvSpPr>
+          <p:cNvPr id="20" name="Chevron 19"/>
+          <p:cNvSpPr/>
+          <p:nvPr/>
+        </p:nvSpPr>
+        <p:spPr>
+          <a:xfrm>
+            <a:off x="2276856" y="2802636"/>
+            <a:ext cx="274320" cy="155448"/>
+          </a:xfrm>
+          <a:prstGeom prst="chevron">
+            <a:avLst/>
+          </a:prstGeom>
+          <a:solidFill>
+            <a:srgbClr val="C98A1B"/>
+          </a:solidFill>
+          <a:ln>
+            <a:noFill/>
+          </a:ln>
+          <a:effectLst/>
+        </p:spPr>
+        <p:style>
+          <a:lnRef idx="1">
+            <a:schemeClr val="accent1"/>
+          </a:lnRef>
+          <a:fillRef idx="3">
+            <a:schemeClr val="accent1"/>
+          </a:fillRef>
+          <a:effectRef idx="2">
+            <a:schemeClr val="accent1"/>
+          </a:effectRef>
+          <a:fontRef idx="minor">
+            <a:schemeClr val="lt1"/>
+          </a:fontRef>
+        </p:style>
+        <p:txBody>
+          <a:bodyPr rtlCol="0" anchor="ctr"/>
+          <a:lstStyle/>
+          <a:p>
+            <a:pPr algn="ctr"/>
+          </a:p>
+        </p:txBody>
+      </p:sp>
+      <p:sp>
+        <p:nvSpPr>
+          <p:cNvPr id="21" name="Chevron 20"/>
+          <p:cNvSpPr/>
+          <p:nvPr/>
+        </p:nvSpPr>
+        <p:spPr>
+          <a:xfrm>
+            <a:off x="2528316" y="2802636"/>
+            <a:ext cx="274320" cy="155448"/>
+          </a:xfrm>
+          <a:prstGeom prst="chevron">
+            <a:avLst/>
+          </a:prstGeom>
+          <a:solidFill>
+            <a:srgbClr val="DDE1E7"/>
+          </a:solidFill>
+          <a:ln>
+            <a:noFill/>
+          </a:ln>
+          <a:effectLst/>
+        </p:spPr>
+        <p:style>
+          <a:lnRef idx="1">
+            <a:schemeClr val="accent1"/>
+          </a:lnRef>
+          <a:fillRef idx="3">
+            <a:schemeClr val="accent1"/>
+          </a:fillRef>
+          <a:effectRef idx="2">
+            <a:schemeClr val="accent1"/>
+          </a:effectRef>
+          <a:fontRef idx="minor">
+            <a:schemeClr val="lt1"/>
+          </a:fontRef>
+        </p:style>
+        <p:txBody>
+          <a:bodyPr rtlCol="0" anchor="ctr"/>
+          <a:lstStyle/>
+          <a:p>
+            <a:pPr algn="ctr"/>
+          </a:p>
+        </p:txBody>
+      </p:sp>
+      <p:sp>
+        <p:nvSpPr>
+          <p:cNvPr id="22" name="Chevron 21"/>
+          <p:cNvSpPr/>
+          <p:nvPr/>
+        </p:nvSpPr>
+        <p:spPr>
+          <a:xfrm>
+            <a:off x="2779776" y="2802636"/>
+            <a:ext cx="274320" cy="155448"/>
+          </a:xfrm>
+          <a:prstGeom prst="chevron">
+            <a:avLst/>
+          </a:prstGeom>
+          <a:solidFill>
+            <a:srgbClr val="DDE1E7"/>
+          </a:solidFill>
+          <a:ln>
+            <a:noFill/>
+          </a:ln>
+          <a:effectLst/>
+        </p:spPr>
+        <p:style>
+          <a:lnRef idx="1">
+            <a:schemeClr val="accent1"/>
+          </a:lnRef>
+          <a:fillRef idx="3">
+            <a:schemeClr val="accent1"/>
+          </a:fillRef>
+          <a:effectRef idx="2">
+            <a:schemeClr val="accent1"/>
+          </a:effectRef>
+          <a:fontRef idx="minor">
+            <a:schemeClr val="lt1"/>
+          </a:fontRef>
+        </p:style>
+        <p:txBody>
+          <a:bodyPr rtlCol="0" anchor="ctr"/>
+          <a:lstStyle/>
+          <a:p>
+            <a:pPr algn="ctr"/>
+          </a:p>
+        </p:txBody>
+      </p:sp>
+      <p:sp>
+        <p:nvSpPr>
+          <p:cNvPr id="23" name="Chevron 22"/>
+          <p:cNvSpPr/>
+          <p:nvPr/>
+        </p:nvSpPr>
+        <p:spPr>
+          <a:xfrm>
+            <a:off x="3031236" y="2802636"/>
+            <a:ext cx="274320" cy="155448"/>
+          </a:xfrm>
+          <a:prstGeom prst="chevron">
+            <a:avLst/>
+          </a:prstGeom>
+          <a:solidFill>
+            <a:srgbClr val="DDE1E7"/>
+          </a:solidFill>
+          <a:ln>
+            <a:noFill/>
+          </a:ln>
+          <a:effectLst/>
+        </p:spPr>
+        <p:style>
+          <a:lnRef idx="1">
+            <a:schemeClr val="accent1"/>
+          </a:lnRef>
+          <a:fillRef idx="3">
+            <a:schemeClr val="accent1"/>
+          </a:fillRef>
+          <a:effectRef idx="2">
+            <a:schemeClr val="accent1"/>
+          </a:effectRef>
+          <a:fontRef idx="minor">
+            <a:schemeClr val="lt1"/>
+          </a:fontRef>
+        </p:style>
+        <p:txBody>
+          <a:bodyPr rtlCol="0" anchor="ctr"/>
+          <a:lstStyle/>
+          <a:p>
+            <a:pPr algn="ctr"/>
+          </a:p>
+        </p:txBody>
+      </p:sp>
+      <p:sp>
+        <p:nvSpPr>
+          <p:cNvPr id="24" name="TextBox 23"/>
+          <p:cNvSpPr txBox="1"/>
+          <p:nvPr/>
+        </p:nvSpPr>
+        <p:spPr>
+          <a:xfrm>
+            <a:off x="3300984" y="2779776"/>
+            <a:ext cx="566928" cy="219456"/>
+          </a:xfrm>
+          <a:prstGeom prst="rect">
+            <a:avLst/>
+          </a:prstGeom>
+          <a:noFill/>
+        </p:spPr>
+        <p:txBody>
+          <a:bodyPr wrap="square" anchor="ctr" lIns="25400" rIns="25400" tIns="12700" bIns="12700">
+            <a:spAutoFit/>
+          </a:bodyPr>
+          <a:lstStyle/>
+          <a:p>
+            <a:pPr algn="l">
+              <a:lnSpc>
+                <a:spcPct val="100000"/>
+              </a:lnSpc>
+            </a:pPr>
+            <a:r>
+              <a:rPr sz="900" b="1" i="0">
+                <a:solidFill>
+                  <a:srgbClr val="C98A1B"/>
+                </a:solidFill>
+                <a:latin typeface="Meiryo"/>
+              </a:rPr>
+              <a:t>Lv1</a:t>
+            </a:r>
+          </a:p>
+        </p:txBody>
+      </p:sp>
+      <p:sp>
+        <p:nvSpPr>
+          <p:cNvPr id="25" name="Chevron 24"/>
+          <p:cNvSpPr/>
+          <p:nvPr/>
+        </p:nvSpPr>
+        <p:spPr>
+          <a:xfrm>
+            <a:off x="2276856" y="3186684"/>
+            <a:ext cx="274320" cy="155448"/>
+          </a:xfrm>
+          <a:prstGeom prst="chevron">
+            <a:avLst/>
+          </a:prstGeom>
+          <a:solidFill>
+            <a:srgbClr val="C98A1B"/>
+          </a:solidFill>
+          <a:ln>
+            <a:noFill/>
+          </a:ln>
+          <a:effectLst/>
+        </p:spPr>
+        <p:style>
+          <a:lnRef idx="1">
+            <a:schemeClr val="accent1"/>
+          </a:lnRef>
+          <a:fillRef idx="3">
+            <a:schemeClr val="accent1"/>
+          </a:fillRef>
+          <a:effectRef idx="2">
+            <a:schemeClr val="accent1"/>
+          </a:effectRef>
+          <a:fontRef idx="minor">
+            <a:schemeClr val="lt1"/>
+          </a:fontRef>
+        </p:style>
+        <p:txBody>
+          <a:bodyPr rtlCol="0" anchor="ctr"/>
+          <a:lstStyle/>
+          <a:p>
+            <a:pPr algn="ctr"/>
+          </a:p>
+        </p:txBody>
+      </p:sp>
+      <p:sp>
+        <p:nvSpPr>
+          <p:cNvPr id="26" name="Chevron 25"/>
+          <p:cNvSpPr/>
+          <p:nvPr/>
+        </p:nvSpPr>
+        <p:spPr>
+          <a:xfrm>
+            <a:off x="2528316" y="3186684"/>
+            <a:ext cx="274320" cy="155448"/>
+          </a:xfrm>
+          <a:prstGeom prst="chevron">
+            <a:avLst/>
+          </a:prstGeom>
+          <a:solidFill>
+            <a:srgbClr val="C98A1B"/>
+          </a:solidFill>
+          <a:ln>
+            <a:noFill/>
+          </a:ln>
+          <a:effectLst/>
+        </p:spPr>
+        <p:style>
+          <a:lnRef idx="1">
+            <a:schemeClr val="accent1"/>
+          </a:lnRef>
+          <a:fillRef idx="3">
+            <a:schemeClr val="accent1"/>
+          </a:fillRef>
+          <a:effectRef idx="2">
+            <a:schemeClr val="accent1"/>
+          </a:effectRef>
+          <a:fontRef idx="minor">
+            <a:schemeClr val="lt1"/>
+          </a:fontRef>
+        </p:style>
+        <p:txBody>
+          <a:bodyPr rtlCol="0" anchor="ctr"/>
+          <a:lstStyle/>
+          <a:p>
+            <a:pPr algn="ctr"/>
+          </a:p>
+        </p:txBody>
+      </p:sp>
+      <p:sp>
+        <p:nvSpPr>
+          <p:cNvPr id="27" name="Chevron 26"/>
+          <p:cNvSpPr/>
+          <p:nvPr/>
+        </p:nvSpPr>
+        <p:spPr>
+          <a:xfrm>
+            <a:off x="2779776" y="3186684"/>
+            <a:ext cx="274320" cy="155448"/>
+          </a:xfrm>
+          <a:prstGeom prst="chevron">
+            <a:avLst/>
+          </a:prstGeom>
+          <a:solidFill>
+            <a:srgbClr val="DDE1E7"/>
+          </a:solidFill>
+          <a:ln>
+            <a:noFill/>
+          </a:ln>
+          <a:effectLst/>
+        </p:spPr>
+        <p:style>
+          <a:lnRef idx="1">
+            <a:schemeClr val="accent1"/>
+          </a:lnRef>
+          <a:fillRef idx="3">
+            <a:schemeClr val="accent1"/>
+          </a:fillRef>
+          <a:effectRef idx="2">
+            <a:schemeClr val="accent1"/>
+          </a:effectRef>
+          <a:fontRef idx="minor">
+            <a:schemeClr val="lt1"/>
+          </a:fontRef>
+        </p:style>
+        <p:txBody>
+          <a:bodyPr rtlCol="0" anchor="ctr"/>
+          <a:lstStyle/>
+          <a:p>
+            <a:pPr algn="ctr"/>
+          </a:p>
+        </p:txBody>
+      </p:sp>
+      <p:sp>
+        <p:nvSpPr>
+          <p:cNvPr id="28" name="Chevron 27"/>
+          <p:cNvSpPr/>
+          <p:nvPr/>
+        </p:nvSpPr>
+        <p:spPr>
+          <a:xfrm>
+            <a:off x="3031236" y="3186684"/>
+            <a:ext cx="274320" cy="155448"/>
+          </a:xfrm>
+          <a:prstGeom prst="chevron">
+            <a:avLst/>
+          </a:prstGeom>
+          <a:solidFill>
+            <a:srgbClr val="DDE1E7"/>
+          </a:solidFill>
+          <a:ln>
+            <a:noFill/>
+          </a:ln>
+          <a:effectLst/>
+        </p:spPr>
+        <p:style>
+          <a:lnRef idx="1">
+            <a:schemeClr val="accent1"/>
+          </a:lnRef>
+          <a:fillRef idx="3">
+            <a:schemeClr val="accent1"/>
+          </a:fillRef>
+          <a:effectRef idx="2">
+            <a:schemeClr val="accent1"/>
+          </a:effectRef>
+          <a:fontRef idx="minor">
+            <a:schemeClr val="lt1"/>
+          </a:fontRef>
+        </p:style>
+        <p:txBody>
+          <a:bodyPr rtlCol="0" anchor="ctr"/>
+          <a:lstStyle/>
+          <a:p>
+            <a:pPr algn="ctr"/>
+          </a:p>
+        </p:txBody>
+      </p:sp>
+      <p:sp>
+        <p:nvSpPr>
+          <p:cNvPr id="29" name="TextBox 28"/>
+          <p:cNvSpPr txBox="1"/>
+          <p:nvPr/>
+        </p:nvSpPr>
+        <p:spPr>
+          <a:xfrm>
+            <a:off x="3300984" y="3163824"/>
+            <a:ext cx="566928" cy="219456"/>
+          </a:xfrm>
+          <a:prstGeom prst="rect">
+            <a:avLst/>
+          </a:prstGeom>
+          <a:noFill/>
+        </p:spPr>
+        <p:txBody>
+          <a:bodyPr wrap="square" anchor="ctr" lIns="25400" rIns="25400" tIns="12700" bIns="12700">
+            <a:spAutoFit/>
+          </a:bodyPr>
+          <a:lstStyle/>
+          <a:p>
+            <a:pPr algn="l">
+              <a:lnSpc>
+                <a:spcPct val="100000"/>
+              </a:lnSpc>
+            </a:pPr>
+            <a:r>
+              <a:rPr sz="900" b="1" i="0">
+                <a:solidFill>
+                  <a:srgbClr val="C98A1B"/>
+                </a:solidFill>
+                <a:latin typeface="Meiryo"/>
+              </a:rPr>
+              <a:t>Lv2</a:t>
+            </a:r>
+          </a:p>
+        </p:txBody>
+      </p:sp>
+      <p:sp>
+        <p:nvSpPr>
+          <p:cNvPr id="30" name="Chevron 29"/>
+          <p:cNvSpPr/>
+          <p:nvPr/>
+        </p:nvSpPr>
+        <p:spPr>
+          <a:xfrm>
+            <a:off x="2276856" y="3570732"/>
+            <a:ext cx="274320" cy="155448"/>
+          </a:xfrm>
+          <a:prstGeom prst="chevron">
+            <a:avLst/>
+          </a:prstGeom>
+          <a:solidFill>
+            <a:srgbClr val="C98A1B"/>
+          </a:solidFill>
+          <a:ln>
+            <a:noFill/>
+          </a:ln>
+          <a:effectLst/>
+        </p:spPr>
+        <p:style>
+          <a:lnRef idx="1">
+            <a:schemeClr val="accent1"/>
+          </a:lnRef>
+          <a:fillRef idx="3">
+            <a:schemeClr val="accent1"/>
+          </a:fillRef>
+          <a:effectRef idx="2">
+            <a:schemeClr val="accent1"/>
+          </a:effectRef>
+          <a:fontRef idx="minor">
+            <a:schemeClr val="lt1"/>
+          </a:fontRef>
+        </p:style>
+        <p:txBody>
+          <a:bodyPr rtlCol="0" anchor="ctr"/>
+          <a:lstStyle/>
+          <a:p>
+            <a:pPr algn="ctr"/>
+          </a:p>
+        </p:txBody>
+      </p:sp>
+      <p:sp>
+        <p:nvSpPr>
+          <p:cNvPr id="31" name="Chevron 30"/>
+          <p:cNvSpPr/>
+          <p:nvPr/>
+        </p:nvSpPr>
+        <p:spPr>
+          <a:xfrm>
+            <a:off x="2528316" y="3570732"/>
+            <a:ext cx="274320" cy="155448"/>
+          </a:xfrm>
+          <a:prstGeom prst="chevron">
+            <a:avLst/>
+          </a:prstGeom>
+          <a:solidFill>
+            <a:srgbClr val="C98A1B"/>
+          </a:solidFill>
+          <a:ln>
+            <a:noFill/>
+          </a:ln>
+          <a:effectLst/>
+        </p:spPr>
+        <p:style>
+          <a:lnRef idx="1">
+            <a:schemeClr val="accent1"/>
+          </a:lnRef>
+          <a:fillRef idx="3">
+            <a:schemeClr val="accent1"/>
+          </a:fillRef>
+          <a:effectRef idx="2">
+            <a:schemeClr val="accent1"/>
+          </a:effectRef>
+          <a:fontRef idx="minor">
+            <a:schemeClr val="lt1"/>
+          </a:fontRef>
+        </p:style>
+        <p:txBody>
+          <a:bodyPr rtlCol="0" anchor="ctr"/>
+          <a:lstStyle/>
+          <a:p>
+            <a:pPr algn="ctr"/>
+          </a:p>
+        </p:txBody>
+      </p:sp>
+      <p:sp>
+        <p:nvSpPr>
+          <p:cNvPr id="32" name="Chevron 31"/>
+          <p:cNvSpPr/>
+          <p:nvPr/>
+        </p:nvSpPr>
+        <p:spPr>
+          <a:xfrm>
+            <a:off x="2779776" y="3570732"/>
+            <a:ext cx="274320" cy="155448"/>
+          </a:xfrm>
+          <a:prstGeom prst="chevron">
+            <a:avLst/>
+          </a:prstGeom>
+          <a:solidFill>
+            <a:srgbClr val="DDE1E7"/>
+          </a:solidFill>
+          <a:ln>
+            <a:noFill/>
+          </a:ln>
+          <a:effectLst/>
+        </p:spPr>
+        <p:style>
+          <a:lnRef idx="1">
+            <a:schemeClr val="accent1"/>
+          </a:lnRef>
+          <a:fillRef idx="3">
+            <a:schemeClr val="accent1"/>
+          </a:fillRef>
+          <a:effectRef idx="2">
+            <a:schemeClr val="accent1"/>
+          </a:effectRef>
+          <a:fontRef idx="minor">
+            <a:schemeClr val="lt1"/>
+          </a:fontRef>
+        </p:style>
+        <p:txBody>
+          <a:bodyPr rtlCol="0" anchor="ctr"/>
+          <a:lstStyle/>
+          <a:p>
+            <a:pPr algn="ctr"/>
+          </a:p>
+        </p:txBody>
+      </p:sp>
+      <p:sp>
+        <p:nvSpPr>
+          <p:cNvPr id="33" name="Chevron 32"/>
+          <p:cNvSpPr/>
+          <p:nvPr/>
+        </p:nvSpPr>
+        <p:spPr>
+          <a:xfrm>
+            <a:off x="3031236" y="3570732"/>
+            <a:ext cx="274320" cy="155448"/>
+          </a:xfrm>
+          <a:prstGeom prst="chevron">
+            <a:avLst/>
+          </a:prstGeom>
+          <a:solidFill>
+            <a:srgbClr val="DDE1E7"/>
+          </a:solidFill>
+          <a:ln>
+            <a:noFill/>
+          </a:ln>
+          <a:effectLst/>
+        </p:spPr>
+        <p:style>
+          <a:lnRef idx="1">
+            <a:schemeClr val="accent1"/>
+          </a:lnRef>
+          <a:fillRef idx="3">
+            <a:schemeClr val="accent1"/>
+          </a:fillRef>
+          <a:effectRef idx="2">
+            <a:schemeClr val="accent1"/>
+          </a:effectRef>
+          <a:fontRef idx="minor">
+            <a:schemeClr val="lt1"/>
+          </a:fontRef>
+        </p:style>
+        <p:txBody>
+          <a:bodyPr rtlCol="0" anchor="ctr"/>
+          <a:lstStyle/>
+          <a:p>
+            <a:pPr algn="ctr"/>
+          </a:p>
+        </p:txBody>
+      </p:sp>
+      <p:sp>
+        <p:nvSpPr>
+          <p:cNvPr id="34" name="TextBox 33"/>
+          <p:cNvSpPr txBox="1"/>
+          <p:nvPr/>
+        </p:nvSpPr>
+        <p:spPr>
+          <a:xfrm>
+            <a:off x="3300984" y="3547872"/>
+            <a:ext cx="566928" cy="219456"/>
+          </a:xfrm>
+          <a:prstGeom prst="rect">
+            <a:avLst/>
+          </a:prstGeom>
+          <a:noFill/>
+        </p:spPr>
+        <p:txBody>
+          <a:bodyPr wrap="square" anchor="ctr" lIns="25400" rIns="25400" tIns="12700" bIns="12700">
+            <a:spAutoFit/>
+          </a:bodyPr>
+          <a:lstStyle/>
+          <a:p>
+            <a:pPr algn="l">
+              <a:lnSpc>
+                <a:spcPct val="100000"/>
+              </a:lnSpc>
+            </a:pPr>
+            <a:r>
+              <a:rPr sz="900" b="1" i="0">
+                <a:solidFill>
+                  <a:srgbClr val="C98A1B"/>
+                </a:solidFill>
+                <a:latin typeface="Meiryo"/>
+              </a:rPr>
+              <a:t>Lv2</a:t>
+            </a:r>
+          </a:p>
+        </p:txBody>
+      </p:sp>
+      <p:sp>
+        <p:nvSpPr>
+          <p:cNvPr id="35" name="Chevron 34"/>
+          <p:cNvSpPr/>
+          <p:nvPr/>
+        </p:nvSpPr>
+        <p:spPr>
+          <a:xfrm>
+            <a:off x="2276856" y="3954780"/>
+            <a:ext cx="274320" cy="155448"/>
+          </a:xfrm>
+          <a:prstGeom prst="chevron">
+            <a:avLst/>
+          </a:prstGeom>
+          <a:solidFill>
+            <a:srgbClr val="C98A1B"/>
+          </a:solidFill>
+          <a:ln>
+            <a:noFill/>
+          </a:ln>
+          <a:effectLst/>
+        </p:spPr>
+        <p:style>
+          <a:lnRef idx="1">
+            <a:schemeClr val="accent1"/>
+          </a:lnRef>
+          <a:fillRef idx="3">
+            <a:schemeClr val="accent1"/>
+          </a:fillRef>
+          <a:effectRef idx="2">
+            <a:schemeClr val="accent1"/>
+          </a:effectRef>
+          <a:fontRef idx="minor">
+            <a:schemeClr val="lt1"/>
+          </a:fontRef>
+        </p:style>
+        <p:txBody>
+          <a:bodyPr rtlCol="0" anchor="ctr"/>
+          <a:lstStyle/>
+          <a:p>
+            <a:pPr algn="ctr"/>
+          </a:p>
+        </p:txBody>
+      </p:sp>
+      <p:sp>
+        <p:nvSpPr>
+          <p:cNvPr id="36" name="Chevron 35"/>
+          <p:cNvSpPr/>
+          <p:nvPr/>
+        </p:nvSpPr>
+        <p:spPr>
+          <a:xfrm>
+            <a:off x="2528316" y="3954780"/>
+            <a:ext cx="274320" cy="155448"/>
+          </a:xfrm>
+          <a:prstGeom prst="chevron">
+            <a:avLst/>
+          </a:prstGeom>
+          <a:solidFill>
+            <a:srgbClr val="DDE1E7"/>
+          </a:solidFill>
+          <a:ln>
+            <a:noFill/>
+          </a:ln>
+          <a:effectLst/>
+        </p:spPr>
+        <p:style>
+          <a:lnRef idx="1">
+            <a:schemeClr val="accent1"/>
+          </a:lnRef>
+          <a:fillRef idx="3">
+            <a:schemeClr val="accent1"/>
+          </a:fillRef>
+          <a:effectRef idx="2">
+            <a:schemeClr val="accent1"/>
+          </a:effectRef>
+          <a:fontRef idx="minor">
+            <a:schemeClr val="lt1"/>
+          </a:fontRef>
+        </p:style>
+        <p:txBody>
+          <a:bodyPr rtlCol="0" anchor="ctr"/>
+          <a:lstStyle/>
+          <a:p>
+            <a:pPr algn="ctr"/>
+          </a:p>
+        </p:txBody>
+      </p:sp>
+      <p:sp>
+        <p:nvSpPr>
+          <p:cNvPr id="37" name="Chevron 36"/>
+          <p:cNvSpPr/>
+          <p:nvPr/>
+        </p:nvSpPr>
+        <p:spPr>
+          <a:xfrm>
+            <a:off x="2779776" y="3954780"/>
+            <a:ext cx="274320" cy="155448"/>
+          </a:xfrm>
+          <a:prstGeom prst="chevron">
+            <a:avLst/>
+          </a:prstGeom>
+          <a:solidFill>
+            <a:srgbClr val="DDE1E7"/>
+          </a:solidFill>
+          <a:ln>
+            <a:noFill/>
+          </a:ln>
+          <a:effectLst/>
+        </p:spPr>
+        <p:style>
+          <a:lnRef idx="1">
+            <a:schemeClr val="accent1"/>
+          </a:lnRef>
+          <a:fillRef idx="3">
+            <a:schemeClr val="accent1"/>
+          </a:fillRef>
+          <a:effectRef idx="2">
+            <a:schemeClr val="accent1"/>
+          </a:effectRef>
+          <a:fontRef idx="minor">
+            <a:schemeClr val="lt1"/>
+          </a:fontRef>
+        </p:style>
+        <p:txBody>
+          <a:bodyPr rtlCol="0" anchor="ctr"/>
+          <a:lstStyle/>
+          <a:p>
+            <a:pPr algn="ctr"/>
+          </a:p>
+        </p:txBody>
+      </p:sp>
+      <p:sp>
+        <p:nvSpPr>
+          <p:cNvPr id="38" name="Chevron 37"/>
+          <p:cNvSpPr/>
+          <p:nvPr/>
+        </p:nvSpPr>
+        <p:spPr>
+          <a:xfrm>
+            <a:off x="3031236" y="3954780"/>
+            <a:ext cx="274320" cy="155448"/>
+          </a:xfrm>
+          <a:prstGeom prst="chevron">
+            <a:avLst/>
+          </a:prstGeom>
+          <a:solidFill>
+            <a:srgbClr val="DDE1E7"/>
+          </a:solidFill>
+          <a:ln>
+            <a:noFill/>
+          </a:ln>
+          <a:effectLst/>
+        </p:spPr>
+        <p:style>
+          <a:lnRef idx="1">
+            <a:schemeClr val="accent1"/>
+          </a:lnRef>
+          <a:fillRef idx="3">
+            <a:schemeClr val="accent1"/>
+          </a:fillRef>
+          <a:effectRef idx="2">
+            <a:schemeClr val="accent1"/>
+          </a:effectRef>
+          <a:fontRef idx="minor">
+            <a:schemeClr val="lt1"/>
+          </a:fontRef>
+        </p:style>
+        <p:txBody>
+          <a:bodyPr rtlCol="0" anchor="ctr"/>
+          <a:lstStyle/>
+          <a:p>
+            <a:pPr algn="ctr"/>
+          </a:p>
+        </p:txBody>
+      </p:sp>
+      <p:sp>
+        <p:nvSpPr>
+          <p:cNvPr id="39" name="TextBox 38"/>
+          <p:cNvSpPr txBox="1"/>
+          <p:nvPr/>
+        </p:nvSpPr>
+        <p:spPr>
+          <a:xfrm>
+            <a:off x="3300984" y="3931920"/>
+            <a:ext cx="566928" cy="219456"/>
+          </a:xfrm>
+          <a:prstGeom prst="rect">
+            <a:avLst/>
+          </a:prstGeom>
+          <a:noFill/>
+        </p:spPr>
+        <p:txBody>
+          <a:bodyPr wrap="square" anchor="ctr" lIns="25400" rIns="25400" tIns="12700" bIns="12700">
+            <a:spAutoFit/>
+          </a:bodyPr>
+          <a:lstStyle/>
+          <a:p>
+            <a:pPr algn="l">
+              <a:lnSpc>
+                <a:spcPct val="100000"/>
+              </a:lnSpc>
+            </a:pPr>
+            <a:r>
+              <a:rPr sz="900" b="1" i="0">
+                <a:solidFill>
+                  <a:srgbClr val="C98A1B"/>
+                </a:solidFill>
+                <a:latin typeface="Meiryo"/>
+              </a:rPr>
+              <a:t>Lv1</a:t>
+            </a:r>
+          </a:p>
+        </p:txBody>
+      </p:sp>
+      <p:sp>
+        <p:nvSpPr>
+          <p:cNvPr id="40" name="Chevron 39"/>
+          <p:cNvSpPr/>
+          <p:nvPr/>
+        </p:nvSpPr>
+        <p:spPr>
+          <a:xfrm>
+            <a:off x="2276856" y="4338828"/>
+            <a:ext cx="274320" cy="155448"/>
+          </a:xfrm>
+          <a:prstGeom prst="chevron">
+            <a:avLst/>
+          </a:prstGeom>
+          <a:solidFill>
+            <a:srgbClr val="C98A1B"/>
+          </a:solidFill>
+          <a:ln>
+            <a:noFill/>
+          </a:ln>
+          <a:effectLst/>
+        </p:spPr>
+        <p:style>
+          <a:lnRef idx="1">
+            <a:schemeClr val="accent1"/>
+          </a:lnRef>
+          <a:fillRef idx="3">
+            <a:schemeClr val="accent1"/>
+          </a:fillRef>
+          <a:effectRef idx="2">
+            <a:schemeClr val="accent1"/>
+          </a:effectRef>
+          <a:fontRef idx="minor">
+            <a:schemeClr val="lt1"/>
+          </a:fontRef>
+        </p:style>
+        <p:txBody>
+          <a:bodyPr rtlCol="0" anchor="ctr"/>
+          <a:lstStyle/>
+          <a:p>
+            <a:pPr algn="ctr"/>
+          </a:p>
+        </p:txBody>
+      </p:sp>
+      <p:sp>
+        <p:nvSpPr>
+          <p:cNvPr id="41" name="Chevron 40"/>
+          <p:cNvSpPr/>
+          <p:nvPr/>
+        </p:nvSpPr>
+        <p:spPr>
+          <a:xfrm>
+            <a:off x="2528316" y="4338828"/>
+            <a:ext cx="274320" cy="155448"/>
+          </a:xfrm>
+          <a:prstGeom prst="chevron">
+            <a:avLst/>
+          </a:prstGeom>
+          <a:solidFill>
+            <a:srgbClr val="DDE1E7"/>
+          </a:solidFill>
+          <a:ln>
+            <a:noFill/>
+          </a:ln>
+          <a:effectLst/>
+        </p:spPr>
+        <p:style>
+          <a:lnRef idx="1">
+            <a:schemeClr val="accent1"/>
+          </a:lnRef>
+          <a:fillRef idx="3">
+            <a:schemeClr val="accent1"/>
+          </a:fillRef>
+          <a:effectRef idx="2">
+            <a:schemeClr val="accent1"/>
+          </a:effectRef>
+          <a:fontRef idx="minor">
+            <a:schemeClr val="lt1"/>
+          </a:fontRef>
+        </p:style>
+        <p:txBody>
+          <a:bodyPr rtlCol="0" anchor="ctr"/>
+          <a:lstStyle/>
+          <a:p>
+            <a:pPr algn="ctr"/>
+          </a:p>
+        </p:txBody>
+      </p:sp>
+      <p:sp>
+        <p:nvSpPr>
+          <p:cNvPr id="42" name="Chevron 41"/>
+          <p:cNvSpPr/>
+          <p:nvPr/>
+        </p:nvSpPr>
+        <p:spPr>
+          <a:xfrm>
+            <a:off x="2779776" y="4338828"/>
+            <a:ext cx="274320" cy="155448"/>
+          </a:xfrm>
+          <a:prstGeom prst="chevron">
+            <a:avLst/>
+          </a:prstGeom>
+          <a:solidFill>
+            <a:srgbClr val="DDE1E7"/>
+          </a:solidFill>
+          <a:ln>
+            <a:noFill/>
+          </a:ln>
+          <a:effectLst/>
+        </p:spPr>
+        <p:style>
+          <a:lnRef idx="1">
+            <a:schemeClr val="accent1"/>
+          </a:lnRef>
+          <a:fillRef idx="3">
+            <a:schemeClr val="accent1"/>
+          </a:fillRef>
+          <a:effectRef idx="2">
+            <a:schemeClr val="accent1"/>
+          </a:effectRef>
+          <a:fontRef idx="minor">
+            <a:schemeClr val="lt1"/>
+          </a:fontRef>
+        </p:style>
+        <p:txBody>
+          <a:bodyPr rtlCol="0" anchor="ctr"/>
+          <a:lstStyle/>
+          <a:p>
+            <a:pPr algn="ctr"/>
+          </a:p>
+        </p:txBody>
+      </p:sp>
+      <p:sp>
+        <p:nvSpPr>
+          <p:cNvPr id="43" name="Chevron 42"/>
+          <p:cNvSpPr/>
+          <p:nvPr/>
+        </p:nvSpPr>
+        <p:spPr>
+          <a:xfrm>
+            <a:off x="3031236" y="4338828"/>
+            <a:ext cx="274320" cy="155448"/>
+          </a:xfrm>
+          <a:prstGeom prst="chevron">
+            <a:avLst/>
+          </a:prstGeom>
+          <a:solidFill>
+            <a:srgbClr val="DDE1E7"/>
+          </a:solidFill>
+          <a:ln>
+            <a:noFill/>
+          </a:ln>
+          <a:effectLst/>
+        </p:spPr>
+        <p:style>
+          <a:lnRef idx="1">
+            <a:schemeClr val="accent1"/>
+          </a:lnRef>
+          <a:fillRef idx="3">
+            <a:schemeClr val="accent1"/>
+          </a:fillRef>
+          <a:effectRef idx="2">
+            <a:schemeClr val="accent1"/>
+          </a:effectRef>
+          <a:fontRef idx="minor">
+            <a:schemeClr val="lt1"/>
+          </a:fontRef>
+        </p:style>
+        <p:txBody>
+          <a:bodyPr rtlCol="0" anchor="ctr"/>
+          <a:lstStyle/>
+          <a:p>
+            <a:pPr algn="ctr"/>
+          </a:p>
+        </p:txBody>
+      </p:sp>
+      <p:sp>
+        <p:nvSpPr>
+          <p:cNvPr id="44" name="TextBox 43"/>
+          <p:cNvSpPr txBox="1"/>
+          <p:nvPr/>
+        </p:nvSpPr>
+        <p:spPr>
+          <a:xfrm>
+            <a:off x="3300984" y="4315968"/>
+            <a:ext cx="566928" cy="219456"/>
+          </a:xfrm>
+          <a:prstGeom prst="rect">
+            <a:avLst/>
+          </a:prstGeom>
+          <a:noFill/>
+        </p:spPr>
+        <p:txBody>
+          <a:bodyPr wrap="square" anchor="ctr" lIns="25400" rIns="25400" tIns="12700" bIns="12700">
+            <a:spAutoFit/>
+          </a:bodyPr>
+          <a:lstStyle/>
+          <a:p>
+            <a:pPr algn="l">
+              <a:lnSpc>
+                <a:spcPct val="100000"/>
+              </a:lnSpc>
+            </a:pPr>
+            <a:r>
+              <a:rPr sz="900" b="1" i="0">
+                <a:solidFill>
+                  <a:srgbClr val="C98A1B"/>
+                </a:solidFill>
+                <a:latin typeface="Meiryo"/>
+              </a:rPr>
+              <a:t>Lv1</a:t>
+            </a:r>
+          </a:p>
+        </p:txBody>
+      </p:sp>
+      <p:sp>
+        <p:nvSpPr>
+          <p:cNvPr id="45" name="Chevron 44"/>
+          <p:cNvSpPr/>
+          <p:nvPr/>
+        </p:nvSpPr>
+        <p:spPr>
+          <a:xfrm>
+            <a:off x="2276856" y="4722876"/>
+            <a:ext cx="274320" cy="155448"/>
+          </a:xfrm>
+          <a:prstGeom prst="chevron">
+            <a:avLst/>
+          </a:prstGeom>
+          <a:solidFill>
+            <a:srgbClr val="3F8F5B"/>
+          </a:solidFill>
+          <a:ln>
+            <a:noFill/>
+          </a:ln>
+          <a:effectLst/>
+        </p:spPr>
+        <p:style>
+          <a:lnRef idx="1">
+            <a:schemeClr val="accent1"/>
+          </a:lnRef>
+          <a:fillRef idx="3">
+            <a:schemeClr val="accent1"/>
+          </a:fillRef>
+          <a:effectRef idx="2">
+            <a:schemeClr val="accent1"/>
+          </a:effectRef>
+          <a:fontRef idx="minor">
+            <a:schemeClr val="lt1"/>
+          </a:fontRef>
+        </p:style>
+        <p:txBody>
+          <a:bodyPr rtlCol="0" anchor="ctr"/>
+          <a:lstStyle/>
+          <a:p>
+            <a:pPr algn="ctr"/>
+          </a:p>
+        </p:txBody>
+      </p:sp>
+      <p:sp>
+        <p:nvSpPr>
+          <p:cNvPr id="46" name="Chevron 45"/>
+          <p:cNvSpPr/>
+          <p:nvPr/>
+        </p:nvSpPr>
+        <p:spPr>
+          <a:xfrm>
+            <a:off x="2528316" y="4722876"/>
+            <a:ext cx="274320" cy="155448"/>
+          </a:xfrm>
+          <a:prstGeom prst="chevron">
+            <a:avLst/>
+          </a:prstGeom>
+          <a:solidFill>
+            <a:srgbClr val="3F8F5B"/>
+          </a:solidFill>
+          <a:ln>
+            <a:noFill/>
+          </a:ln>
+          <a:effectLst/>
+        </p:spPr>
+        <p:style>
+          <a:lnRef idx="1">
+            <a:schemeClr val="accent1"/>
+          </a:lnRef>
+          <a:fillRef idx="3">
+            <a:schemeClr val="accent1"/>
+          </a:fillRef>
+          <a:effectRef idx="2">
+            <a:schemeClr val="accent1"/>
+          </a:effectRef>
+          <a:fontRef idx="minor">
+            <a:schemeClr val="lt1"/>
+          </a:fontRef>
+        </p:style>
+        <p:txBody>
+          <a:bodyPr rtlCol="0" anchor="ctr"/>
+          <a:lstStyle/>
+          <a:p>
+            <a:pPr algn="ctr"/>
+          </a:p>
+        </p:txBody>
+      </p:sp>
+      <p:sp>
+        <p:nvSpPr>
+          <p:cNvPr id="47" name="Chevron 46"/>
+          <p:cNvSpPr/>
+          <p:nvPr/>
+        </p:nvSpPr>
+        <p:spPr>
+          <a:xfrm>
+            <a:off x="2779776" y="4722876"/>
+            <a:ext cx="274320" cy="155448"/>
+          </a:xfrm>
+          <a:prstGeom prst="chevron">
+            <a:avLst/>
+          </a:prstGeom>
+          <a:solidFill>
+            <a:srgbClr val="3F8F5B"/>
+          </a:solidFill>
+          <a:ln>
+            <a:noFill/>
+          </a:ln>
+          <a:effectLst/>
+        </p:spPr>
+        <p:style>
+          <a:lnRef idx="1">
+            <a:schemeClr val="accent1"/>
+          </a:lnRef>
+          <a:fillRef idx="3">
+            <a:schemeClr val="accent1"/>
+          </a:fillRef>
+          <a:effectRef idx="2">
+            <a:schemeClr val="accent1"/>
+          </a:effectRef>
+          <a:fontRef idx="minor">
+            <a:schemeClr val="lt1"/>
+          </a:fontRef>
+        </p:style>
+        <p:txBody>
+          <a:bodyPr rtlCol="0" anchor="ctr"/>
+          <a:lstStyle/>
+          <a:p>
+            <a:pPr algn="ctr"/>
+          </a:p>
+        </p:txBody>
+      </p:sp>
+      <p:sp>
+        <p:nvSpPr>
+          <p:cNvPr id="48" name="Chevron 47"/>
+          <p:cNvSpPr/>
+          <p:nvPr/>
+        </p:nvSpPr>
+        <p:spPr>
+          <a:xfrm>
+            <a:off x="3031236" y="4722876"/>
+            <a:ext cx="274320" cy="155448"/>
+          </a:xfrm>
+          <a:prstGeom prst="chevron">
+            <a:avLst/>
+          </a:prstGeom>
+          <a:solidFill>
+            <a:srgbClr val="3F8F5B"/>
+          </a:solidFill>
+          <a:ln>
+            <a:noFill/>
+          </a:ln>
+          <a:effectLst/>
+        </p:spPr>
+        <p:style>
+          <a:lnRef idx="1">
+            <a:schemeClr val="accent1"/>
+          </a:lnRef>
+          <a:fillRef idx="3">
+            <a:schemeClr val="accent1"/>
+          </a:fillRef>
+          <a:effectRef idx="2">
+            <a:schemeClr val="accent1"/>
+          </a:effectRef>
+          <a:fontRef idx="minor">
+            <a:schemeClr val="lt1"/>
+          </a:fontRef>
+        </p:style>
+        <p:txBody>
+          <a:bodyPr rtlCol="0" anchor="ctr"/>
+          <a:lstStyle/>
+          <a:p>
+            <a:pPr algn="ctr"/>
+          </a:p>
+        </p:txBody>
+      </p:sp>
+      <p:sp>
+        <p:nvSpPr>
+          <p:cNvPr id="49" name="TextBox 48"/>
+          <p:cNvSpPr txBox="1"/>
+          <p:nvPr/>
+        </p:nvSpPr>
+        <p:spPr>
+          <a:xfrm>
+            <a:off x="3300984" y="4700016"/>
+            <a:ext cx="566928" cy="219456"/>
+          </a:xfrm>
+          <a:prstGeom prst="rect">
+            <a:avLst/>
+          </a:prstGeom>
+          <a:noFill/>
+        </p:spPr>
+        <p:txBody>
+          <a:bodyPr wrap="square" anchor="ctr" lIns="25400" rIns="25400" tIns="12700" bIns="12700">
+            <a:spAutoFit/>
+          </a:bodyPr>
+          <a:lstStyle/>
+          <a:p>
+            <a:pPr algn="l">
+              <a:lnSpc>
+                <a:spcPct val="100000"/>
+              </a:lnSpc>
+            </a:pPr>
+            <a:r>
+              <a:rPr sz="900" b="1" i="0">
+                <a:solidFill>
+                  <a:srgbClr val="3F8F5B"/>
+                </a:solidFill>
+                <a:latin typeface="Meiryo"/>
+              </a:rPr>
+              <a:t>Lv4</a:t>
+            </a:r>
+          </a:p>
+        </p:txBody>
+      </p:sp>
+      <p:sp>
+        <p:nvSpPr>
+          <p:cNvPr id="50" name="Chevron 49"/>
+          <p:cNvSpPr/>
+          <p:nvPr/>
+        </p:nvSpPr>
+        <p:spPr>
+          <a:xfrm>
+            <a:off x="2276856" y="5106924"/>
+            <a:ext cx="274320" cy="155448"/>
+          </a:xfrm>
+          <a:prstGeom prst="chevron">
+            <a:avLst/>
+          </a:prstGeom>
+          <a:solidFill>
+            <a:srgbClr val="C98A1B"/>
+          </a:solidFill>
+          <a:ln>
+            <a:noFill/>
+          </a:ln>
+          <a:effectLst/>
+        </p:spPr>
+        <p:style>
+          <a:lnRef idx="1">
+            <a:schemeClr val="accent1"/>
+          </a:lnRef>
+          <a:fillRef idx="3">
+            <a:schemeClr val="accent1"/>
+          </a:fillRef>
+          <a:effectRef idx="2">
+            <a:schemeClr val="accent1"/>
+          </a:effectRef>
+          <a:fontRef idx="minor">
+            <a:schemeClr val="lt1"/>
+          </a:fontRef>
+        </p:style>
+        <p:txBody>
+          <a:bodyPr rtlCol="0" anchor="ctr"/>
+          <a:lstStyle/>
+          <a:p>
+            <a:pPr algn="ctr"/>
+          </a:p>
+        </p:txBody>
+      </p:sp>
+      <p:sp>
+        <p:nvSpPr>
+          <p:cNvPr id="51" name="Chevron 50"/>
+          <p:cNvSpPr/>
+          <p:nvPr/>
+        </p:nvSpPr>
+        <p:spPr>
+          <a:xfrm>
+            <a:off x="2528316" y="5106924"/>
+            <a:ext cx="274320" cy="155448"/>
+          </a:xfrm>
+          <a:prstGeom prst="chevron">
+            <a:avLst/>
+          </a:prstGeom>
+          <a:solidFill>
+            <a:srgbClr val="DDE1E7"/>
+          </a:solidFill>
+          <a:ln>
+            <a:noFill/>
+          </a:ln>
+          <a:effectLst/>
+        </p:spPr>
+        <p:style>
+          <a:lnRef idx="1">
+            <a:schemeClr val="accent1"/>
+          </a:lnRef>
+          <a:fillRef idx="3">
+            <a:schemeClr val="accent1"/>
+          </a:fillRef>
+          <a:effectRef idx="2">
+            <a:schemeClr val="accent1"/>
+          </a:effectRef>
+          <a:fontRef idx="minor">
+            <a:schemeClr val="lt1"/>
+          </a:fontRef>
+        </p:style>
+        <p:txBody>
+          <a:bodyPr rtlCol="0" anchor="ctr"/>
+          <a:lstStyle/>
+          <a:p>
+            <a:pPr algn="ctr"/>
+          </a:p>
+        </p:txBody>
+      </p:sp>
+      <p:sp>
+        <p:nvSpPr>
+          <p:cNvPr id="52" name="Chevron 51"/>
+          <p:cNvSpPr/>
+          <p:nvPr/>
+        </p:nvSpPr>
+        <p:spPr>
+          <a:xfrm>
+            <a:off x="2779776" y="5106924"/>
+            <a:ext cx="274320" cy="155448"/>
+          </a:xfrm>
+          <a:prstGeom prst="chevron">
+            <a:avLst/>
+          </a:prstGeom>
+          <a:solidFill>
+            <a:srgbClr val="DDE1E7"/>
+          </a:solidFill>
+          <a:ln>
+            <a:noFill/>
+          </a:ln>
+          <a:effectLst/>
+        </p:spPr>
+        <p:style>
+          <a:lnRef idx="1">
+            <a:schemeClr val="accent1"/>
+          </a:lnRef>
+          <a:fillRef idx="3">
+            <a:schemeClr val="accent1"/>
+          </a:fillRef>
+          <a:effectRef idx="2">
+            <a:schemeClr val="accent1"/>
+          </a:effectRef>
+          <a:fontRef idx="minor">
+            <a:schemeClr val="lt1"/>
+          </a:fontRef>
+        </p:style>
+        <p:txBody>
+          <a:bodyPr rtlCol="0" anchor="ctr"/>
+          <a:lstStyle/>
+          <a:p>
+            <a:pPr algn="ctr"/>
+          </a:p>
+        </p:txBody>
+      </p:sp>
+      <p:sp>
+        <p:nvSpPr>
+          <p:cNvPr id="53" name="Chevron 52"/>
+          <p:cNvSpPr/>
+          <p:nvPr/>
+        </p:nvSpPr>
+        <p:spPr>
+          <a:xfrm>
+            <a:off x="3031236" y="5106924"/>
+            <a:ext cx="274320" cy="155448"/>
+          </a:xfrm>
+          <a:prstGeom prst="chevron">
+            <a:avLst/>
+          </a:prstGeom>
+          <a:solidFill>
+            <a:srgbClr val="DDE1E7"/>
+          </a:solidFill>
+          <a:ln>
+            <a:noFill/>
+          </a:ln>
+          <a:effectLst/>
+        </p:spPr>
+        <p:style>
+          <a:lnRef idx="1">
+            <a:schemeClr val="accent1"/>
+          </a:lnRef>
+          <a:fillRef idx="3">
+            <a:schemeClr val="accent1"/>
+          </a:fillRef>
+          <a:effectRef idx="2">
+            <a:schemeClr val="accent1"/>
+          </a:effectRef>
+          <a:fontRef idx="minor">
+            <a:schemeClr val="lt1"/>
+          </a:fontRef>
+        </p:style>
+        <p:txBody>
+          <a:bodyPr rtlCol="0" anchor="ctr"/>
+          <a:lstStyle/>
+          <a:p>
+            <a:pPr algn="ctr"/>
+          </a:p>
+        </p:txBody>
+      </p:sp>
+      <p:sp>
+        <p:nvSpPr>
+          <p:cNvPr id="54" name="TextBox 53"/>
+          <p:cNvSpPr txBox="1"/>
+          <p:nvPr/>
+        </p:nvSpPr>
+        <p:spPr>
+          <a:xfrm>
+            <a:off x="3300984" y="5084064"/>
+            <a:ext cx="566928" cy="219456"/>
+          </a:xfrm>
+          <a:prstGeom prst="rect">
+            <a:avLst/>
+          </a:prstGeom>
+          <a:noFill/>
+        </p:spPr>
+        <p:txBody>
+          <a:bodyPr wrap="square" anchor="ctr" lIns="25400" rIns="25400" tIns="12700" bIns="12700">
+            <a:spAutoFit/>
+          </a:bodyPr>
+          <a:lstStyle/>
+          <a:p>
+            <a:pPr algn="l">
+              <a:lnSpc>
+                <a:spcPct val="100000"/>
+              </a:lnSpc>
+            </a:pPr>
+            <a:r>
+              <a:rPr sz="900" b="1" i="0">
+                <a:solidFill>
+                  <a:srgbClr val="C98A1B"/>
+                </a:solidFill>
+                <a:latin typeface="Meiryo"/>
+              </a:rPr>
+              <a:t>Lv1</a:t>
+            </a:r>
+          </a:p>
+        </p:txBody>
+      </p:sp>
+      <p:sp>
+        <p:nvSpPr>
+          <p:cNvPr id="55" name="Chevron 54"/>
+          <p:cNvSpPr/>
+          <p:nvPr/>
+        </p:nvSpPr>
+        <p:spPr>
+          <a:xfrm>
+            <a:off x="2276856" y="5490972"/>
+            <a:ext cx="274320" cy="155448"/>
+          </a:xfrm>
+          <a:prstGeom prst="chevron">
+            <a:avLst/>
+          </a:prstGeom>
+          <a:solidFill>
+            <a:srgbClr val="C98A1B"/>
+          </a:solidFill>
+          <a:ln>
+            <a:noFill/>
+          </a:ln>
+          <a:effectLst/>
+        </p:spPr>
+        <p:style>
+          <a:lnRef idx="1">
+            <a:schemeClr val="accent1"/>
+          </a:lnRef>
+          <a:fillRef idx="3">
+            <a:schemeClr val="accent1"/>
+          </a:fillRef>
+          <a:effectRef idx="2">
+            <a:schemeClr val="accent1"/>
+          </a:effectRef>
+          <a:fontRef idx="minor">
+            <a:schemeClr val="lt1"/>
+          </a:fontRef>
+        </p:style>
+        <p:txBody>
+          <a:bodyPr rtlCol="0" anchor="ctr"/>
+          <a:lstStyle/>
+          <a:p>
+            <a:pPr algn="ctr"/>
+          </a:p>
+        </p:txBody>
+      </p:sp>
+      <p:sp>
+        <p:nvSpPr>
+          <p:cNvPr id="56" name="Chevron 55"/>
+          <p:cNvSpPr/>
+          <p:nvPr/>
+        </p:nvSpPr>
+        <p:spPr>
+          <a:xfrm>
+            <a:off x="2528316" y="5490972"/>
+            <a:ext cx="274320" cy="155448"/>
+          </a:xfrm>
+          <a:prstGeom prst="chevron">
+            <a:avLst/>
+          </a:prstGeom>
+          <a:solidFill>
+            <a:srgbClr val="DDE1E7"/>
+          </a:solidFill>
+          <a:ln>
+            <a:noFill/>
+          </a:ln>
+          <a:effectLst/>
+        </p:spPr>
+        <p:style>
+          <a:lnRef idx="1">
+            <a:schemeClr val="accent1"/>
+          </a:lnRef>
+          <a:fillRef idx="3">
+            <a:schemeClr val="accent1"/>
+          </a:fillRef>
+          <a:effectRef idx="2">
+            <a:schemeClr val="accent1"/>
+          </a:effectRef>
+          <a:fontRef idx="minor">
+            <a:schemeClr val="lt1"/>
+          </a:fontRef>
+        </p:style>
+        <p:txBody>
+          <a:bodyPr rtlCol="0" anchor="ctr"/>
+          <a:lstStyle/>
+          <a:p>
+            <a:pPr algn="ctr"/>
+          </a:p>
+        </p:txBody>
+      </p:sp>
+      <p:sp>
+        <p:nvSpPr>
+          <p:cNvPr id="57" name="Chevron 56"/>
+          <p:cNvSpPr/>
+          <p:nvPr/>
+        </p:nvSpPr>
+        <p:spPr>
+          <a:xfrm>
+            <a:off x="2779776" y="5490972"/>
+            <a:ext cx="274320" cy="155448"/>
+          </a:xfrm>
+          <a:prstGeom prst="chevron">
+            <a:avLst/>
+          </a:prstGeom>
+          <a:solidFill>
+            <a:srgbClr val="DDE1E7"/>
+          </a:solidFill>
+          <a:ln>
+            <a:noFill/>
+          </a:ln>
+          <a:effectLst/>
+        </p:spPr>
+        <p:style>
+          <a:lnRef idx="1">
+            <a:schemeClr val="accent1"/>
+          </a:lnRef>
+          <a:fillRef idx="3">
+            <a:schemeClr val="accent1"/>
+          </a:fillRef>
+          <a:effectRef idx="2">
+            <a:schemeClr val="accent1"/>
+          </a:effectRef>
+          <a:fontRef idx="minor">
+            <a:schemeClr val="lt1"/>
+          </a:fontRef>
+        </p:style>
+        <p:txBody>
+          <a:bodyPr rtlCol="0" anchor="ctr"/>
+          <a:lstStyle/>
+          <a:p>
+            <a:pPr algn="ctr"/>
+          </a:p>
+        </p:txBody>
+      </p:sp>
+      <p:sp>
+        <p:nvSpPr>
+          <p:cNvPr id="58" name="Chevron 57"/>
+          <p:cNvSpPr/>
+          <p:nvPr/>
+        </p:nvSpPr>
+        <p:spPr>
+          <a:xfrm>
+            <a:off x="3031236" y="5490972"/>
+            <a:ext cx="274320" cy="155448"/>
+          </a:xfrm>
+          <a:prstGeom prst="chevron">
+            <a:avLst/>
+          </a:prstGeom>
+          <a:solidFill>
+            <a:srgbClr val="DDE1E7"/>
+          </a:solidFill>
+          <a:ln>
+            <a:noFill/>
+          </a:ln>
+          <a:effectLst/>
+        </p:spPr>
+        <p:style>
+          <a:lnRef idx="1">
+            <a:schemeClr val="accent1"/>
+          </a:lnRef>
+          <a:fillRef idx="3">
+            <a:schemeClr val="accent1"/>
+          </a:fillRef>
+          <a:effectRef idx="2">
+            <a:schemeClr val="accent1"/>
+          </a:effectRef>
+          <a:fontRef idx="minor">
+            <a:schemeClr val="lt1"/>
+          </a:fontRef>
+        </p:style>
+        <p:txBody>
+          <a:bodyPr rtlCol="0" anchor="ctr"/>
+          <a:lstStyle/>
+          <a:p>
+            <a:pPr algn="ctr"/>
+          </a:p>
+        </p:txBody>
+      </p:sp>
+      <p:sp>
+        <p:nvSpPr>
+          <p:cNvPr id="59" name="TextBox 58"/>
+          <p:cNvSpPr txBox="1"/>
+          <p:nvPr/>
+        </p:nvSpPr>
+        <p:spPr>
+          <a:xfrm>
+            <a:off x="3300984" y="5468112"/>
+            <a:ext cx="566928" cy="219456"/>
+          </a:xfrm>
+          <a:prstGeom prst="rect">
+            <a:avLst/>
+          </a:prstGeom>
+          <a:noFill/>
+        </p:spPr>
+        <p:txBody>
+          <a:bodyPr wrap="square" anchor="ctr" lIns="25400" rIns="25400" tIns="12700" bIns="12700">
+            <a:spAutoFit/>
+          </a:bodyPr>
+          <a:lstStyle/>
+          <a:p>
+            <a:pPr algn="l">
+              <a:lnSpc>
+                <a:spcPct val="100000"/>
+              </a:lnSpc>
+            </a:pPr>
+            <a:r>
+              <a:rPr sz="900" b="1" i="0">
+                <a:solidFill>
+                  <a:srgbClr val="C98A1B"/>
+                </a:solidFill>
+                <a:latin typeface="Meiryo"/>
+              </a:rPr>
+              <a:t>Lv1</a:t>
+            </a:r>
+          </a:p>
+        </p:txBody>
+      </p:sp>
+      <p:sp>
+        <p:nvSpPr>
+          <p:cNvPr id="60" name="Chevron 59"/>
+          <p:cNvSpPr/>
+          <p:nvPr/>
+        </p:nvSpPr>
+        <p:spPr>
+          <a:xfrm>
+            <a:off x="2276856" y="5875020"/>
+            <a:ext cx="274320" cy="155448"/>
+          </a:xfrm>
+          <a:prstGeom prst="chevron">
+            <a:avLst/>
+          </a:prstGeom>
+          <a:solidFill>
+            <a:srgbClr val="2E8B9E"/>
+          </a:solidFill>
+          <a:ln>
+            <a:noFill/>
+          </a:ln>
+          <a:effectLst/>
+        </p:spPr>
+        <p:style>
+          <a:lnRef idx="1">
+            <a:schemeClr val="accent1"/>
+          </a:lnRef>
+          <a:fillRef idx="3">
+            <a:schemeClr val="accent1"/>
+          </a:fillRef>
+          <a:effectRef idx="2">
+            <a:schemeClr val="accent1"/>
+          </a:effectRef>
+          <a:fontRef idx="minor">
+            <a:schemeClr val="lt1"/>
+          </a:fontRef>
+        </p:style>
+        <p:txBody>
+          <a:bodyPr rtlCol="0" anchor="ctr"/>
+          <a:lstStyle/>
+          <a:p>
+            <a:pPr algn="ctr"/>
+          </a:p>
+        </p:txBody>
+      </p:sp>
+      <p:sp>
+        <p:nvSpPr>
+          <p:cNvPr id="61" name="Chevron 60"/>
+          <p:cNvSpPr/>
+          <p:nvPr/>
+        </p:nvSpPr>
+        <p:spPr>
+          <a:xfrm>
+            <a:off x="2528316" y="5875020"/>
+            <a:ext cx="274320" cy="155448"/>
+          </a:xfrm>
+          <a:prstGeom prst="chevron">
+            <a:avLst/>
+          </a:prstGeom>
+          <a:solidFill>
+            <a:srgbClr val="2E8B9E"/>
+          </a:solidFill>
+          <a:ln>
+            <a:noFill/>
+          </a:ln>
+          <a:effectLst/>
+        </p:spPr>
+        <p:style>
+          <a:lnRef idx="1">
+            <a:schemeClr val="accent1"/>
+          </a:lnRef>
+          <a:fillRef idx="3">
+            <a:schemeClr val="accent1"/>
+          </a:fillRef>
+          <a:effectRef idx="2">
+            <a:schemeClr val="accent1"/>
+          </a:effectRef>
+          <a:fontRef idx="minor">
+            <a:schemeClr val="lt1"/>
+          </a:fontRef>
+        </p:style>
+        <p:txBody>
+          <a:bodyPr rtlCol="0" anchor="ctr"/>
+          <a:lstStyle/>
+          <a:p>
+            <a:pPr algn="ctr"/>
+          </a:p>
+        </p:txBody>
+      </p:sp>
+      <p:sp>
+        <p:nvSpPr>
+          <p:cNvPr id="62" name="Chevron 61"/>
+          <p:cNvSpPr/>
+          <p:nvPr/>
+        </p:nvSpPr>
+        <p:spPr>
+          <a:xfrm>
+            <a:off x="2779776" y="5875020"/>
+            <a:ext cx="274320" cy="155448"/>
+          </a:xfrm>
+          <a:prstGeom prst="chevron">
+            <a:avLst/>
+          </a:prstGeom>
+          <a:solidFill>
+            <a:srgbClr val="2E8B9E"/>
+          </a:solidFill>
+          <a:ln>
+            <a:noFill/>
+          </a:ln>
+          <a:effectLst/>
+        </p:spPr>
+        <p:style>
+          <a:lnRef idx="1">
+            <a:schemeClr val="accent1"/>
+          </a:lnRef>
+          <a:fillRef idx="3">
+            <a:schemeClr val="accent1"/>
+          </a:fillRef>
+          <a:effectRef idx="2">
+            <a:schemeClr val="accent1"/>
+          </a:effectRef>
+          <a:fontRef idx="minor">
+            <a:schemeClr val="lt1"/>
+          </a:fontRef>
+        </p:style>
+        <p:txBody>
+          <a:bodyPr rtlCol="0" anchor="ctr"/>
+          <a:lstStyle/>
+          <a:p>
+            <a:pPr algn="ctr"/>
+          </a:p>
+        </p:txBody>
+      </p:sp>
+      <p:sp>
+        <p:nvSpPr>
+          <p:cNvPr id="63" name="Chevron 62"/>
+          <p:cNvSpPr/>
+          <p:nvPr/>
+        </p:nvSpPr>
+        <p:spPr>
+          <a:xfrm>
+            <a:off x="3031236" y="5875020"/>
+            <a:ext cx="274320" cy="155448"/>
+          </a:xfrm>
+          <a:prstGeom prst="chevron">
+            <a:avLst/>
+          </a:prstGeom>
+          <a:solidFill>
+            <a:srgbClr val="DDE1E7"/>
+          </a:solidFill>
+          <a:ln>
+            <a:noFill/>
+          </a:ln>
+          <a:effectLst/>
+        </p:spPr>
+        <p:style>
+          <a:lnRef idx="1">
+            <a:schemeClr val="accent1"/>
+          </a:lnRef>
+          <a:fillRef idx="3">
+            <a:schemeClr val="accent1"/>
+          </a:fillRef>
+          <a:effectRef idx="2">
+            <a:schemeClr val="accent1"/>
+          </a:effectRef>
+          <a:fontRef idx="minor">
+            <a:schemeClr val="lt1"/>
+          </a:fontRef>
+        </p:style>
+        <p:txBody>
+          <a:bodyPr rtlCol="0" anchor="ctr"/>
+          <a:lstStyle/>
+          <a:p>
+            <a:pPr algn="ctr"/>
+          </a:p>
+        </p:txBody>
+      </p:sp>
+      <p:sp>
+        <p:nvSpPr>
+          <p:cNvPr id="64" name="TextBox 63"/>
+          <p:cNvSpPr txBox="1"/>
+          <p:nvPr/>
+        </p:nvSpPr>
+        <p:spPr>
+          <a:xfrm>
+            <a:off x="3300984" y="5852160"/>
+            <a:ext cx="566928" cy="219456"/>
+          </a:xfrm>
+          <a:prstGeom prst="rect">
+            <a:avLst/>
+          </a:prstGeom>
+          <a:noFill/>
+        </p:spPr>
+        <p:txBody>
+          <a:bodyPr wrap="square" anchor="ctr" lIns="25400" rIns="25400" tIns="12700" bIns="12700">
+            <a:spAutoFit/>
+          </a:bodyPr>
+          <a:lstStyle/>
+          <a:p>
+            <a:pPr algn="l">
+              <a:lnSpc>
+                <a:spcPct val="100000"/>
+              </a:lnSpc>
+            </a:pPr>
+            <a:r>
+              <a:rPr sz="900" b="1" i="0">
+                <a:solidFill>
+                  <a:srgbClr val="2E8B9E"/>
+                </a:solidFill>
+                <a:latin typeface="Meiryo"/>
+              </a:rPr>
+              <a:t>Lv3</a:t>
+            </a:r>
+          </a:p>
+        </p:txBody>
+      </p:sp>
+      <p:sp>
+        <p:nvSpPr>
+          <p:cNvPr id="65" name="Chevron 64"/>
+          <p:cNvSpPr/>
+          <p:nvPr/>
+        </p:nvSpPr>
+        <p:spPr>
+          <a:xfrm>
+            <a:off x="2276856" y="6259068"/>
+            <a:ext cx="274320" cy="155448"/>
+          </a:xfrm>
+          <a:prstGeom prst="chevron">
+            <a:avLst/>
+          </a:prstGeom>
+          <a:solidFill>
+            <a:srgbClr val="C98A1B"/>
+          </a:solidFill>
+          <a:ln>
+            <a:noFill/>
+          </a:ln>
+          <a:effectLst/>
+        </p:spPr>
+        <p:style>
+          <a:lnRef idx="1">
+            <a:schemeClr val="accent1"/>
+          </a:lnRef>
+          <a:fillRef idx="3">
+            <a:schemeClr val="accent1"/>
+          </a:fillRef>
+          <a:effectRef idx="2">
+            <a:schemeClr val="accent1"/>
+          </a:effectRef>
+          <a:fontRef idx="minor">
+            <a:schemeClr val="lt1"/>
+          </a:fontRef>
+        </p:style>
+        <p:txBody>
+          <a:bodyPr rtlCol="0" anchor="ctr"/>
+          <a:lstStyle/>
+          <a:p>
+            <a:pPr algn="ctr"/>
+          </a:p>
+        </p:txBody>
+      </p:sp>
+      <p:sp>
+        <p:nvSpPr>
+          <p:cNvPr id="66" name="Chevron 65"/>
+          <p:cNvSpPr/>
+          <p:nvPr/>
+        </p:nvSpPr>
+        <p:spPr>
+          <a:xfrm>
+            <a:off x="2528316" y="6259068"/>
+            <a:ext cx="274320" cy="155448"/>
+          </a:xfrm>
+          <a:prstGeom prst="chevron">
+            <a:avLst/>
+          </a:prstGeom>
+          <a:solidFill>
+            <a:srgbClr val="DDE1E7"/>
+          </a:solidFill>
+          <a:ln>
+            <a:noFill/>
+          </a:ln>
+          <a:effectLst/>
+        </p:spPr>
+        <p:style>
+          <a:lnRef idx="1">
+            <a:schemeClr val="accent1"/>
+          </a:lnRef>
+          <a:fillRef idx="3">
+            <a:schemeClr val="accent1"/>
+          </a:fillRef>
+          <a:effectRef idx="2">
+            <a:schemeClr val="accent1"/>
+          </a:effectRef>
+          <a:fontRef idx="minor">
+            <a:schemeClr val="lt1"/>
+          </a:fontRef>
+        </p:style>
+        <p:txBody>
+          <a:bodyPr rtlCol="0" anchor="ctr"/>
+          <a:lstStyle/>
+          <a:p>
+            <a:pPr algn="ctr"/>
+          </a:p>
+        </p:txBody>
+      </p:sp>
+      <p:sp>
+        <p:nvSpPr>
+          <p:cNvPr id="67" name="Chevron 66"/>
+          <p:cNvSpPr/>
+          <p:nvPr/>
+        </p:nvSpPr>
+        <p:spPr>
+          <a:xfrm>
+            <a:off x="2779776" y="6259068"/>
+            <a:ext cx="274320" cy="155448"/>
+          </a:xfrm>
+          <a:prstGeom prst="chevron">
+            <a:avLst/>
+          </a:prstGeom>
+          <a:solidFill>
+            <a:srgbClr val="DDE1E7"/>
+          </a:solidFill>
+          <a:ln>
+            <a:noFill/>
+          </a:ln>
+          <a:effectLst/>
+        </p:spPr>
+        <p:style>
+          <a:lnRef idx="1">
+            <a:schemeClr val="accent1"/>
+          </a:lnRef>
+          <a:fillRef idx="3">
+            <a:schemeClr val="accent1"/>
+          </a:fillRef>
+          <a:effectRef idx="2">
+            <a:schemeClr val="accent1"/>
+          </a:effectRef>
+          <a:fontRef idx="minor">
+            <a:schemeClr val="lt1"/>
+          </a:fontRef>
+        </p:style>
+        <p:txBody>
+          <a:bodyPr rtlCol="0" anchor="ctr"/>
+          <a:lstStyle/>
+          <a:p>
+            <a:pPr algn="ctr"/>
+          </a:p>
+        </p:txBody>
+      </p:sp>
+      <p:sp>
+        <p:nvSpPr>
+          <p:cNvPr id="68" name="Chevron 67"/>
+          <p:cNvSpPr/>
+          <p:nvPr/>
+        </p:nvSpPr>
+        <p:spPr>
+          <a:xfrm>
+            <a:off x="3031236" y="6259068"/>
+            <a:ext cx="274320" cy="155448"/>
+          </a:xfrm>
+          <a:prstGeom prst="chevron">
+            <a:avLst/>
+          </a:prstGeom>
+          <a:solidFill>
+            <a:srgbClr val="DDE1E7"/>
+          </a:solidFill>
+          <a:ln>
+            <a:noFill/>
+          </a:ln>
+          <a:effectLst/>
+        </p:spPr>
+        <p:style>
+          <a:lnRef idx="1">
+            <a:schemeClr val="accent1"/>
+          </a:lnRef>
+          <a:fillRef idx="3">
+            <a:schemeClr val="accent1"/>
+          </a:fillRef>
+          <a:effectRef idx="2">
+            <a:schemeClr val="accent1"/>
+          </a:effectRef>
+          <a:fontRef idx="minor">
+            <a:schemeClr val="lt1"/>
+          </a:fontRef>
+        </p:style>
+        <p:txBody>
+          <a:bodyPr rtlCol="0" anchor="ctr"/>
+          <a:lstStyle/>
+          <a:p>
+            <a:pPr algn="ctr"/>
+          </a:p>
+        </p:txBody>
+      </p:sp>
+      <p:sp>
+        <p:nvSpPr>
+          <p:cNvPr id="69" name="TextBox 68"/>
+          <p:cNvSpPr txBox="1"/>
+          <p:nvPr/>
+        </p:nvSpPr>
+        <p:spPr>
+          <a:xfrm>
+            <a:off x="3300984" y="6236208"/>
+            <a:ext cx="566928" cy="219456"/>
+          </a:xfrm>
+          <a:prstGeom prst="rect">
+            <a:avLst/>
+          </a:prstGeom>
+          <a:noFill/>
+        </p:spPr>
+        <p:txBody>
+          <a:bodyPr wrap="square" anchor="ctr" lIns="25400" rIns="25400" tIns="12700" bIns="12700">
+            <a:spAutoFit/>
+          </a:bodyPr>
+          <a:lstStyle/>
+          <a:p>
+            <a:pPr algn="l">
+              <a:lnSpc>
+                <a:spcPct val="100000"/>
+              </a:lnSpc>
+            </a:pPr>
+            <a:r>
+              <a:rPr sz="900" b="1" i="0">
+                <a:solidFill>
+                  <a:srgbClr val="C98A1B"/>
+                </a:solidFill>
+                <a:latin typeface="Meiryo"/>
+              </a:rPr>
+              <a:t>Lv1</a:t>
+            </a:r>
+          </a:p>
+        </p:txBody>
+      </p:sp>
     </p:spTree>
   </p:cSld>
   <p:clrMapOvr>

--- a/reports/CopilotStudio_ハッカソン_事前相談会報告.pptx
+++ b/reports/CopilotStudio_ハッカソン_事前相談会報告.pptx
@@ -4871,7 +4871,7 @@
                 </a:solidFill>
                 <a:latin typeface="Meiryo"/>
               </a:rPr>
-              <a:t>「絞り込み」は1案への確定状況（済／未）、「進捗レベル」は下記4段階の到達点を4つの矢印で表示。質疑は各チーム1〜2件を要約。</a:t>
+              <a:t>「絞り込み」は1案への到達状況（未／2案／1案）、「進捗レベル」は下記5段階の到達点を5つの矢印で表示。質疑は各チーム1〜2件を要約。</a:t>
             </a:r>
           </a:p>
         </p:txBody>
@@ -4884,7 +4884,7 @@
         </p:nvSpPr>
         <p:spPr>
           <a:xfrm>
-            <a:off x="502920" y="1463040"/>
+            <a:off x="502920" y="1444752"/>
             <a:ext cx="11247120" cy="457200"/>
           </a:xfrm>
           <a:prstGeom prst="rect">
@@ -4900,17 +4900,17 @@
           <a:p>
             <a:pPr algn="l">
               <a:lnSpc>
-                <a:spcPct val="110000"/>
+                <a:spcPct val="112000"/>
               </a:lnSpc>
             </a:pPr>
             <a:r>
-              <a:rPr sz="950" b="0" i="0">
+              <a:rPr sz="900" b="0" i="0">
                 <a:solidFill>
                   <a:srgbClr val="555D68"/>
                 </a:solidFill>
                 <a:latin typeface="Meiryo"/>
               </a:rPr>
-              <a:t>進捗レベルの目安 ▶ Lv1：案の絞り込み（複数案・検討中）／ Lv2：1案確定・スコープ/機能理解は途上／ Lv3：To-Be・使用アプリ/アーキが具体化／ Lv4：定量効果まで概ね完成</a:t>
+              <a:t>進捗レベルの目安 ▶ Lv1：未絞り込み（各自案を持ち寄り）／ Lv2：2案まで絞り込み（1案への選定が必要）／ Lv3：1案確定・スコープ/機能理解は途上／ Lv4：To-Be・使用アプリ/アーキが具体化／ Lv5：定量効果まで概ね完成</a:t>
             </a:r>
           </a:p>
         </p:txBody>
@@ -4924,7 +4924,7 @@
           <p:nvPr/>
         </p:nvGraphicFramePr>
         <p:xfrm>
-          <a:off x="502920" y="1938528"/>
+          <a:off x="502920" y="1956816"/>
           <a:ext cx="11201400" cy="4590288"/>
         </p:xfrm>
         <a:graphic>
@@ -4934,11 +4934,11 @@
                 <a:tableStyleId>{5C22544A-7EE6-4342-B048-85BDC9FD1C3A}</a:tableStyleId>
               </a:tblPr>
               <a:tblGrid>
-                <a:gridCol w="685800"/>
-                <a:gridCol w="960120"/>
-                <a:gridCol w="1828800"/>
-                <a:gridCol w="3840480"/>
-                <a:gridCol w="3886200"/>
+                <a:gridCol w="658368"/>
+                <a:gridCol w="932688"/>
+                <a:gridCol w="2148840"/>
+                <a:gridCol w="3703320"/>
+                <a:gridCol w="3758184"/>
               </a:tblGrid>
               <a:tr h="365760">
                 <a:tc>
@@ -5116,19 +5116,19 @@
                         </a:lnSpc>
                       </a:pPr>
                       <a:r>
-                        <a:rPr sz="1100" b="1">
+                        <a:rPr sz="1050" b="1">
                           <a:solidFill>
-                            <a:srgbClr val="C98A1B"/>
+                            <a:srgbClr val="2E8B9E"/>
                           </a:solidFill>
                           <a:latin typeface="Meiryo"/>
                         </a:rPr>
-                        <a:t>未</a:t>
+                        <a:t>2案</a:t>
                       </a:r>
                     </a:p>
                   </a:txBody>
                   <a:tcPr marL="63500" marR="63500" marT="25400" marB="25400" anchor="ctr">
                     <a:solidFill>
-                      <a:srgbClr val="FBF0DA"/>
+                      <a:srgbClr val="E1F0F2"/>
                     </a:solidFill>
                   </a:tcPr>
                 </a:tc>
@@ -5253,19 +5253,19 @@
                         </a:lnSpc>
                       </a:pPr>
                       <a:r>
-                        <a:rPr sz="1100" b="1">
+                        <a:rPr sz="1050" b="1">
                           <a:solidFill>
-                            <a:srgbClr val="C98A1B"/>
+                            <a:srgbClr val="3F8F5B"/>
                           </a:solidFill>
                           <a:latin typeface="Meiryo"/>
                         </a:rPr>
-                        <a:t>未</a:t>
+                        <a:t>1案</a:t>
                       </a:r>
                     </a:p>
                   </a:txBody>
                   <a:tcPr marL="63500" marR="63500" marT="25400" marB="25400" anchor="ctr">
                     <a:solidFill>
-                      <a:srgbClr val="FBF0DA"/>
+                      <a:srgbClr val="E4F1E9"/>
                     </a:solidFill>
                   </a:tcPr>
                 </a:tc>
@@ -5390,13 +5390,13 @@
                         </a:lnSpc>
                       </a:pPr>
                       <a:r>
-                        <a:rPr sz="1100" b="1">
+                        <a:rPr sz="1050" b="1">
                           <a:solidFill>
                             <a:srgbClr val="3F8F5B"/>
                           </a:solidFill>
                           <a:latin typeface="Meiryo"/>
                         </a:rPr>
-                        <a:t>済</a:t>
+                        <a:t>1案</a:t>
                       </a:r>
                     </a:p>
                   </a:txBody>
@@ -5527,13 +5527,13 @@
                         </a:lnSpc>
                       </a:pPr>
                       <a:r>
-                        <a:rPr sz="1100" b="1">
+                        <a:rPr sz="1050" b="1">
                           <a:solidFill>
                             <a:srgbClr val="3F8F5B"/>
                           </a:solidFill>
                           <a:latin typeface="Meiryo"/>
                         </a:rPr>
-                        <a:t>済</a:t>
+                        <a:t>1案</a:t>
                       </a:r>
                     </a:p>
                   </a:txBody>
@@ -5664,19 +5664,19 @@
                         </a:lnSpc>
                       </a:pPr>
                       <a:r>
-                        <a:rPr sz="1100" b="1">
+                        <a:rPr sz="1050" b="1">
                           <a:solidFill>
-                            <a:srgbClr val="C98A1B"/>
+                            <a:srgbClr val="3F8F5B"/>
                           </a:solidFill>
                           <a:latin typeface="Meiryo"/>
                         </a:rPr>
-                        <a:t>未</a:t>
+                        <a:t>1案</a:t>
                       </a:r>
                     </a:p>
                   </a:txBody>
                   <a:tcPr marL="63500" marR="63500" marT="25400" marB="25400" anchor="ctr">
                     <a:solidFill>
-                      <a:srgbClr val="FBF0DA"/>
+                      <a:srgbClr val="E4F1E9"/>
                     </a:solidFill>
                   </a:tcPr>
                 </a:tc>
@@ -5801,19 +5801,19 @@
                         </a:lnSpc>
                       </a:pPr>
                       <a:r>
-                        <a:rPr sz="1100" b="1">
+                        <a:rPr sz="1050" b="1">
                           <a:solidFill>
-                            <a:srgbClr val="C98A1B"/>
+                            <a:srgbClr val="3F8F5B"/>
                           </a:solidFill>
                           <a:latin typeface="Meiryo"/>
                         </a:rPr>
-                        <a:t>未</a:t>
+                        <a:t>1案</a:t>
                       </a:r>
                     </a:p>
                   </a:txBody>
                   <a:tcPr marL="63500" marR="63500" marT="25400" marB="25400" anchor="ctr">
                     <a:solidFill>
-                      <a:srgbClr val="FBF0DA"/>
+                      <a:srgbClr val="E4F1E9"/>
                     </a:solidFill>
                   </a:tcPr>
                 </a:tc>
@@ -5938,13 +5938,13 @@
                         </a:lnSpc>
                       </a:pPr>
                       <a:r>
-                        <a:rPr sz="1100" b="1">
+                        <a:rPr sz="1050" b="1">
                           <a:solidFill>
                             <a:srgbClr val="3F8F5B"/>
                           </a:solidFill>
                           <a:latin typeface="Meiryo"/>
                         </a:rPr>
-                        <a:t>済</a:t>
+                        <a:t>1案</a:t>
                       </a:r>
                     </a:p>
                   </a:txBody>
@@ -6075,19 +6075,19 @@
                         </a:lnSpc>
                       </a:pPr>
                       <a:r>
-                        <a:rPr sz="1100" b="1">
+                        <a:rPr sz="1050" b="1">
                           <a:solidFill>
-                            <a:srgbClr val="C98A1B"/>
+                            <a:srgbClr val="2E8B9E"/>
                           </a:solidFill>
                           <a:latin typeface="Meiryo"/>
                         </a:rPr>
-                        <a:t>未</a:t>
+                        <a:t>2案</a:t>
                       </a:r>
                     </a:p>
                   </a:txBody>
                   <a:tcPr marL="63500" marR="63500" marT="25400" marB="25400" anchor="ctr">
                     <a:solidFill>
-                      <a:srgbClr val="FBF0DA"/>
+                      <a:srgbClr val="E1F0F2"/>
                     </a:solidFill>
                   </a:tcPr>
                 </a:tc>
@@ -6212,7 +6212,7 @@
                         </a:lnSpc>
                       </a:pPr>
                       <a:r>
-                        <a:rPr sz="1100" b="1">
+                        <a:rPr sz="1050" b="1">
                           <a:solidFill>
                             <a:srgbClr val="C98A1B"/>
                           </a:solidFill>
@@ -6349,13 +6349,13 @@
                         </a:lnSpc>
                       </a:pPr>
                       <a:r>
-                        <a:rPr sz="1100" b="1">
+                        <a:rPr sz="1050" b="1">
                           <a:solidFill>
                             <a:srgbClr val="3F8F5B"/>
                           </a:solidFill>
                           <a:latin typeface="Meiryo"/>
                         </a:rPr>
-                        <a:t>済</a:t>
+                        <a:t>1案</a:t>
                       </a:r>
                     </a:p>
                   </a:txBody>
@@ -6486,19 +6486,19 @@
                         </a:lnSpc>
                       </a:pPr>
                       <a:r>
-                        <a:rPr sz="1100" b="1">
+                        <a:rPr sz="1050" b="1">
                           <a:solidFill>
-                            <a:srgbClr val="C98A1B"/>
+                            <a:srgbClr val="2E8B9E"/>
                           </a:solidFill>
                           <a:latin typeface="Meiryo"/>
                         </a:rPr>
-                        <a:t>未</a:t>
+                        <a:t>2案</a:t>
                       </a:r>
                     </a:p>
                   </a:txBody>
                   <a:tcPr marL="63500" marR="63500" marT="25400" marB="25400" anchor="ctr">
                     <a:solidFill>
-                      <a:srgbClr val="FBF0DA"/>
+                      <a:srgbClr val="E1F0F2"/>
                     </a:solidFill>
                   </a:tcPr>
                 </a:tc>
@@ -6596,8 +6596,8 @@
         </p:nvSpPr>
         <p:spPr>
           <a:xfrm>
-            <a:off x="2276856" y="2418588"/>
-            <a:ext cx="274320" cy="155448"/>
+            <a:off x="2203704" y="2436876"/>
+            <a:ext cx="256032" cy="155448"/>
           </a:xfrm>
           <a:prstGeom prst="chevron">
             <a:avLst/>
@@ -6640,8 +6640,52 @@
         </p:nvSpPr>
         <p:spPr>
           <a:xfrm>
-            <a:off x="2528316" y="2418588"/>
-            <a:ext cx="274320" cy="155448"/>
+            <a:off x="2427732" y="2436876"/>
+            <a:ext cx="256032" cy="155448"/>
+          </a:xfrm>
+          <a:prstGeom prst="chevron">
+            <a:avLst/>
+          </a:prstGeom>
+          <a:solidFill>
+            <a:srgbClr val="C98A1B"/>
+          </a:solidFill>
+          <a:ln>
+            <a:noFill/>
+          </a:ln>
+          <a:effectLst/>
+        </p:spPr>
+        <p:style>
+          <a:lnRef idx="1">
+            <a:schemeClr val="accent1"/>
+          </a:lnRef>
+          <a:fillRef idx="3">
+            <a:schemeClr val="accent1"/>
+          </a:fillRef>
+          <a:effectRef idx="2">
+            <a:schemeClr val="accent1"/>
+          </a:effectRef>
+          <a:fontRef idx="minor">
+            <a:schemeClr val="lt1"/>
+          </a:fontRef>
+        </p:style>
+        <p:txBody>
+          <a:bodyPr rtlCol="0" anchor="ctr"/>
+          <a:lstStyle/>
+          <a:p>
+            <a:pPr algn="ctr"/>
+          </a:p>
+        </p:txBody>
+      </p:sp>
+      <p:sp>
+        <p:nvSpPr>
+          <p:cNvPr id="17" name="Chevron 16"/>
+          <p:cNvSpPr/>
+          <p:nvPr/>
+        </p:nvSpPr>
+        <p:spPr>
+          <a:xfrm>
+            <a:off x="2651760" y="2436876"/>
+            <a:ext cx="256032" cy="155448"/>
           </a:xfrm>
           <a:prstGeom prst="chevron">
             <a:avLst/>
@@ -6678,14 +6722,14 @@
       </p:sp>
       <p:sp>
         <p:nvSpPr>
-          <p:cNvPr id="17" name="Chevron 16"/>
+          <p:cNvPr id="18" name="Chevron 17"/>
           <p:cNvSpPr/>
           <p:nvPr/>
         </p:nvSpPr>
         <p:spPr>
           <a:xfrm>
-            <a:off x="2779776" y="2418588"/>
-            <a:ext cx="274320" cy="155448"/>
+            <a:off x="2875788" y="2436876"/>
+            <a:ext cx="256032" cy="155448"/>
           </a:xfrm>
           <a:prstGeom prst="chevron">
             <a:avLst/>
@@ -6722,14 +6766,14 @@
       </p:sp>
       <p:sp>
         <p:nvSpPr>
-          <p:cNvPr id="18" name="Chevron 17"/>
+          <p:cNvPr id="19" name="Chevron 18"/>
           <p:cNvSpPr/>
           <p:nvPr/>
         </p:nvSpPr>
         <p:spPr>
           <a:xfrm>
-            <a:off x="3031236" y="2418588"/>
-            <a:ext cx="274320" cy="155448"/>
+            <a:off x="3099816" y="2436876"/>
+            <a:ext cx="256032" cy="155448"/>
           </a:xfrm>
           <a:prstGeom prst="chevron">
             <a:avLst/>
@@ -6766,14 +6810,2086 @@
       </p:sp>
       <p:sp>
         <p:nvSpPr>
-          <p:cNvPr id="19" name="TextBox 18"/>
+          <p:cNvPr id="20" name="TextBox 19"/>
           <p:cNvSpPr txBox="1"/>
           <p:nvPr/>
         </p:nvSpPr>
         <p:spPr>
           <a:xfrm>
-            <a:off x="3300984" y="2395728"/>
-            <a:ext cx="566928" cy="219456"/>
+            <a:off x="3351276" y="2414016"/>
+            <a:ext cx="502920" cy="219456"/>
+          </a:xfrm>
+          <a:prstGeom prst="rect">
+            <a:avLst/>
+          </a:prstGeom>
+          <a:noFill/>
+        </p:spPr>
+        <p:txBody>
+          <a:bodyPr wrap="square" anchor="ctr" lIns="25400" rIns="25400" tIns="12700" bIns="12700">
+            <a:spAutoFit/>
+          </a:bodyPr>
+          <a:lstStyle/>
+          <a:p>
+            <a:pPr algn="l">
+              <a:lnSpc>
+                <a:spcPct val="100000"/>
+              </a:lnSpc>
+            </a:pPr>
+            <a:r>
+              <a:rPr sz="900" b="1" i="0">
+                <a:solidFill>
+                  <a:srgbClr val="C98A1B"/>
+                </a:solidFill>
+                <a:latin typeface="Meiryo"/>
+              </a:rPr>
+              <a:t>Lv2</a:t>
+            </a:r>
+          </a:p>
+        </p:txBody>
+      </p:sp>
+      <p:sp>
+        <p:nvSpPr>
+          <p:cNvPr id="21" name="Chevron 20"/>
+          <p:cNvSpPr/>
+          <p:nvPr/>
+        </p:nvSpPr>
+        <p:spPr>
+          <a:xfrm>
+            <a:off x="2203704" y="2820924"/>
+            <a:ext cx="256032" cy="155448"/>
+          </a:xfrm>
+          <a:prstGeom prst="chevron">
+            <a:avLst/>
+          </a:prstGeom>
+          <a:solidFill>
+            <a:srgbClr val="2E8B9E"/>
+          </a:solidFill>
+          <a:ln>
+            <a:noFill/>
+          </a:ln>
+          <a:effectLst/>
+        </p:spPr>
+        <p:style>
+          <a:lnRef idx="1">
+            <a:schemeClr val="accent1"/>
+          </a:lnRef>
+          <a:fillRef idx="3">
+            <a:schemeClr val="accent1"/>
+          </a:fillRef>
+          <a:effectRef idx="2">
+            <a:schemeClr val="accent1"/>
+          </a:effectRef>
+          <a:fontRef idx="minor">
+            <a:schemeClr val="lt1"/>
+          </a:fontRef>
+        </p:style>
+        <p:txBody>
+          <a:bodyPr rtlCol="0" anchor="ctr"/>
+          <a:lstStyle/>
+          <a:p>
+            <a:pPr algn="ctr"/>
+          </a:p>
+        </p:txBody>
+      </p:sp>
+      <p:sp>
+        <p:nvSpPr>
+          <p:cNvPr id="22" name="Chevron 21"/>
+          <p:cNvSpPr/>
+          <p:nvPr/>
+        </p:nvSpPr>
+        <p:spPr>
+          <a:xfrm>
+            <a:off x="2427732" y="2820924"/>
+            <a:ext cx="256032" cy="155448"/>
+          </a:xfrm>
+          <a:prstGeom prst="chevron">
+            <a:avLst/>
+          </a:prstGeom>
+          <a:solidFill>
+            <a:srgbClr val="2E8B9E"/>
+          </a:solidFill>
+          <a:ln>
+            <a:noFill/>
+          </a:ln>
+          <a:effectLst/>
+        </p:spPr>
+        <p:style>
+          <a:lnRef idx="1">
+            <a:schemeClr val="accent1"/>
+          </a:lnRef>
+          <a:fillRef idx="3">
+            <a:schemeClr val="accent1"/>
+          </a:fillRef>
+          <a:effectRef idx="2">
+            <a:schemeClr val="accent1"/>
+          </a:effectRef>
+          <a:fontRef idx="minor">
+            <a:schemeClr val="lt1"/>
+          </a:fontRef>
+        </p:style>
+        <p:txBody>
+          <a:bodyPr rtlCol="0" anchor="ctr"/>
+          <a:lstStyle/>
+          <a:p>
+            <a:pPr algn="ctr"/>
+          </a:p>
+        </p:txBody>
+      </p:sp>
+      <p:sp>
+        <p:nvSpPr>
+          <p:cNvPr id="23" name="Chevron 22"/>
+          <p:cNvSpPr/>
+          <p:nvPr/>
+        </p:nvSpPr>
+        <p:spPr>
+          <a:xfrm>
+            <a:off x="2651760" y="2820924"/>
+            <a:ext cx="256032" cy="155448"/>
+          </a:xfrm>
+          <a:prstGeom prst="chevron">
+            <a:avLst/>
+          </a:prstGeom>
+          <a:solidFill>
+            <a:srgbClr val="2E8B9E"/>
+          </a:solidFill>
+          <a:ln>
+            <a:noFill/>
+          </a:ln>
+          <a:effectLst/>
+        </p:spPr>
+        <p:style>
+          <a:lnRef idx="1">
+            <a:schemeClr val="accent1"/>
+          </a:lnRef>
+          <a:fillRef idx="3">
+            <a:schemeClr val="accent1"/>
+          </a:fillRef>
+          <a:effectRef idx="2">
+            <a:schemeClr val="accent1"/>
+          </a:effectRef>
+          <a:fontRef idx="minor">
+            <a:schemeClr val="lt1"/>
+          </a:fontRef>
+        </p:style>
+        <p:txBody>
+          <a:bodyPr rtlCol="0" anchor="ctr"/>
+          <a:lstStyle/>
+          <a:p>
+            <a:pPr algn="ctr"/>
+          </a:p>
+        </p:txBody>
+      </p:sp>
+      <p:sp>
+        <p:nvSpPr>
+          <p:cNvPr id="24" name="Chevron 23"/>
+          <p:cNvSpPr/>
+          <p:nvPr/>
+        </p:nvSpPr>
+        <p:spPr>
+          <a:xfrm>
+            <a:off x="2875788" y="2820924"/>
+            <a:ext cx="256032" cy="155448"/>
+          </a:xfrm>
+          <a:prstGeom prst="chevron">
+            <a:avLst/>
+          </a:prstGeom>
+          <a:solidFill>
+            <a:srgbClr val="DDE1E7"/>
+          </a:solidFill>
+          <a:ln>
+            <a:noFill/>
+          </a:ln>
+          <a:effectLst/>
+        </p:spPr>
+        <p:style>
+          <a:lnRef idx="1">
+            <a:schemeClr val="accent1"/>
+          </a:lnRef>
+          <a:fillRef idx="3">
+            <a:schemeClr val="accent1"/>
+          </a:fillRef>
+          <a:effectRef idx="2">
+            <a:schemeClr val="accent1"/>
+          </a:effectRef>
+          <a:fontRef idx="minor">
+            <a:schemeClr val="lt1"/>
+          </a:fontRef>
+        </p:style>
+        <p:txBody>
+          <a:bodyPr rtlCol="0" anchor="ctr"/>
+          <a:lstStyle/>
+          <a:p>
+            <a:pPr algn="ctr"/>
+          </a:p>
+        </p:txBody>
+      </p:sp>
+      <p:sp>
+        <p:nvSpPr>
+          <p:cNvPr id="25" name="Chevron 24"/>
+          <p:cNvSpPr/>
+          <p:nvPr/>
+        </p:nvSpPr>
+        <p:spPr>
+          <a:xfrm>
+            <a:off x="3099816" y="2820924"/>
+            <a:ext cx="256032" cy="155448"/>
+          </a:xfrm>
+          <a:prstGeom prst="chevron">
+            <a:avLst/>
+          </a:prstGeom>
+          <a:solidFill>
+            <a:srgbClr val="DDE1E7"/>
+          </a:solidFill>
+          <a:ln>
+            <a:noFill/>
+          </a:ln>
+          <a:effectLst/>
+        </p:spPr>
+        <p:style>
+          <a:lnRef idx="1">
+            <a:schemeClr val="accent1"/>
+          </a:lnRef>
+          <a:fillRef idx="3">
+            <a:schemeClr val="accent1"/>
+          </a:fillRef>
+          <a:effectRef idx="2">
+            <a:schemeClr val="accent1"/>
+          </a:effectRef>
+          <a:fontRef idx="minor">
+            <a:schemeClr val="lt1"/>
+          </a:fontRef>
+        </p:style>
+        <p:txBody>
+          <a:bodyPr rtlCol="0" anchor="ctr"/>
+          <a:lstStyle/>
+          <a:p>
+            <a:pPr algn="ctr"/>
+          </a:p>
+        </p:txBody>
+      </p:sp>
+      <p:sp>
+        <p:nvSpPr>
+          <p:cNvPr id="26" name="TextBox 25"/>
+          <p:cNvSpPr txBox="1"/>
+          <p:nvPr/>
+        </p:nvSpPr>
+        <p:spPr>
+          <a:xfrm>
+            <a:off x="3351276" y="2798064"/>
+            <a:ext cx="502920" cy="219456"/>
+          </a:xfrm>
+          <a:prstGeom prst="rect">
+            <a:avLst/>
+          </a:prstGeom>
+          <a:noFill/>
+        </p:spPr>
+        <p:txBody>
+          <a:bodyPr wrap="square" anchor="ctr" lIns="25400" rIns="25400" tIns="12700" bIns="12700">
+            <a:spAutoFit/>
+          </a:bodyPr>
+          <a:lstStyle/>
+          <a:p>
+            <a:pPr algn="l">
+              <a:lnSpc>
+                <a:spcPct val="100000"/>
+              </a:lnSpc>
+            </a:pPr>
+            <a:r>
+              <a:rPr sz="900" b="1" i="0">
+                <a:solidFill>
+                  <a:srgbClr val="2E8B9E"/>
+                </a:solidFill>
+                <a:latin typeface="Meiryo"/>
+              </a:rPr>
+              <a:t>Lv3</a:t>
+            </a:r>
+          </a:p>
+        </p:txBody>
+      </p:sp>
+      <p:sp>
+        <p:nvSpPr>
+          <p:cNvPr id="27" name="Chevron 26"/>
+          <p:cNvSpPr/>
+          <p:nvPr/>
+        </p:nvSpPr>
+        <p:spPr>
+          <a:xfrm>
+            <a:off x="2203704" y="3204972"/>
+            <a:ext cx="256032" cy="155448"/>
+          </a:xfrm>
+          <a:prstGeom prst="chevron">
+            <a:avLst/>
+          </a:prstGeom>
+          <a:solidFill>
+            <a:srgbClr val="2E8B9E"/>
+          </a:solidFill>
+          <a:ln>
+            <a:noFill/>
+          </a:ln>
+          <a:effectLst/>
+        </p:spPr>
+        <p:style>
+          <a:lnRef idx="1">
+            <a:schemeClr val="accent1"/>
+          </a:lnRef>
+          <a:fillRef idx="3">
+            <a:schemeClr val="accent1"/>
+          </a:fillRef>
+          <a:effectRef idx="2">
+            <a:schemeClr val="accent1"/>
+          </a:effectRef>
+          <a:fontRef idx="minor">
+            <a:schemeClr val="lt1"/>
+          </a:fontRef>
+        </p:style>
+        <p:txBody>
+          <a:bodyPr rtlCol="0" anchor="ctr"/>
+          <a:lstStyle/>
+          <a:p>
+            <a:pPr algn="ctr"/>
+          </a:p>
+        </p:txBody>
+      </p:sp>
+      <p:sp>
+        <p:nvSpPr>
+          <p:cNvPr id="28" name="Chevron 27"/>
+          <p:cNvSpPr/>
+          <p:nvPr/>
+        </p:nvSpPr>
+        <p:spPr>
+          <a:xfrm>
+            <a:off x="2427732" y="3204972"/>
+            <a:ext cx="256032" cy="155448"/>
+          </a:xfrm>
+          <a:prstGeom prst="chevron">
+            <a:avLst/>
+          </a:prstGeom>
+          <a:solidFill>
+            <a:srgbClr val="2E8B9E"/>
+          </a:solidFill>
+          <a:ln>
+            <a:noFill/>
+          </a:ln>
+          <a:effectLst/>
+        </p:spPr>
+        <p:style>
+          <a:lnRef idx="1">
+            <a:schemeClr val="accent1"/>
+          </a:lnRef>
+          <a:fillRef idx="3">
+            <a:schemeClr val="accent1"/>
+          </a:fillRef>
+          <a:effectRef idx="2">
+            <a:schemeClr val="accent1"/>
+          </a:effectRef>
+          <a:fontRef idx="minor">
+            <a:schemeClr val="lt1"/>
+          </a:fontRef>
+        </p:style>
+        <p:txBody>
+          <a:bodyPr rtlCol="0" anchor="ctr"/>
+          <a:lstStyle/>
+          <a:p>
+            <a:pPr algn="ctr"/>
+          </a:p>
+        </p:txBody>
+      </p:sp>
+      <p:sp>
+        <p:nvSpPr>
+          <p:cNvPr id="29" name="Chevron 28"/>
+          <p:cNvSpPr/>
+          <p:nvPr/>
+        </p:nvSpPr>
+        <p:spPr>
+          <a:xfrm>
+            <a:off x="2651760" y="3204972"/>
+            <a:ext cx="256032" cy="155448"/>
+          </a:xfrm>
+          <a:prstGeom prst="chevron">
+            <a:avLst/>
+          </a:prstGeom>
+          <a:solidFill>
+            <a:srgbClr val="2E8B9E"/>
+          </a:solidFill>
+          <a:ln>
+            <a:noFill/>
+          </a:ln>
+          <a:effectLst/>
+        </p:spPr>
+        <p:style>
+          <a:lnRef idx="1">
+            <a:schemeClr val="accent1"/>
+          </a:lnRef>
+          <a:fillRef idx="3">
+            <a:schemeClr val="accent1"/>
+          </a:fillRef>
+          <a:effectRef idx="2">
+            <a:schemeClr val="accent1"/>
+          </a:effectRef>
+          <a:fontRef idx="minor">
+            <a:schemeClr val="lt1"/>
+          </a:fontRef>
+        </p:style>
+        <p:txBody>
+          <a:bodyPr rtlCol="0" anchor="ctr"/>
+          <a:lstStyle/>
+          <a:p>
+            <a:pPr algn="ctr"/>
+          </a:p>
+        </p:txBody>
+      </p:sp>
+      <p:sp>
+        <p:nvSpPr>
+          <p:cNvPr id="30" name="Chevron 29"/>
+          <p:cNvSpPr/>
+          <p:nvPr/>
+        </p:nvSpPr>
+        <p:spPr>
+          <a:xfrm>
+            <a:off x="2875788" y="3204972"/>
+            <a:ext cx="256032" cy="155448"/>
+          </a:xfrm>
+          <a:prstGeom prst="chevron">
+            <a:avLst/>
+          </a:prstGeom>
+          <a:solidFill>
+            <a:srgbClr val="DDE1E7"/>
+          </a:solidFill>
+          <a:ln>
+            <a:noFill/>
+          </a:ln>
+          <a:effectLst/>
+        </p:spPr>
+        <p:style>
+          <a:lnRef idx="1">
+            <a:schemeClr val="accent1"/>
+          </a:lnRef>
+          <a:fillRef idx="3">
+            <a:schemeClr val="accent1"/>
+          </a:fillRef>
+          <a:effectRef idx="2">
+            <a:schemeClr val="accent1"/>
+          </a:effectRef>
+          <a:fontRef idx="minor">
+            <a:schemeClr val="lt1"/>
+          </a:fontRef>
+        </p:style>
+        <p:txBody>
+          <a:bodyPr rtlCol="0" anchor="ctr"/>
+          <a:lstStyle/>
+          <a:p>
+            <a:pPr algn="ctr"/>
+          </a:p>
+        </p:txBody>
+      </p:sp>
+      <p:sp>
+        <p:nvSpPr>
+          <p:cNvPr id="31" name="Chevron 30"/>
+          <p:cNvSpPr/>
+          <p:nvPr/>
+        </p:nvSpPr>
+        <p:spPr>
+          <a:xfrm>
+            <a:off x="3099816" y="3204972"/>
+            <a:ext cx="256032" cy="155448"/>
+          </a:xfrm>
+          <a:prstGeom prst="chevron">
+            <a:avLst/>
+          </a:prstGeom>
+          <a:solidFill>
+            <a:srgbClr val="DDE1E7"/>
+          </a:solidFill>
+          <a:ln>
+            <a:noFill/>
+          </a:ln>
+          <a:effectLst/>
+        </p:spPr>
+        <p:style>
+          <a:lnRef idx="1">
+            <a:schemeClr val="accent1"/>
+          </a:lnRef>
+          <a:fillRef idx="3">
+            <a:schemeClr val="accent1"/>
+          </a:fillRef>
+          <a:effectRef idx="2">
+            <a:schemeClr val="accent1"/>
+          </a:effectRef>
+          <a:fontRef idx="minor">
+            <a:schemeClr val="lt1"/>
+          </a:fontRef>
+        </p:style>
+        <p:txBody>
+          <a:bodyPr rtlCol="0" anchor="ctr"/>
+          <a:lstStyle/>
+          <a:p>
+            <a:pPr algn="ctr"/>
+          </a:p>
+        </p:txBody>
+      </p:sp>
+      <p:sp>
+        <p:nvSpPr>
+          <p:cNvPr id="32" name="TextBox 31"/>
+          <p:cNvSpPr txBox="1"/>
+          <p:nvPr/>
+        </p:nvSpPr>
+        <p:spPr>
+          <a:xfrm>
+            <a:off x="3351276" y="3182112"/>
+            <a:ext cx="502920" cy="219456"/>
+          </a:xfrm>
+          <a:prstGeom prst="rect">
+            <a:avLst/>
+          </a:prstGeom>
+          <a:noFill/>
+        </p:spPr>
+        <p:txBody>
+          <a:bodyPr wrap="square" anchor="ctr" lIns="25400" rIns="25400" tIns="12700" bIns="12700">
+            <a:spAutoFit/>
+          </a:bodyPr>
+          <a:lstStyle/>
+          <a:p>
+            <a:pPr algn="l">
+              <a:lnSpc>
+                <a:spcPct val="100000"/>
+              </a:lnSpc>
+            </a:pPr>
+            <a:r>
+              <a:rPr sz="900" b="1" i="0">
+                <a:solidFill>
+                  <a:srgbClr val="2E8B9E"/>
+                </a:solidFill>
+                <a:latin typeface="Meiryo"/>
+              </a:rPr>
+              <a:t>Lv3</a:t>
+            </a:r>
+          </a:p>
+        </p:txBody>
+      </p:sp>
+      <p:sp>
+        <p:nvSpPr>
+          <p:cNvPr id="33" name="Chevron 32"/>
+          <p:cNvSpPr/>
+          <p:nvPr/>
+        </p:nvSpPr>
+        <p:spPr>
+          <a:xfrm>
+            <a:off x="2203704" y="3589020"/>
+            <a:ext cx="256032" cy="155448"/>
+          </a:xfrm>
+          <a:prstGeom prst="chevron">
+            <a:avLst/>
+          </a:prstGeom>
+          <a:solidFill>
+            <a:srgbClr val="2E8B9E"/>
+          </a:solidFill>
+          <a:ln>
+            <a:noFill/>
+          </a:ln>
+          <a:effectLst/>
+        </p:spPr>
+        <p:style>
+          <a:lnRef idx="1">
+            <a:schemeClr val="accent1"/>
+          </a:lnRef>
+          <a:fillRef idx="3">
+            <a:schemeClr val="accent1"/>
+          </a:fillRef>
+          <a:effectRef idx="2">
+            <a:schemeClr val="accent1"/>
+          </a:effectRef>
+          <a:fontRef idx="minor">
+            <a:schemeClr val="lt1"/>
+          </a:fontRef>
+        </p:style>
+        <p:txBody>
+          <a:bodyPr rtlCol="0" anchor="ctr"/>
+          <a:lstStyle/>
+          <a:p>
+            <a:pPr algn="ctr"/>
+          </a:p>
+        </p:txBody>
+      </p:sp>
+      <p:sp>
+        <p:nvSpPr>
+          <p:cNvPr id="34" name="Chevron 33"/>
+          <p:cNvSpPr/>
+          <p:nvPr/>
+        </p:nvSpPr>
+        <p:spPr>
+          <a:xfrm>
+            <a:off x="2427732" y="3589020"/>
+            <a:ext cx="256032" cy="155448"/>
+          </a:xfrm>
+          <a:prstGeom prst="chevron">
+            <a:avLst/>
+          </a:prstGeom>
+          <a:solidFill>
+            <a:srgbClr val="2E8B9E"/>
+          </a:solidFill>
+          <a:ln>
+            <a:noFill/>
+          </a:ln>
+          <a:effectLst/>
+        </p:spPr>
+        <p:style>
+          <a:lnRef idx="1">
+            <a:schemeClr val="accent1"/>
+          </a:lnRef>
+          <a:fillRef idx="3">
+            <a:schemeClr val="accent1"/>
+          </a:fillRef>
+          <a:effectRef idx="2">
+            <a:schemeClr val="accent1"/>
+          </a:effectRef>
+          <a:fontRef idx="minor">
+            <a:schemeClr val="lt1"/>
+          </a:fontRef>
+        </p:style>
+        <p:txBody>
+          <a:bodyPr rtlCol="0" anchor="ctr"/>
+          <a:lstStyle/>
+          <a:p>
+            <a:pPr algn="ctr"/>
+          </a:p>
+        </p:txBody>
+      </p:sp>
+      <p:sp>
+        <p:nvSpPr>
+          <p:cNvPr id="35" name="Chevron 34"/>
+          <p:cNvSpPr/>
+          <p:nvPr/>
+        </p:nvSpPr>
+        <p:spPr>
+          <a:xfrm>
+            <a:off x="2651760" y="3589020"/>
+            <a:ext cx="256032" cy="155448"/>
+          </a:xfrm>
+          <a:prstGeom prst="chevron">
+            <a:avLst/>
+          </a:prstGeom>
+          <a:solidFill>
+            <a:srgbClr val="2E8B9E"/>
+          </a:solidFill>
+          <a:ln>
+            <a:noFill/>
+          </a:ln>
+          <a:effectLst/>
+        </p:spPr>
+        <p:style>
+          <a:lnRef idx="1">
+            <a:schemeClr val="accent1"/>
+          </a:lnRef>
+          <a:fillRef idx="3">
+            <a:schemeClr val="accent1"/>
+          </a:fillRef>
+          <a:effectRef idx="2">
+            <a:schemeClr val="accent1"/>
+          </a:effectRef>
+          <a:fontRef idx="minor">
+            <a:schemeClr val="lt1"/>
+          </a:fontRef>
+        </p:style>
+        <p:txBody>
+          <a:bodyPr rtlCol="0" anchor="ctr"/>
+          <a:lstStyle/>
+          <a:p>
+            <a:pPr algn="ctr"/>
+          </a:p>
+        </p:txBody>
+      </p:sp>
+      <p:sp>
+        <p:nvSpPr>
+          <p:cNvPr id="36" name="Chevron 35"/>
+          <p:cNvSpPr/>
+          <p:nvPr/>
+        </p:nvSpPr>
+        <p:spPr>
+          <a:xfrm>
+            <a:off x="2875788" y="3589020"/>
+            <a:ext cx="256032" cy="155448"/>
+          </a:xfrm>
+          <a:prstGeom prst="chevron">
+            <a:avLst/>
+          </a:prstGeom>
+          <a:solidFill>
+            <a:srgbClr val="DDE1E7"/>
+          </a:solidFill>
+          <a:ln>
+            <a:noFill/>
+          </a:ln>
+          <a:effectLst/>
+        </p:spPr>
+        <p:style>
+          <a:lnRef idx="1">
+            <a:schemeClr val="accent1"/>
+          </a:lnRef>
+          <a:fillRef idx="3">
+            <a:schemeClr val="accent1"/>
+          </a:fillRef>
+          <a:effectRef idx="2">
+            <a:schemeClr val="accent1"/>
+          </a:effectRef>
+          <a:fontRef idx="minor">
+            <a:schemeClr val="lt1"/>
+          </a:fontRef>
+        </p:style>
+        <p:txBody>
+          <a:bodyPr rtlCol="0" anchor="ctr"/>
+          <a:lstStyle/>
+          <a:p>
+            <a:pPr algn="ctr"/>
+          </a:p>
+        </p:txBody>
+      </p:sp>
+      <p:sp>
+        <p:nvSpPr>
+          <p:cNvPr id="37" name="Chevron 36"/>
+          <p:cNvSpPr/>
+          <p:nvPr/>
+        </p:nvSpPr>
+        <p:spPr>
+          <a:xfrm>
+            <a:off x="3099816" y="3589020"/>
+            <a:ext cx="256032" cy="155448"/>
+          </a:xfrm>
+          <a:prstGeom prst="chevron">
+            <a:avLst/>
+          </a:prstGeom>
+          <a:solidFill>
+            <a:srgbClr val="DDE1E7"/>
+          </a:solidFill>
+          <a:ln>
+            <a:noFill/>
+          </a:ln>
+          <a:effectLst/>
+        </p:spPr>
+        <p:style>
+          <a:lnRef idx="1">
+            <a:schemeClr val="accent1"/>
+          </a:lnRef>
+          <a:fillRef idx="3">
+            <a:schemeClr val="accent1"/>
+          </a:fillRef>
+          <a:effectRef idx="2">
+            <a:schemeClr val="accent1"/>
+          </a:effectRef>
+          <a:fontRef idx="minor">
+            <a:schemeClr val="lt1"/>
+          </a:fontRef>
+        </p:style>
+        <p:txBody>
+          <a:bodyPr rtlCol="0" anchor="ctr"/>
+          <a:lstStyle/>
+          <a:p>
+            <a:pPr algn="ctr"/>
+          </a:p>
+        </p:txBody>
+      </p:sp>
+      <p:sp>
+        <p:nvSpPr>
+          <p:cNvPr id="38" name="TextBox 37"/>
+          <p:cNvSpPr txBox="1"/>
+          <p:nvPr/>
+        </p:nvSpPr>
+        <p:spPr>
+          <a:xfrm>
+            <a:off x="3351276" y="3566160"/>
+            <a:ext cx="502920" cy="219456"/>
+          </a:xfrm>
+          <a:prstGeom prst="rect">
+            <a:avLst/>
+          </a:prstGeom>
+          <a:noFill/>
+        </p:spPr>
+        <p:txBody>
+          <a:bodyPr wrap="square" anchor="ctr" lIns="25400" rIns="25400" tIns="12700" bIns="12700">
+            <a:spAutoFit/>
+          </a:bodyPr>
+          <a:lstStyle/>
+          <a:p>
+            <a:pPr algn="l">
+              <a:lnSpc>
+                <a:spcPct val="100000"/>
+              </a:lnSpc>
+            </a:pPr>
+            <a:r>
+              <a:rPr sz="900" b="1" i="0">
+                <a:solidFill>
+                  <a:srgbClr val="2E8B9E"/>
+                </a:solidFill>
+                <a:latin typeface="Meiryo"/>
+              </a:rPr>
+              <a:t>Lv3</a:t>
+            </a:r>
+          </a:p>
+        </p:txBody>
+      </p:sp>
+      <p:sp>
+        <p:nvSpPr>
+          <p:cNvPr id="39" name="Chevron 38"/>
+          <p:cNvSpPr/>
+          <p:nvPr/>
+        </p:nvSpPr>
+        <p:spPr>
+          <a:xfrm>
+            <a:off x="2203704" y="3973068"/>
+            <a:ext cx="256032" cy="155448"/>
+          </a:xfrm>
+          <a:prstGeom prst="chevron">
+            <a:avLst/>
+          </a:prstGeom>
+          <a:solidFill>
+            <a:srgbClr val="2E8B9E"/>
+          </a:solidFill>
+          <a:ln>
+            <a:noFill/>
+          </a:ln>
+          <a:effectLst/>
+        </p:spPr>
+        <p:style>
+          <a:lnRef idx="1">
+            <a:schemeClr val="accent1"/>
+          </a:lnRef>
+          <a:fillRef idx="3">
+            <a:schemeClr val="accent1"/>
+          </a:fillRef>
+          <a:effectRef idx="2">
+            <a:schemeClr val="accent1"/>
+          </a:effectRef>
+          <a:fontRef idx="minor">
+            <a:schemeClr val="lt1"/>
+          </a:fontRef>
+        </p:style>
+        <p:txBody>
+          <a:bodyPr rtlCol="0" anchor="ctr"/>
+          <a:lstStyle/>
+          <a:p>
+            <a:pPr algn="ctr"/>
+          </a:p>
+        </p:txBody>
+      </p:sp>
+      <p:sp>
+        <p:nvSpPr>
+          <p:cNvPr id="40" name="Chevron 39"/>
+          <p:cNvSpPr/>
+          <p:nvPr/>
+        </p:nvSpPr>
+        <p:spPr>
+          <a:xfrm>
+            <a:off x="2427732" y="3973068"/>
+            <a:ext cx="256032" cy="155448"/>
+          </a:xfrm>
+          <a:prstGeom prst="chevron">
+            <a:avLst/>
+          </a:prstGeom>
+          <a:solidFill>
+            <a:srgbClr val="2E8B9E"/>
+          </a:solidFill>
+          <a:ln>
+            <a:noFill/>
+          </a:ln>
+          <a:effectLst/>
+        </p:spPr>
+        <p:style>
+          <a:lnRef idx="1">
+            <a:schemeClr val="accent1"/>
+          </a:lnRef>
+          <a:fillRef idx="3">
+            <a:schemeClr val="accent1"/>
+          </a:fillRef>
+          <a:effectRef idx="2">
+            <a:schemeClr val="accent1"/>
+          </a:effectRef>
+          <a:fontRef idx="minor">
+            <a:schemeClr val="lt1"/>
+          </a:fontRef>
+        </p:style>
+        <p:txBody>
+          <a:bodyPr rtlCol="0" anchor="ctr"/>
+          <a:lstStyle/>
+          <a:p>
+            <a:pPr algn="ctr"/>
+          </a:p>
+        </p:txBody>
+      </p:sp>
+      <p:sp>
+        <p:nvSpPr>
+          <p:cNvPr id="41" name="Chevron 40"/>
+          <p:cNvSpPr/>
+          <p:nvPr/>
+        </p:nvSpPr>
+        <p:spPr>
+          <a:xfrm>
+            <a:off x="2651760" y="3973068"/>
+            <a:ext cx="256032" cy="155448"/>
+          </a:xfrm>
+          <a:prstGeom prst="chevron">
+            <a:avLst/>
+          </a:prstGeom>
+          <a:solidFill>
+            <a:srgbClr val="2E8B9E"/>
+          </a:solidFill>
+          <a:ln>
+            <a:noFill/>
+          </a:ln>
+          <a:effectLst/>
+        </p:spPr>
+        <p:style>
+          <a:lnRef idx="1">
+            <a:schemeClr val="accent1"/>
+          </a:lnRef>
+          <a:fillRef idx="3">
+            <a:schemeClr val="accent1"/>
+          </a:fillRef>
+          <a:effectRef idx="2">
+            <a:schemeClr val="accent1"/>
+          </a:effectRef>
+          <a:fontRef idx="minor">
+            <a:schemeClr val="lt1"/>
+          </a:fontRef>
+        </p:style>
+        <p:txBody>
+          <a:bodyPr rtlCol="0" anchor="ctr"/>
+          <a:lstStyle/>
+          <a:p>
+            <a:pPr algn="ctr"/>
+          </a:p>
+        </p:txBody>
+      </p:sp>
+      <p:sp>
+        <p:nvSpPr>
+          <p:cNvPr id="42" name="Chevron 41"/>
+          <p:cNvSpPr/>
+          <p:nvPr/>
+        </p:nvSpPr>
+        <p:spPr>
+          <a:xfrm>
+            <a:off x="2875788" y="3973068"/>
+            <a:ext cx="256032" cy="155448"/>
+          </a:xfrm>
+          <a:prstGeom prst="chevron">
+            <a:avLst/>
+          </a:prstGeom>
+          <a:solidFill>
+            <a:srgbClr val="DDE1E7"/>
+          </a:solidFill>
+          <a:ln>
+            <a:noFill/>
+          </a:ln>
+          <a:effectLst/>
+        </p:spPr>
+        <p:style>
+          <a:lnRef idx="1">
+            <a:schemeClr val="accent1"/>
+          </a:lnRef>
+          <a:fillRef idx="3">
+            <a:schemeClr val="accent1"/>
+          </a:fillRef>
+          <a:effectRef idx="2">
+            <a:schemeClr val="accent1"/>
+          </a:effectRef>
+          <a:fontRef idx="minor">
+            <a:schemeClr val="lt1"/>
+          </a:fontRef>
+        </p:style>
+        <p:txBody>
+          <a:bodyPr rtlCol="0" anchor="ctr"/>
+          <a:lstStyle/>
+          <a:p>
+            <a:pPr algn="ctr"/>
+          </a:p>
+        </p:txBody>
+      </p:sp>
+      <p:sp>
+        <p:nvSpPr>
+          <p:cNvPr id="43" name="Chevron 42"/>
+          <p:cNvSpPr/>
+          <p:nvPr/>
+        </p:nvSpPr>
+        <p:spPr>
+          <a:xfrm>
+            <a:off x="3099816" y="3973068"/>
+            <a:ext cx="256032" cy="155448"/>
+          </a:xfrm>
+          <a:prstGeom prst="chevron">
+            <a:avLst/>
+          </a:prstGeom>
+          <a:solidFill>
+            <a:srgbClr val="DDE1E7"/>
+          </a:solidFill>
+          <a:ln>
+            <a:noFill/>
+          </a:ln>
+          <a:effectLst/>
+        </p:spPr>
+        <p:style>
+          <a:lnRef idx="1">
+            <a:schemeClr val="accent1"/>
+          </a:lnRef>
+          <a:fillRef idx="3">
+            <a:schemeClr val="accent1"/>
+          </a:fillRef>
+          <a:effectRef idx="2">
+            <a:schemeClr val="accent1"/>
+          </a:effectRef>
+          <a:fontRef idx="minor">
+            <a:schemeClr val="lt1"/>
+          </a:fontRef>
+        </p:style>
+        <p:txBody>
+          <a:bodyPr rtlCol="0" anchor="ctr"/>
+          <a:lstStyle/>
+          <a:p>
+            <a:pPr algn="ctr"/>
+          </a:p>
+        </p:txBody>
+      </p:sp>
+      <p:sp>
+        <p:nvSpPr>
+          <p:cNvPr id="44" name="TextBox 43"/>
+          <p:cNvSpPr txBox="1"/>
+          <p:nvPr/>
+        </p:nvSpPr>
+        <p:spPr>
+          <a:xfrm>
+            <a:off x="3351276" y="3950208"/>
+            <a:ext cx="502920" cy="219456"/>
+          </a:xfrm>
+          <a:prstGeom prst="rect">
+            <a:avLst/>
+          </a:prstGeom>
+          <a:noFill/>
+        </p:spPr>
+        <p:txBody>
+          <a:bodyPr wrap="square" anchor="ctr" lIns="25400" rIns="25400" tIns="12700" bIns="12700">
+            <a:spAutoFit/>
+          </a:bodyPr>
+          <a:lstStyle/>
+          <a:p>
+            <a:pPr algn="l">
+              <a:lnSpc>
+                <a:spcPct val="100000"/>
+              </a:lnSpc>
+            </a:pPr>
+            <a:r>
+              <a:rPr sz="900" b="1" i="0">
+                <a:solidFill>
+                  <a:srgbClr val="2E8B9E"/>
+                </a:solidFill>
+                <a:latin typeface="Meiryo"/>
+              </a:rPr>
+              <a:t>Lv3</a:t>
+            </a:r>
+          </a:p>
+        </p:txBody>
+      </p:sp>
+      <p:sp>
+        <p:nvSpPr>
+          <p:cNvPr id="45" name="Chevron 44"/>
+          <p:cNvSpPr/>
+          <p:nvPr/>
+        </p:nvSpPr>
+        <p:spPr>
+          <a:xfrm>
+            <a:off x="2203704" y="4357116"/>
+            <a:ext cx="256032" cy="155448"/>
+          </a:xfrm>
+          <a:prstGeom prst="chevron">
+            <a:avLst/>
+          </a:prstGeom>
+          <a:solidFill>
+            <a:srgbClr val="2E8B9E"/>
+          </a:solidFill>
+          <a:ln>
+            <a:noFill/>
+          </a:ln>
+          <a:effectLst/>
+        </p:spPr>
+        <p:style>
+          <a:lnRef idx="1">
+            <a:schemeClr val="accent1"/>
+          </a:lnRef>
+          <a:fillRef idx="3">
+            <a:schemeClr val="accent1"/>
+          </a:fillRef>
+          <a:effectRef idx="2">
+            <a:schemeClr val="accent1"/>
+          </a:effectRef>
+          <a:fontRef idx="minor">
+            <a:schemeClr val="lt1"/>
+          </a:fontRef>
+        </p:style>
+        <p:txBody>
+          <a:bodyPr rtlCol="0" anchor="ctr"/>
+          <a:lstStyle/>
+          <a:p>
+            <a:pPr algn="ctr"/>
+          </a:p>
+        </p:txBody>
+      </p:sp>
+      <p:sp>
+        <p:nvSpPr>
+          <p:cNvPr id="46" name="Chevron 45"/>
+          <p:cNvSpPr/>
+          <p:nvPr/>
+        </p:nvSpPr>
+        <p:spPr>
+          <a:xfrm>
+            <a:off x="2427732" y="4357116"/>
+            <a:ext cx="256032" cy="155448"/>
+          </a:xfrm>
+          <a:prstGeom prst="chevron">
+            <a:avLst/>
+          </a:prstGeom>
+          <a:solidFill>
+            <a:srgbClr val="2E8B9E"/>
+          </a:solidFill>
+          <a:ln>
+            <a:noFill/>
+          </a:ln>
+          <a:effectLst/>
+        </p:spPr>
+        <p:style>
+          <a:lnRef idx="1">
+            <a:schemeClr val="accent1"/>
+          </a:lnRef>
+          <a:fillRef idx="3">
+            <a:schemeClr val="accent1"/>
+          </a:fillRef>
+          <a:effectRef idx="2">
+            <a:schemeClr val="accent1"/>
+          </a:effectRef>
+          <a:fontRef idx="minor">
+            <a:schemeClr val="lt1"/>
+          </a:fontRef>
+        </p:style>
+        <p:txBody>
+          <a:bodyPr rtlCol="0" anchor="ctr"/>
+          <a:lstStyle/>
+          <a:p>
+            <a:pPr algn="ctr"/>
+          </a:p>
+        </p:txBody>
+      </p:sp>
+      <p:sp>
+        <p:nvSpPr>
+          <p:cNvPr id="47" name="Chevron 46"/>
+          <p:cNvSpPr/>
+          <p:nvPr/>
+        </p:nvSpPr>
+        <p:spPr>
+          <a:xfrm>
+            <a:off x="2651760" y="4357116"/>
+            <a:ext cx="256032" cy="155448"/>
+          </a:xfrm>
+          <a:prstGeom prst="chevron">
+            <a:avLst/>
+          </a:prstGeom>
+          <a:solidFill>
+            <a:srgbClr val="2E8B9E"/>
+          </a:solidFill>
+          <a:ln>
+            <a:noFill/>
+          </a:ln>
+          <a:effectLst/>
+        </p:spPr>
+        <p:style>
+          <a:lnRef idx="1">
+            <a:schemeClr val="accent1"/>
+          </a:lnRef>
+          <a:fillRef idx="3">
+            <a:schemeClr val="accent1"/>
+          </a:fillRef>
+          <a:effectRef idx="2">
+            <a:schemeClr val="accent1"/>
+          </a:effectRef>
+          <a:fontRef idx="minor">
+            <a:schemeClr val="lt1"/>
+          </a:fontRef>
+        </p:style>
+        <p:txBody>
+          <a:bodyPr rtlCol="0" anchor="ctr"/>
+          <a:lstStyle/>
+          <a:p>
+            <a:pPr algn="ctr"/>
+          </a:p>
+        </p:txBody>
+      </p:sp>
+      <p:sp>
+        <p:nvSpPr>
+          <p:cNvPr id="48" name="Chevron 47"/>
+          <p:cNvSpPr/>
+          <p:nvPr/>
+        </p:nvSpPr>
+        <p:spPr>
+          <a:xfrm>
+            <a:off x="2875788" y="4357116"/>
+            <a:ext cx="256032" cy="155448"/>
+          </a:xfrm>
+          <a:prstGeom prst="chevron">
+            <a:avLst/>
+          </a:prstGeom>
+          <a:solidFill>
+            <a:srgbClr val="DDE1E7"/>
+          </a:solidFill>
+          <a:ln>
+            <a:noFill/>
+          </a:ln>
+          <a:effectLst/>
+        </p:spPr>
+        <p:style>
+          <a:lnRef idx="1">
+            <a:schemeClr val="accent1"/>
+          </a:lnRef>
+          <a:fillRef idx="3">
+            <a:schemeClr val="accent1"/>
+          </a:fillRef>
+          <a:effectRef idx="2">
+            <a:schemeClr val="accent1"/>
+          </a:effectRef>
+          <a:fontRef idx="minor">
+            <a:schemeClr val="lt1"/>
+          </a:fontRef>
+        </p:style>
+        <p:txBody>
+          <a:bodyPr rtlCol="0" anchor="ctr"/>
+          <a:lstStyle/>
+          <a:p>
+            <a:pPr algn="ctr"/>
+          </a:p>
+        </p:txBody>
+      </p:sp>
+      <p:sp>
+        <p:nvSpPr>
+          <p:cNvPr id="49" name="Chevron 48"/>
+          <p:cNvSpPr/>
+          <p:nvPr/>
+        </p:nvSpPr>
+        <p:spPr>
+          <a:xfrm>
+            <a:off x="3099816" y="4357116"/>
+            <a:ext cx="256032" cy="155448"/>
+          </a:xfrm>
+          <a:prstGeom prst="chevron">
+            <a:avLst/>
+          </a:prstGeom>
+          <a:solidFill>
+            <a:srgbClr val="DDE1E7"/>
+          </a:solidFill>
+          <a:ln>
+            <a:noFill/>
+          </a:ln>
+          <a:effectLst/>
+        </p:spPr>
+        <p:style>
+          <a:lnRef idx="1">
+            <a:schemeClr val="accent1"/>
+          </a:lnRef>
+          <a:fillRef idx="3">
+            <a:schemeClr val="accent1"/>
+          </a:fillRef>
+          <a:effectRef idx="2">
+            <a:schemeClr val="accent1"/>
+          </a:effectRef>
+          <a:fontRef idx="minor">
+            <a:schemeClr val="lt1"/>
+          </a:fontRef>
+        </p:style>
+        <p:txBody>
+          <a:bodyPr rtlCol="0" anchor="ctr"/>
+          <a:lstStyle/>
+          <a:p>
+            <a:pPr algn="ctr"/>
+          </a:p>
+        </p:txBody>
+      </p:sp>
+      <p:sp>
+        <p:nvSpPr>
+          <p:cNvPr id="50" name="TextBox 49"/>
+          <p:cNvSpPr txBox="1"/>
+          <p:nvPr/>
+        </p:nvSpPr>
+        <p:spPr>
+          <a:xfrm>
+            <a:off x="3351276" y="4334256"/>
+            <a:ext cx="502920" cy="219456"/>
+          </a:xfrm>
+          <a:prstGeom prst="rect">
+            <a:avLst/>
+          </a:prstGeom>
+          <a:noFill/>
+        </p:spPr>
+        <p:txBody>
+          <a:bodyPr wrap="square" anchor="ctr" lIns="25400" rIns="25400" tIns="12700" bIns="12700">
+            <a:spAutoFit/>
+          </a:bodyPr>
+          <a:lstStyle/>
+          <a:p>
+            <a:pPr algn="l">
+              <a:lnSpc>
+                <a:spcPct val="100000"/>
+              </a:lnSpc>
+            </a:pPr>
+            <a:r>
+              <a:rPr sz="900" b="1" i="0">
+                <a:solidFill>
+                  <a:srgbClr val="2E8B9E"/>
+                </a:solidFill>
+                <a:latin typeface="Meiryo"/>
+              </a:rPr>
+              <a:t>Lv3</a:t>
+            </a:r>
+          </a:p>
+        </p:txBody>
+      </p:sp>
+      <p:sp>
+        <p:nvSpPr>
+          <p:cNvPr id="51" name="Chevron 50"/>
+          <p:cNvSpPr/>
+          <p:nvPr/>
+        </p:nvSpPr>
+        <p:spPr>
+          <a:xfrm>
+            <a:off x="2203704" y="4741164"/>
+            <a:ext cx="256032" cy="155448"/>
+          </a:xfrm>
+          <a:prstGeom prst="chevron">
+            <a:avLst/>
+          </a:prstGeom>
+          <a:solidFill>
+            <a:srgbClr val="3F8F5B"/>
+          </a:solidFill>
+          <a:ln>
+            <a:noFill/>
+          </a:ln>
+          <a:effectLst/>
+        </p:spPr>
+        <p:style>
+          <a:lnRef idx="1">
+            <a:schemeClr val="accent1"/>
+          </a:lnRef>
+          <a:fillRef idx="3">
+            <a:schemeClr val="accent1"/>
+          </a:fillRef>
+          <a:effectRef idx="2">
+            <a:schemeClr val="accent1"/>
+          </a:effectRef>
+          <a:fontRef idx="minor">
+            <a:schemeClr val="lt1"/>
+          </a:fontRef>
+        </p:style>
+        <p:txBody>
+          <a:bodyPr rtlCol="0" anchor="ctr"/>
+          <a:lstStyle/>
+          <a:p>
+            <a:pPr algn="ctr"/>
+          </a:p>
+        </p:txBody>
+      </p:sp>
+      <p:sp>
+        <p:nvSpPr>
+          <p:cNvPr id="52" name="Chevron 51"/>
+          <p:cNvSpPr/>
+          <p:nvPr/>
+        </p:nvSpPr>
+        <p:spPr>
+          <a:xfrm>
+            <a:off x="2427732" y="4741164"/>
+            <a:ext cx="256032" cy="155448"/>
+          </a:xfrm>
+          <a:prstGeom prst="chevron">
+            <a:avLst/>
+          </a:prstGeom>
+          <a:solidFill>
+            <a:srgbClr val="3F8F5B"/>
+          </a:solidFill>
+          <a:ln>
+            <a:noFill/>
+          </a:ln>
+          <a:effectLst/>
+        </p:spPr>
+        <p:style>
+          <a:lnRef idx="1">
+            <a:schemeClr val="accent1"/>
+          </a:lnRef>
+          <a:fillRef idx="3">
+            <a:schemeClr val="accent1"/>
+          </a:fillRef>
+          <a:effectRef idx="2">
+            <a:schemeClr val="accent1"/>
+          </a:effectRef>
+          <a:fontRef idx="minor">
+            <a:schemeClr val="lt1"/>
+          </a:fontRef>
+        </p:style>
+        <p:txBody>
+          <a:bodyPr rtlCol="0" anchor="ctr"/>
+          <a:lstStyle/>
+          <a:p>
+            <a:pPr algn="ctr"/>
+          </a:p>
+        </p:txBody>
+      </p:sp>
+      <p:sp>
+        <p:nvSpPr>
+          <p:cNvPr id="53" name="Chevron 52"/>
+          <p:cNvSpPr/>
+          <p:nvPr/>
+        </p:nvSpPr>
+        <p:spPr>
+          <a:xfrm>
+            <a:off x="2651760" y="4741164"/>
+            <a:ext cx="256032" cy="155448"/>
+          </a:xfrm>
+          <a:prstGeom prst="chevron">
+            <a:avLst/>
+          </a:prstGeom>
+          <a:solidFill>
+            <a:srgbClr val="3F8F5B"/>
+          </a:solidFill>
+          <a:ln>
+            <a:noFill/>
+          </a:ln>
+          <a:effectLst/>
+        </p:spPr>
+        <p:style>
+          <a:lnRef idx="1">
+            <a:schemeClr val="accent1"/>
+          </a:lnRef>
+          <a:fillRef idx="3">
+            <a:schemeClr val="accent1"/>
+          </a:fillRef>
+          <a:effectRef idx="2">
+            <a:schemeClr val="accent1"/>
+          </a:effectRef>
+          <a:fontRef idx="minor">
+            <a:schemeClr val="lt1"/>
+          </a:fontRef>
+        </p:style>
+        <p:txBody>
+          <a:bodyPr rtlCol="0" anchor="ctr"/>
+          <a:lstStyle/>
+          <a:p>
+            <a:pPr algn="ctr"/>
+          </a:p>
+        </p:txBody>
+      </p:sp>
+      <p:sp>
+        <p:nvSpPr>
+          <p:cNvPr id="54" name="Chevron 53"/>
+          <p:cNvSpPr/>
+          <p:nvPr/>
+        </p:nvSpPr>
+        <p:spPr>
+          <a:xfrm>
+            <a:off x="2875788" y="4741164"/>
+            <a:ext cx="256032" cy="155448"/>
+          </a:xfrm>
+          <a:prstGeom prst="chevron">
+            <a:avLst/>
+          </a:prstGeom>
+          <a:solidFill>
+            <a:srgbClr val="3F8F5B"/>
+          </a:solidFill>
+          <a:ln>
+            <a:noFill/>
+          </a:ln>
+          <a:effectLst/>
+        </p:spPr>
+        <p:style>
+          <a:lnRef idx="1">
+            <a:schemeClr val="accent1"/>
+          </a:lnRef>
+          <a:fillRef idx="3">
+            <a:schemeClr val="accent1"/>
+          </a:fillRef>
+          <a:effectRef idx="2">
+            <a:schemeClr val="accent1"/>
+          </a:effectRef>
+          <a:fontRef idx="minor">
+            <a:schemeClr val="lt1"/>
+          </a:fontRef>
+        </p:style>
+        <p:txBody>
+          <a:bodyPr rtlCol="0" anchor="ctr"/>
+          <a:lstStyle/>
+          <a:p>
+            <a:pPr algn="ctr"/>
+          </a:p>
+        </p:txBody>
+      </p:sp>
+      <p:sp>
+        <p:nvSpPr>
+          <p:cNvPr id="55" name="Chevron 54"/>
+          <p:cNvSpPr/>
+          <p:nvPr/>
+        </p:nvSpPr>
+        <p:spPr>
+          <a:xfrm>
+            <a:off x="3099816" y="4741164"/>
+            <a:ext cx="256032" cy="155448"/>
+          </a:xfrm>
+          <a:prstGeom prst="chevron">
+            <a:avLst/>
+          </a:prstGeom>
+          <a:solidFill>
+            <a:srgbClr val="3F8F5B"/>
+          </a:solidFill>
+          <a:ln>
+            <a:noFill/>
+          </a:ln>
+          <a:effectLst/>
+        </p:spPr>
+        <p:style>
+          <a:lnRef idx="1">
+            <a:schemeClr val="accent1"/>
+          </a:lnRef>
+          <a:fillRef idx="3">
+            <a:schemeClr val="accent1"/>
+          </a:fillRef>
+          <a:effectRef idx="2">
+            <a:schemeClr val="accent1"/>
+          </a:effectRef>
+          <a:fontRef idx="minor">
+            <a:schemeClr val="lt1"/>
+          </a:fontRef>
+        </p:style>
+        <p:txBody>
+          <a:bodyPr rtlCol="0" anchor="ctr"/>
+          <a:lstStyle/>
+          <a:p>
+            <a:pPr algn="ctr"/>
+          </a:p>
+        </p:txBody>
+      </p:sp>
+      <p:sp>
+        <p:nvSpPr>
+          <p:cNvPr id="56" name="TextBox 55"/>
+          <p:cNvSpPr txBox="1"/>
+          <p:nvPr/>
+        </p:nvSpPr>
+        <p:spPr>
+          <a:xfrm>
+            <a:off x="3351276" y="4718304"/>
+            <a:ext cx="502920" cy="219456"/>
+          </a:xfrm>
+          <a:prstGeom prst="rect">
+            <a:avLst/>
+          </a:prstGeom>
+          <a:noFill/>
+        </p:spPr>
+        <p:txBody>
+          <a:bodyPr wrap="square" anchor="ctr" lIns="25400" rIns="25400" tIns="12700" bIns="12700">
+            <a:spAutoFit/>
+          </a:bodyPr>
+          <a:lstStyle/>
+          <a:p>
+            <a:pPr algn="l">
+              <a:lnSpc>
+                <a:spcPct val="100000"/>
+              </a:lnSpc>
+            </a:pPr>
+            <a:r>
+              <a:rPr sz="900" b="1" i="0">
+                <a:solidFill>
+                  <a:srgbClr val="3F8F5B"/>
+                </a:solidFill>
+                <a:latin typeface="Meiryo"/>
+              </a:rPr>
+              <a:t>Lv5</a:t>
+            </a:r>
+          </a:p>
+        </p:txBody>
+      </p:sp>
+      <p:sp>
+        <p:nvSpPr>
+          <p:cNvPr id="57" name="Chevron 56"/>
+          <p:cNvSpPr/>
+          <p:nvPr/>
+        </p:nvSpPr>
+        <p:spPr>
+          <a:xfrm>
+            <a:off x="2203704" y="5125212"/>
+            <a:ext cx="256032" cy="155448"/>
+          </a:xfrm>
+          <a:prstGeom prst="chevron">
+            <a:avLst/>
+          </a:prstGeom>
+          <a:solidFill>
+            <a:srgbClr val="C98A1B"/>
+          </a:solidFill>
+          <a:ln>
+            <a:noFill/>
+          </a:ln>
+          <a:effectLst/>
+        </p:spPr>
+        <p:style>
+          <a:lnRef idx="1">
+            <a:schemeClr val="accent1"/>
+          </a:lnRef>
+          <a:fillRef idx="3">
+            <a:schemeClr val="accent1"/>
+          </a:fillRef>
+          <a:effectRef idx="2">
+            <a:schemeClr val="accent1"/>
+          </a:effectRef>
+          <a:fontRef idx="minor">
+            <a:schemeClr val="lt1"/>
+          </a:fontRef>
+        </p:style>
+        <p:txBody>
+          <a:bodyPr rtlCol="0" anchor="ctr"/>
+          <a:lstStyle/>
+          <a:p>
+            <a:pPr algn="ctr"/>
+          </a:p>
+        </p:txBody>
+      </p:sp>
+      <p:sp>
+        <p:nvSpPr>
+          <p:cNvPr id="58" name="Chevron 57"/>
+          <p:cNvSpPr/>
+          <p:nvPr/>
+        </p:nvSpPr>
+        <p:spPr>
+          <a:xfrm>
+            <a:off x="2427732" y="5125212"/>
+            <a:ext cx="256032" cy="155448"/>
+          </a:xfrm>
+          <a:prstGeom prst="chevron">
+            <a:avLst/>
+          </a:prstGeom>
+          <a:solidFill>
+            <a:srgbClr val="C98A1B"/>
+          </a:solidFill>
+          <a:ln>
+            <a:noFill/>
+          </a:ln>
+          <a:effectLst/>
+        </p:spPr>
+        <p:style>
+          <a:lnRef idx="1">
+            <a:schemeClr val="accent1"/>
+          </a:lnRef>
+          <a:fillRef idx="3">
+            <a:schemeClr val="accent1"/>
+          </a:fillRef>
+          <a:effectRef idx="2">
+            <a:schemeClr val="accent1"/>
+          </a:effectRef>
+          <a:fontRef idx="minor">
+            <a:schemeClr val="lt1"/>
+          </a:fontRef>
+        </p:style>
+        <p:txBody>
+          <a:bodyPr rtlCol="0" anchor="ctr"/>
+          <a:lstStyle/>
+          <a:p>
+            <a:pPr algn="ctr"/>
+          </a:p>
+        </p:txBody>
+      </p:sp>
+      <p:sp>
+        <p:nvSpPr>
+          <p:cNvPr id="59" name="Chevron 58"/>
+          <p:cNvSpPr/>
+          <p:nvPr/>
+        </p:nvSpPr>
+        <p:spPr>
+          <a:xfrm>
+            <a:off x="2651760" y="5125212"/>
+            <a:ext cx="256032" cy="155448"/>
+          </a:xfrm>
+          <a:prstGeom prst="chevron">
+            <a:avLst/>
+          </a:prstGeom>
+          <a:solidFill>
+            <a:srgbClr val="DDE1E7"/>
+          </a:solidFill>
+          <a:ln>
+            <a:noFill/>
+          </a:ln>
+          <a:effectLst/>
+        </p:spPr>
+        <p:style>
+          <a:lnRef idx="1">
+            <a:schemeClr val="accent1"/>
+          </a:lnRef>
+          <a:fillRef idx="3">
+            <a:schemeClr val="accent1"/>
+          </a:fillRef>
+          <a:effectRef idx="2">
+            <a:schemeClr val="accent1"/>
+          </a:effectRef>
+          <a:fontRef idx="minor">
+            <a:schemeClr val="lt1"/>
+          </a:fontRef>
+        </p:style>
+        <p:txBody>
+          <a:bodyPr rtlCol="0" anchor="ctr"/>
+          <a:lstStyle/>
+          <a:p>
+            <a:pPr algn="ctr"/>
+          </a:p>
+        </p:txBody>
+      </p:sp>
+      <p:sp>
+        <p:nvSpPr>
+          <p:cNvPr id="60" name="Chevron 59"/>
+          <p:cNvSpPr/>
+          <p:nvPr/>
+        </p:nvSpPr>
+        <p:spPr>
+          <a:xfrm>
+            <a:off x="2875788" y="5125212"/>
+            <a:ext cx="256032" cy="155448"/>
+          </a:xfrm>
+          <a:prstGeom prst="chevron">
+            <a:avLst/>
+          </a:prstGeom>
+          <a:solidFill>
+            <a:srgbClr val="DDE1E7"/>
+          </a:solidFill>
+          <a:ln>
+            <a:noFill/>
+          </a:ln>
+          <a:effectLst/>
+        </p:spPr>
+        <p:style>
+          <a:lnRef idx="1">
+            <a:schemeClr val="accent1"/>
+          </a:lnRef>
+          <a:fillRef idx="3">
+            <a:schemeClr val="accent1"/>
+          </a:fillRef>
+          <a:effectRef idx="2">
+            <a:schemeClr val="accent1"/>
+          </a:effectRef>
+          <a:fontRef idx="minor">
+            <a:schemeClr val="lt1"/>
+          </a:fontRef>
+        </p:style>
+        <p:txBody>
+          <a:bodyPr rtlCol="0" anchor="ctr"/>
+          <a:lstStyle/>
+          <a:p>
+            <a:pPr algn="ctr"/>
+          </a:p>
+        </p:txBody>
+      </p:sp>
+      <p:sp>
+        <p:nvSpPr>
+          <p:cNvPr id="61" name="Chevron 60"/>
+          <p:cNvSpPr/>
+          <p:nvPr/>
+        </p:nvSpPr>
+        <p:spPr>
+          <a:xfrm>
+            <a:off x="3099816" y="5125212"/>
+            <a:ext cx="256032" cy="155448"/>
+          </a:xfrm>
+          <a:prstGeom prst="chevron">
+            <a:avLst/>
+          </a:prstGeom>
+          <a:solidFill>
+            <a:srgbClr val="DDE1E7"/>
+          </a:solidFill>
+          <a:ln>
+            <a:noFill/>
+          </a:ln>
+          <a:effectLst/>
+        </p:spPr>
+        <p:style>
+          <a:lnRef idx="1">
+            <a:schemeClr val="accent1"/>
+          </a:lnRef>
+          <a:fillRef idx="3">
+            <a:schemeClr val="accent1"/>
+          </a:fillRef>
+          <a:effectRef idx="2">
+            <a:schemeClr val="accent1"/>
+          </a:effectRef>
+          <a:fontRef idx="minor">
+            <a:schemeClr val="lt1"/>
+          </a:fontRef>
+        </p:style>
+        <p:txBody>
+          <a:bodyPr rtlCol="0" anchor="ctr"/>
+          <a:lstStyle/>
+          <a:p>
+            <a:pPr algn="ctr"/>
+          </a:p>
+        </p:txBody>
+      </p:sp>
+      <p:sp>
+        <p:nvSpPr>
+          <p:cNvPr id="62" name="TextBox 61"/>
+          <p:cNvSpPr txBox="1"/>
+          <p:nvPr/>
+        </p:nvSpPr>
+        <p:spPr>
+          <a:xfrm>
+            <a:off x="3351276" y="5102352"/>
+            <a:ext cx="502920" cy="219456"/>
+          </a:xfrm>
+          <a:prstGeom prst="rect">
+            <a:avLst/>
+          </a:prstGeom>
+          <a:noFill/>
+        </p:spPr>
+        <p:txBody>
+          <a:bodyPr wrap="square" anchor="ctr" lIns="25400" rIns="25400" tIns="12700" bIns="12700">
+            <a:spAutoFit/>
+          </a:bodyPr>
+          <a:lstStyle/>
+          <a:p>
+            <a:pPr algn="l">
+              <a:lnSpc>
+                <a:spcPct val="100000"/>
+              </a:lnSpc>
+            </a:pPr>
+            <a:r>
+              <a:rPr sz="900" b="1" i="0">
+                <a:solidFill>
+                  <a:srgbClr val="C98A1B"/>
+                </a:solidFill>
+                <a:latin typeface="Meiryo"/>
+              </a:rPr>
+              <a:t>Lv2</a:t>
+            </a:r>
+          </a:p>
+        </p:txBody>
+      </p:sp>
+      <p:sp>
+        <p:nvSpPr>
+          <p:cNvPr id="63" name="Chevron 62"/>
+          <p:cNvSpPr/>
+          <p:nvPr/>
+        </p:nvSpPr>
+        <p:spPr>
+          <a:xfrm>
+            <a:off x="2203704" y="5509260"/>
+            <a:ext cx="256032" cy="155448"/>
+          </a:xfrm>
+          <a:prstGeom prst="chevron">
+            <a:avLst/>
+          </a:prstGeom>
+          <a:solidFill>
+            <a:srgbClr val="C98A1B"/>
+          </a:solidFill>
+          <a:ln>
+            <a:noFill/>
+          </a:ln>
+          <a:effectLst/>
+        </p:spPr>
+        <p:style>
+          <a:lnRef idx="1">
+            <a:schemeClr val="accent1"/>
+          </a:lnRef>
+          <a:fillRef idx="3">
+            <a:schemeClr val="accent1"/>
+          </a:fillRef>
+          <a:effectRef idx="2">
+            <a:schemeClr val="accent1"/>
+          </a:effectRef>
+          <a:fontRef idx="minor">
+            <a:schemeClr val="lt1"/>
+          </a:fontRef>
+        </p:style>
+        <p:txBody>
+          <a:bodyPr rtlCol="0" anchor="ctr"/>
+          <a:lstStyle/>
+          <a:p>
+            <a:pPr algn="ctr"/>
+          </a:p>
+        </p:txBody>
+      </p:sp>
+      <p:sp>
+        <p:nvSpPr>
+          <p:cNvPr id="64" name="Chevron 63"/>
+          <p:cNvSpPr/>
+          <p:nvPr/>
+        </p:nvSpPr>
+        <p:spPr>
+          <a:xfrm>
+            <a:off x="2427732" y="5509260"/>
+            <a:ext cx="256032" cy="155448"/>
+          </a:xfrm>
+          <a:prstGeom prst="chevron">
+            <a:avLst/>
+          </a:prstGeom>
+          <a:solidFill>
+            <a:srgbClr val="DDE1E7"/>
+          </a:solidFill>
+          <a:ln>
+            <a:noFill/>
+          </a:ln>
+          <a:effectLst/>
+        </p:spPr>
+        <p:style>
+          <a:lnRef idx="1">
+            <a:schemeClr val="accent1"/>
+          </a:lnRef>
+          <a:fillRef idx="3">
+            <a:schemeClr val="accent1"/>
+          </a:fillRef>
+          <a:effectRef idx="2">
+            <a:schemeClr val="accent1"/>
+          </a:effectRef>
+          <a:fontRef idx="minor">
+            <a:schemeClr val="lt1"/>
+          </a:fontRef>
+        </p:style>
+        <p:txBody>
+          <a:bodyPr rtlCol="0" anchor="ctr"/>
+          <a:lstStyle/>
+          <a:p>
+            <a:pPr algn="ctr"/>
+          </a:p>
+        </p:txBody>
+      </p:sp>
+      <p:sp>
+        <p:nvSpPr>
+          <p:cNvPr id="65" name="Chevron 64"/>
+          <p:cNvSpPr/>
+          <p:nvPr/>
+        </p:nvSpPr>
+        <p:spPr>
+          <a:xfrm>
+            <a:off x="2651760" y="5509260"/>
+            <a:ext cx="256032" cy="155448"/>
+          </a:xfrm>
+          <a:prstGeom prst="chevron">
+            <a:avLst/>
+          </a:prstGeom>
+          <a:solidFill>
+            <a:srgbClr val="DDE1E7"/>
+          </a:solidFill>
+          <a:ln>
+            <a:noFill/>
+          </a:ln>
+          <a:effectLst/>
+        </p:spPr>
+        <p:style>
+          <a:lnRef idx="1">
+            <a:schemeClr val="accent1"/>
+          </a:lnRef>
+          <a:fillRef idx="3">
+            <a:schemeClr val="accent1"/>
+          </a:fillRef>
+          <a:effectRef idx="2">
+            <a:schemeClr val="accent1"/>
+          </a:effectRef>
+          <a:fontRef idx="minor">
+            <a:schemeClr val="lt1"/>
+          </a:fontRef>
+        </p:style>
+        <p:txBody>
+          <a:bodyPr rtlCol="0" anchor="ctr"/>
+          <a:lstStyle/>
+          <a:p>
+            <a:pPr algn="ctr"/>
+          </a:p>
+        </p:txBody>
+      </p:sp>
+      <p:sp>
+        <p:nvSpPr>
+          <p:cNvPr id="66" name="Chevron 65"/>
+          <p:cNvSpPr/>
+          <p:nvPr/>
+        </p:nvSpPr>
+        <p:spPr>
+          <a:xfrm>
+            <a:off x="2875788" y="5509260"/>
+            <a:ext cx="256032" cy="155448"/>
+          </a:xfrm>
+          <a:prstGeom prst="chevron">
+            <a:avLst/>
+          </a:prstGeom>
+          <a:solidFill>
+            <a:srgbClr val="DDE1E7"/>
+          </a:solidFill>
+          <a:ln>
+            <a:noFill/>
+          </a:ln>
+          <a:effectLst/>
+        </p:spPr>
+        <p:style>
+          <a:lnRef idx="1">
+            <a:schemeClr val="accent1"/>
+          </a:lnRef>
+          <a:fillRef idx="3">
+            <a:schemeClr val="accent1"/>
+          </a:fillRef>
+          <a:effectRef idx="2">
+            <a:schemeClr val="accent1"/>
+          </a:effectRef>
+          <a:fontRef idx="minor">
+            <a:schemeClr val="lt1"/>
+          </a:fontRef>
+        </p:style>
+        <p:txBody>
+          <a:bodyPr rtlCol="0" anchor="ctr"/>
+          <a:lstStyle/>
+          <a:p>
+            <a:pPr algn="ctr"/>
+          </a:p>
+        </p:txBody>
+      </p:sp>
+      <p:sp>
+        <p:nvSpPr>
+          <p:cNvPr id="67" name="Chevron 66"/>
+          <p:cNvSpPr/>
+          <p:nvPr/>
+        </p:nvSpPr>
+        <p:spPr>
+          <a:xfrm>
+            <a:off x="3099816" y="5509260"/>
+            <a:ext cx="256032" cy="155448"/>
+          </a:xfrm>
+          <a:prstGeom prst="chevron">
+            <a:avLst/>
+          </a:prstGeom>
+          <a:solidFill>
+            <a:srgbClr val="DDE1E7"/>
+          </a:solidFill>
+          <a:ln>
+            <a:noFill/>
+          </a:ln>
+          <a:effectLst/>
+        </p:spPr>
+        <p:style>
+          <a:lnRef idx="1">
+            <a:schemeClr val="accent1"/>
+          </a:lnRef>
+          <a:fillRef idx="3">
+            <a:schemeClr val="accent1"/>
+          </a:fillRef>
+          <a:effectRef idx="2">
+            <a:schemeClr val="accent1"/>
+          </a:effectRef>
+          <a:fontRef idx="minor">
+            <a:schemeClr val="lt1"/>
+          </a:fontRef>
+        </p:style>
+        <p:txBody>
+          <a:bodyPr rtlCol="0" anchor="ctr"/>
+          <a:lstStyle/>
+          <a:p>
+            <a:pPr algn="ctr"/>
+          </a:p>
+        </p:txBody>
+      </p:sp>
+      <p:sp>
+        <p:nvSpPr>
+          <p:cNvPr id="68" name="TextBox 67"/>
+          <p:cNvSpPr txBox="1"/>
+          <p:nvPr/>
+        </p:nvSpPr>
+        <p:spPr>
+          <a:xfrm>
+            <a:off x="3351276" y="5486400"/>
+            <a:ext cx="502920" cy="219456"/>
           </a:xfrm>
           <a:prstGeom prst="rect">
             <a:avLst/>
@@ -6805,20 +8921,20 @@
       </p:sp>
       <p:sp>
         <p:nvSpPr>
-          <p:cNvPr id="20" name="Chevron 19"/>
+          <p:cNvPr id="69" name="Chevron 68"/>
           <p:cNvSpPr/>
           <p:nvPr/>
         </p:nvSpPr>
         <p:spPr>
           <a:xfrm>
-            <a:off x="2276856" y="2802636"/>
-            <a:ext cx="274320" cy="155448"/>
+            <a:off x="2203704" y="5893308"/>
+            <a:ext cx="256032" cy="155448"/>
           </a:xfrm>
           <a:prstGeom prst="chevron">
             <a:avLst/>
           </a:prstGeom>
           <a:solidFill>
-            <a:srgbClr val="C98A1B"/>
+            <a:srgbClr val="2E8B9E"/>
           </a:solidFill>
           <a:ln>
             <a:noFill/>
@@ -6849,14 +8965,146 @@
       </p:sp>
       <p:sp>
         <p:nvSpPr>
-          <p:cNvPr id="21" name="Chevron 20"/>
+          <p:cNvPr id="70" name="Chevron 69"/>
           <p:cNvSpPr/>
           <p:nvPr/>
         </p:nvSpPr>
         <p:spPr>
           <a:xfrm>
-            <a:off x="2528316" y="2802636"/>
-            <a:ext cx="274320" cy="155448"/>
+            <a:off x="2427732" y="5893308"/>
+            <a:ext cx="256032" cy="155448"/>
+          </a:xfrm>
+          <a:prstGeom prst="chevron">
+            <a:avLst/>
+          </a:prstGeom>
+          <a:solidFill>
+            <a:srgbClr val="2E8B9E"/>
+          </a:solidFill>
+          <a:ln>
+            <a:noFill/>
+          </a:ln>
+          <a:effectLst/>
+        </p:spPr>
+        <p:style>
+          <a:lnRef idx="1">
+            <a:schemeClr val="accent1"/>
+          </a:lnRef>
+          <a:fillRef idx="3">
+            <a:schemeClr val="accent1"/>
+          </a:fillRef>
+          <a:effectRef idx="2">
+            <a:schemeClr val="accent1"/>
+          </a:effectRef>
+          <a:fontRef idx="minor">
+            <a:schemeClr val="lt1"/>
+          </a:fontRef>
+        </p:style>
+        <p:txBody>
+          <a:bodyPr rtlCol="0" anchor="ctr"/>
+          <a:lstStyle/>
+          <a:p>
+            <a:pPr algn="ctr"/>
+          </a:p>
+        </p:txBody>
+      </p:sp>
+      <p:sp>
+        <p:nvSpPr>
+          <p:cNvPr id="71" name="Chevron 70"/>
+          <p:cNvSpPr/>
+          <p:nvPr/>
+        </p:nvSpPr>
+        <p:spPr>
+          <a:xfrm>
+            <a:off x="2651760" y="5893308"/>
+            <a:ext cx="256032" cy="155448"/>
+          </a:xfrm>
+          <a:prstGeom prst="chevron">
+            <a:avLst/>
+          </a:prstGeom>
+          <a:solidFill>
+            <a:srgbClr val="2E8B9E"/>
+          </a:solidFill>
+          <a:ln>
+            <a:noFill/>
+          </a:ln>
+          <a:effectLst/>
+        </p:spPr>
+        <p:style>
+          <a:lnRef idx="1">
+            <a:schemeClr val="accent1"/>
+          </a:lnRef>
+          <a:fillRef idx="3">
+            <a:schemeClr val="accent1"/>
+          </a:fillRef>
+          <a:effectRef idx="2">
+            <a:schemeClr val="accent1"/>
+          </a:effectRef>
+          <a:fontRef idx="minor">
+            <a:schemeClr val="lt1"/>
+          </a:fontRef>
+        </p:style>
+        <p:txBody>
+          <a:bodyPr rtlCol="0" anchor="ctr"/>
+          <a:lstStyle/>
+          <a:p>
+            <a:pPr algn="ctr"/>
+          </a:p>
+        </p:txBody>
+      </p:sp>
+      <p:sp>
+        <p:nvSpPr>
+          <p:cNvPr id="72" name="Chevron 71"/>
+          <p:cNvSpPr/>
+          <p:nvPr/>
+        </p:nvSpPr>
+        <p:spPr>
+          <a:xfrm>
+            <a:off x="2875788" y="5893308"/>
+            <a:ext cx="256032" cy="155448"/>
+          </a:xfrm>
+          <a:prstGeom prst="chevron">
+            <a:avLst/>
+          </a:prstGeom>
+          <a:solidFill>
+            <a:srgbClr val="2E8B9E"/>
+          </a:solidFill>
+          <a:ln>
+            <a:noFill/>
+          </a:ln>
+          <a:effectLst/>
+        </p:spPr>
+        <p:style>
+          <a:lnRef idx="1">
+            <a:schemeClr val="accent1"/>
+          </a:lnRef>
+          <a:fillRef idx="3">
+            <a:schemeClr val="accent1"/>
+          </a:fillRef>
+          <a:effectRef idx="2">
+            <a:schemeClr val="accent1"/>
+          </a:effectRef>
+          <a:fontRef idx="minor">
+            <a:schemeClr val="lt1"/>
+          </a:fontRef>
+        </p:style>
+        <p:txBody>
+          <a:bodyPr rtlCol="0" anchor="ctr"/>
+          <a:lstStyle/>
+          <a:p>
+            <a:pPr algn="ctr"/>
+          </a:p>
+        </p:txBody>
+      </p:sp>
+      <p:sp>
+        <p:nvSpPr>
+          <p:cNvPr id="73" name="Chevron 72"/>
+          <p:cNvSpPr/>
+          <p:nvPr/>
+        </p:nvSpPr>
+        <p:spPr>
+          <a:xfrm>
+            <a:off x="3099816" y="5893308"/>
+            <a:ext cx="256032" cy="155448"/>
           </a:xfrm>
           <a:prstGeom prst="chevron">
             <a:avLst/>
@@ -6893,102 +9141,14 @@
       </p:sp>
       <p:sp>
         <p:nvSpPr>
-          <p:cNvPr id="22" name="Chevron 21"/>
-          <p:cNvSpPr/>
-          <p:nvPr/>
-        </p:nvSpPr>
-        <p:spPr>
-          <a:xfrm>
-            <a:off x="2779776" y="2802636"/>
-            <a:ext cx="274320" cy="155448"/>
-          </a:xfrm>
-          <a:prstGeom prst="chevron">
-            <a:avLst/>
-          </a:prstGeom>
-          <a:solidFill>
-            <a:srgbClr val="DDE1E7"/>
-          </a:solidFill>
-          <a:ln>
-            <a:noFill/>
-          </a:ln>
-          <a:effectLst/>
-        </p:spPr>
-        <p:style>
-          <a:lnRef idx="1">
-            <a:schemeClr val="accent1"/>
-          </a:lnRef>
-          <a:fillRef idx="3">
-            <a:schemeClr val="accent1"/>
-          </a:fillRef>
-          <a:effectRef idx="2">
-            <a:schemeClr val="accent1"/>
-          </a:effectRef>
-          <a:fontRef idx="minor">
-            <a:schemeClr val="lt1"/>
-          </a:fontRef>
-        </p:style>
-        <p:txBody>
-          <a:bodyPr rtlCol="0" anchor="ctr"/>
-          <a:lstStyle/>
-          <a:p>
-            <a:pPr algn="ctr"/>
-          </a:p>
-        </p:txBody>
-      </p:sp>
-      <p:sp>
-        <p:nvSpPr>
-          <p:cNvPr id="23" name="Chevron 22"/>
-          <p:cNvSpPr/>
-          <p:nvPr/>
-        </p:nvSpPr>
-        <p:spPr>
-          <a:xfrm>
-            <a:off x="3031236" y="2802636"/>
-            <a:ext cx="274320" cy="155448"/>
-          </a:xfrm>
-          <a:prstGeom prst="chevron">
-            <a:avLst/>
-          </a:prstGeom>
-          <a:solidFill>
-            <a:srgbClr val="DDE1E7"/>
-          </a:solidFill>
-          <a:ln>
-            <a:noFill/>
-          </a:ln>
-          <a:effectLst/>
-        </p:spPr>
-        <p:style>
-          <a:lnRef idx="1">
-            <a:schemeClr val="accent1"/>
-          </a:lnRef>
-          <a:fillRef idx="3">
-            <a:schemeClr val="accent1"/>
-          </a:fillRef>
-          <a:effectRef idx="2">
-            <a:schemeClr val="accent1"/>
-          </a:effectRef>
-          <a:fontRef idx="minor">
-            <a:schemeClr val="lt1"/>
-          </a:fontRef>
-        </p:style>
-        <p:txBody>
-          <a:bodyPr rtlCol="0" anchor="ctr"/>
-          <a:lstStyle/>
-          <a:p>
-            <a:pPr algn="ctr"/>
-          </a:p>
-        </p:txBody>
-      </p:sp>
-      <p:sp>
-        <p:nvSpPr>
-          <p:cNvPr id="24" name="TextBox 23"/>
+          <p:cNvPr id="74" name="TextBox 73"/>
           <p:cNvSpPr txBox="1"/>
           <p:nvPr/>
         </p:nvSpPr>
         <p:spPr>
           <a:xfrm>
-            <a:off x="3300984" y="2779776"/>
-            <a:ext cx="566928" cy="219456"/>
+            <a:off x="3351276" y="5870448"/>
+            <a:ext cx="502920" cy="219456"/>
           </a:xfrm>
           <a:prstGeom prst="rect">
             <a:avLst/>
@@ -7009,25 +9169,25 @@
             <a:r>
               <a:rPr sz="900" b="1" i="0">
                 <a:solidFill>
-                  <a:srgbClr val="C98A1B"/>
+                  <a:srgbClr val="2E8B9E"/>
                 </a:solidFill>
                 <a:latin typeface="Meiryo"/>
               </a:rPr>
-              <a:t>Lv1</a:t>
+              <a:t>Lv4</a:t>
             </a:r>
           </a:p>
         </p:txBody>
       </p:sp>
       <p:sp>
         <p:nvSpPr>
-          <p:cNvPr id="25" name="Chevron 24"/>
+          <p:cNvPr id="75" name="Chevron 74"/>
           <p:cNvSpPr/>
           <p:nvPr/>
         </p:nvSpPr>
         <p:spPr>
           <a:xfrm>
-            <a:off x="2276856" y="3186684"/>
-            <a:ext cx="274320" cy="155448"/>
+            <a:off x="2203704" y="6277356"/>
+            <a:ext cx="256032" cy="155448"/>
           </a:xfrm>
           <a:prstGeom prst="chevron">
             <a:avLst/>
@@ -7064,14 +9224,14 @@
       </p:sp>
       <p:sp>
         <p:nvSpPr>
-          <p:cNvPr id="26" name="Chevron 25"/>
+          <p:cNvPr id="76" name="Chevron 75"/>
           <p:cNvSpPr/>
           <p:nvPr/>
         </p:nvSpPr>
         <p:spPr>
           <a:xfrm>
-            <a:off x="2528316" y="3186684"/>
-            <a:ext cx="274320" cy="155448"/>
+            <a:off x="2427732" y="6277356"/>
+            <a:ext cx="256032" cy="155448"/>
           </a:xfrm>
           <a:prstGeom prst="chevron">
             <a:avLst/>
@@ -7108,14 +9268,14 @@
       </p:sp>
       <p:sp>
         <p:nvSpPr>
-          <p:cNvPr id="27" name="Chevron 26"/>
+          <p:cNvPr id="77" name="Chevron 76"/>
           <p:cNvSpPr/>
           <p:nvPr/>
         </p:nvSpPr>
         <p:spPr>
           <a:xfrm>
-            <a:off x="2779776" y="3186684"/>
-            <a:ext cx="274320" cy="155448"/>
+            <a:off x="2651760" y="6277356"/>
+            <a:ext cx="256032" cy="155448"/>
           </a:xfrm>
           <a:prstGeom prst="chevron">
             <a:avLst/>
@@ -7152,14 +9312,14 @@
       </p:sp>
       <p:sp>
         <p:nvSpPr>
-          <p:cNvPr id="28" name="Chevron 27"/>
+          <p:cNvPr id="78" name="Chevron 77"/>
           <p:cNvSpPr/>
           <p:nvPr/>
         </p:nvSpPr>
         <p:spPr>
           <a:xfrm>
-            <a:off x="3031236" y="3186684"/>
-            <a:ext cx="274320" cy="155448"/>
+            <a:off x="2875788" y="6277356"/>
+            <a:ext cx="256032" cy="155448"/>
           </a:xfrm>
           <a:prstGeom prst="chevron">
             <a:avLst/>
@@ -7196,14 +9356,58 @@
       </p:sp>
       <p:sp>
         <p:nvSpPr>
-          <p:cNvPr id="29" name="TextBox 28"/>
+          <p:cNvPr id="79" name="Chevron 78"/>
+          <p:cNvSpPr/>
+          <p:nvPr/>
+        </p:nvSpPr>
+        <p:spPr>
+          <a:xfrm>
+            <a:off x="3099816" y="6277356"/>
+            <a:ext cx="256032" cy="155448"/>
+          </a:xfrm>
+          <a:prstGeom prst="chevron">
+            <a:avLst/>
+          </a:prstGeom>
+          <a:solidFill>
+            <a:srgbClr val="DDE1E7"/>
+          </a:solidFill>
+          <a:ln>
+            <a:noFill/>
+          </a:ln>
+          <a:effectLst/>
+        </p:spPr>
+        <p:style>
+          <a:lnRef idx="1">
+            <a:schemeClr val="accent1"/>
+          </a:lnRef>
+          <a:fillRef idx="3">
+            <a:schemeClr val="accent1"/>
+          </a:fillRef>
+          <a:effectRef idx="2">
+            <a:schemeClr val="accent1"/>
+          </a:effectRef>
+          <a:fontRef idx="minor">
+            <a:schemeClr val="lt1"/>
+          </a:fontRef>
+        </p:style>
+        <p:txBody>
+          <a:bodyPr rtlCol="0" anchor="ctr"/>
+          <a:lstStyle/>
+          <a:p>
+            <a:pPr algn="ctr"/>
+          </a:p>
+        </p:txBody>
+      </p:sp>
+      <p:sp>
+        <p:nvSpPr>
+          <p:cNvPr id="80" name="TextBox 79"/>
           <p:cNvSpPr txBox="1"/>
           <p:nvPr/>
         </p:nvSpPr>
         <p:spPr>
           <a:xfrm>
-            <a:off x="3300984" y="3163824"/>
-            <a:ext cx="566928" cy="219456"/>
+            <a:off x="3351276" y="6254496"/>
+            <a:ext cx="502920" cy="219456"/>
           </a:xfrm>
           <a:prstGeom prst="rect">
             <a:avLst/>
@@ -7229,1726 +9433,6 @@
                 <a:latin typeface="Meiryo"/>
               </a:rPr>
               <a:t>Lv2</a:t>
-            </a:r>
-          </a:p>
-        </p:txBody>
-      </p:sp>
-      <p:sp>
-        <p:nvSpPr>
-          <p:cNvPr id="30" name="Chevron 29"/>
-          <p:cNvSpPr/>
-          <p:nvPr/>
-        </p:nvSpPr>
-        <p:spPr>
-          <a:xfrm>
-            <a:off x="2276856" y="3570732"/>
-            <a:ext cx="274320" cy="155448"/>
-          </a:xfrm>
-          <a:prstGeom prst="chevron">
-            <a:avLst/>
-          </a:prstGeom>
-          <a:solidFill>
-            <a:srgbClr val="C98A1B"/>
-          </a:solidFill>
-          <a:ln>
-            <a:noFill/>
-          </a:ln>
-          <a:effectLst/>
-        </p:spPr>
-        <p:style>
-          <a:lnRef idx="1">
-            <a:schemeClr val="accent1"/>
-          </a:lnRef>
-          <a:fillRef idx="3">
-            <a:schemeClr val="accent1"/>
-          </a:fillRef>
-          <a:effectRef idx="2">
-            <a:schemeClr val="accent1"/>
-          </a:effectRef>
-          <a:fontRef idx="minor">
-            <a:schemeClr val="lt1"/>
-          </a:fontRef>
-        </p:style>
-        <p:txBody>
-          <a:bodyPr rtlCol="0" anchor="ctr"/>
-          <a:lstStyle/>
-          <a:p>
-            <a:pPr algn="ctr"/>
-          </a:p>
-        </p:txBody>
-      </p:sp>
-      <p:sp>
-        <p:nvSpPr>
-          <p:cNvPr id="31" name="Chevron 30"/>
-          <p:cNvSpPr/>
-          <p:nvPr/>
-        </p:nvSpPr>
-        <p:spPr>
-          <a:xfrm>
-            <a:off x="2528316" y="3570732"/>
-            <a:ext cx="274320" cy="155448"/>
-          </a:xfrm>
-          <a:prstGeom prst="chevron">
-            <a:avLst/>
-          </a:prstGeom>
-          <a:solidFill>
-            <a:srgbClr val="C98A1B"/>
-          </a:solidFill>
-          <a:ln>
-            <a:noFill/>
-          </a:ln>
-          <a:effectLst/>
-        </p:spPr>
-        <p:style>
-          <a:lnRef idx="1">
-            <a:schemeClr val="accent1"/>
-          </a:lnRef>
-          <a:fillRef idx="3">
-            <a:schemeClr val="accent1"/>
-          </a:fillRef>
-          <a:effectRef idx="2">
-            <a:schemeClr val="accent1"/>
-          </a:effectRef>
-          <a:fontRef idx="minor">
-            <a:schemeClr val="lt1"/>
-          </a:fontRef>
-        </p:style>
-        <p:txBody>
-          <a:bodyPr rtlCol="0" anchor="ctr"/>
-          <a:lstStyle/>
-          <a:p>
-            <a:pPr algn="ctr"/>
-          </a:p>
-        </p:txBody>
-      </p:sp>
-      <p:sp>
-        <p:nvSpPr>
-          <p:cNvPr id="32" name="Chevron 31"/>
-          <p:cNvSpPr/>
-          <p:nvPr/>
-        </p:nvSpPr>
-        <p:spPr>
-          <a:xfrm>
-            <a:off x="2779776" y="3570732"/>
-            <a:ext cx="274320" cy="155448"/>
-          </a:xfrm>
-          <a:prstGeom prst="chevron">
-            <a:avLst/>
-          </a:prstGeom>
-          <a:solidFill>
-            <a:srgbClr val="DDE1E7"/>
-          </a:solidFill>
-          <a:ln>
-            <a:noFill/>
-          </a:ln>
-          <a:effectLst/>
-        </p:spPr>
-        <p:style>
-          <a:lnRef idx="1">
-            <a:schemeClr val="accent1"/>
-          </a:lnRef>
-          <a:fillRef idx="3">
-            <a:schemeClr val="accent1"/>
-          </a:fillRef>
-          <a:effectRef idx="2">
-            <a:schemeClr val="accent1"/>
-          </a:effectRef>
-          <a:fontRef idx="minor">
-            <a:schemeClr val="lt1"/>
-          </a:fontRef>
-        </p:style>
-        <p:txBody>
-          <a:bodyPr rtlCol="0" anchor="ctr"/>
-          <a:lstStyle/>
-          <a:p>
-            <a:pPr algn="ctr"/>
-          </a:p>
-        </p:txBody>
-      </p:sp>
-      <p:sp>
-        <p:nvSpPr>
-          <p:cNvPr id="33" name="Chevron 32"/>
-          <p:cNvSpPr/>
-          <p:nvPr/>
-        </p:nvSpPr>
-        <p:spPr>
-          <a:xfrm>
-            <a:off x="3031236" y="3570732"/>
-            <a:ext cx="274320" cy="155448"/>
-          </a:xfrm>
-          <a:prstGeom prst="chevron">
-            <a:avLst/>
-          </a:prstGeom>
-          <a:solidFill>
-            <a:srgbClr val="DDE1E7"/>
-          </a:solidFill>
-          <a:ln>
-            <a:noFill/>
-          </a:ln>
-          <a:effectLst/>
-        </p:spPr>
-        <p:style>
-          <a:lnRef idx="1">
-            <a:schemeClr val="accent1"/>
-          </a:lnRef>
-          <a:fillRef idx="3">
-            <a:schemeClr val="accent1"/>
-          </a:fillRef>
-          <a:effectRef idx="2">
-            <a:schemeClr val="accent1"/>
-          </a:effectRef>
-          <a:fontRef idx="minor">
-            <a:schemeClr val="lt1"/>
-          </a:fontRef>
-        </p:style>
-        <p:txBody>
-          <a:bodyPr rtlCol="0" anchor="ctr"/>
-          <a:lstStyle/>
-          <a:p>
-            <a:pPr algn="ctr"/>
-          </a:p>
-        </p:txBody>
-      </p:sp>
-      <p:sp>
-        <p:nvSpPr>
-          <p:cNvPr id="34" name="TextBox 33"/>
-          <p:cNvSpPr txBox="1"/>
-          <p:nvPr/>
-        </p:nvSpPr>
-        <p:spPr>
-          <a:xfrm>
-            <a:off x="3300984" y="3547872"/>
-            <a:ext cx="566928" cy="219456"/>
-          </a:xfrm>
-          <a:prstGeom prst="rect">
-            <a:avLst/>
-          </a:prstGeom>
-          <a:noFill/>
-        </p:spPr>
-        <p:txBody>
-          <a:bodyPr wrap="square" anchor="ctr" lIns="25400" rIns="25400" tIns="12700" bIns="12700">
-            <a:spAutoFit/>
-          </a:bodyPr>
-          <a:lstStyle/>
-          <a:p>
-            <a:pPr algn="l">
-              <a:lnSpc>
-                <a:spcPct val="100000"/>
-              </a:lnSpc>
-            </a:pPr>
-            <a:r>
-              <a:rPr sz="900" b="1" i="0">
-                <a:solidFill>
-                  <a:srgbClr val="C98A1B"/>
-                </a:solidFill>
-                <a:latin typeface="Meiryo"/>
-              </a:rPr>
-              <a:t>Lv2</a:t>
-            </a:r>
-          </a:p>
-        </p:txBody>
-      </p:sp>
-      <p:sp>
-        <p:nvSpPr>
-          <p:cNvPr id="35" name="Chevron 34"/>
-          <p:cNvSpPr/>
-          <p:nvPr/>
-        </p:nvSpPr>
-        <p:spPr>
-          <a:xfrm>
-            <a:off x="2276856" y="3954780"/>
-            <a:ext cx="274320" cy="155448"/>
-          </a:xfrm>
-          <a:prstGeom prst="chevron">
-            <a:avLst/>
-          </a:prstGeom>
-          <a:solidFill>
-            <a:srgbClr val="C98A1B"/>
-          </a:solidFill>
-          <a:ln>
-            <a:noFill/>
-          </a:ln>
-          <a:effectLst/>
-        </p:spPr>
-        <p:style>
-          <a:lnRef idx="1">
-            <a:schemeClr val="accent1"/>
-          </a:lnRef>
-          <a:fillRef idx="3">
-            <a:schemeClr val="accent1"/>
-          </a:fillRef>
-          <a:effectRef idx="2">
-            <a:schemeClr val="accent1"/>
-          </a:effectRef>
-          <a:fontRef idx="minor">
-            <a:schemeClr val="lt1"/>
-          </a:fontRef>
-        </p:style>
-        <p:txBody>
-          <a:bodyPr rtlCol="0" anchor="ctr"/>
-          <a:lstStyle/>
-          <a:p>
-            <a:pPr algn="ctr"/>
-          </a:p>
-        </p:txBody>
-      </p:sp>
-      <p:sp>
-        <p:nvSpPr>
-          <p:cNvPr id="36" name="Chevron 35"/>
-          <p:cNvSpPr/>
-          <p:nvPr/>
-        </p:nvSpPr>
-        <p:spPr>
-          <a:xfrm>
-            <a:off x="2528316" y="3954780"/>
-            <a:ext cx="274320" cy="155448"/>
-          </a:xfrm>
-          <a:prstGeom prst="chevron">
-            <a:avLst/>
-          </a:prstGeom>
-          <a:solidFill>
-            <a:srgbClr val="DDE1E7"/>
-          </a:solidFill>
-          <a:ln>
-            <a:noFill/>
-          </a:ln>
-          <a:effectLst/>
-        </p:spPr>
-        <p:style>
-          <a:lnRef idx="1">
-            <a:schemeClr val="accent1"/>
-          </a:lnRef>
-          <a:fillRef idx="3">
-            <a:schemeClr val="accent1"/>
-          </a:fillRef>
-          <a:effectRef idx="2">
-            <a:schemeClr val="accent1"/>
-          </a:effectRef>
-          <a:fontRef idx="minor">
-            <a:schemeClr val="lt1"/>
-          </a:fontRef>
-        </p:style>
-        <p:txBody>
-          <a:bodyPr rtlCol="0" anchor="ctr"/>
-          <a:lstStyle/>
-          <a:p>
-            <a:pPr algn="ctr"/>
-          </a:p>
-        </p:txBody>
-      </p:sp>
-      <p:sp>
-        <p:nvSpPr>
-          <p:cNvPr id="37" name="Chevron 36"/>
-          <p:cNvSpPr/>
-          <p:nvPr/>
-        </p:nvSpPr>
-        <p:spPr>
-          <a:xfrm>
-            <a:off x="2779776" y="3954780"/>
-            <a:ext cx="274320" cy="155448"/>
-          </a:xfrm>
-          <a:prstGeom prst="chevron">
-            <a:avLst/>
-          </a:prstGeom>
-          <a:solidFill>
-            <a:srgbClr val="DDE1E7"/>
-          </a:solidFill>
-          <a:ln>
-            <a:noFill/>
-          </a:ln>
-          <a:effectLst/>
-        </p:spPr>
-        <p:style>
-          <a:lnRef idx="1">
-            <a:schemeClr val="accent1"/>
-          </a:lnRef>
-          <a:fillRef idx="3">
-            <a:schemeClr val="accent1"/>
-          </a:fillRef>
-          <a:effectRef idx="2">
-            <a:schemeClr val="accent1"/>
-          </a:effectRef>
-          <a:fontRef idx="minor">
-            <a:schemeClr val="lt1"/>
-          </a:fontRef>
-        </p:style>
-        <p:txBody>
-          <a:bodyPr rtlCol="0" anchor="ctr"/>
-          <a:lstStyle/>
-          <a:p>
-            <a:pPr algn="ctr"/>
-          </a:p>
-        </p:txBody>
-      </p:sp>
-      <p:sp>
-        <p:nvSpPr>
-          <p:cNvPr id="38" name="Chevron 37"/>
-          <p:cNvSpPr/>
-          <p:nvPr/>
-        </p:nvSpPr>
-        <p:spPr>
-          <a:xfrm>
-            <a:off x="3031236" y="3954780"/>
-            <a:ext cx="274320" cy="155448"/>
-          </a:xfrm>
-          <a:prstGeom prst="chevron">
-            <a:avLst/>
-          </a:prstGeom>
-          <a:solidFill>
-            <a:srgbClr val="DDE1E7"/>
-          </a:solidFill>
-          <a:ln>
-            <a:noFill/>
-          </a:ln>
-          <a:effectLst/>
-        </p:spPr>
-        <p:style>
-          <a:lnRef idx="1">
-            <a:schemeClr val="accent1"/>
-          </a:lnRef>
-          <a:fillRef idx="3">
-            <a:schemeClr val="accent1"/>
-          </a:fillRef>
-          <a:effectRef idx="2">
-            <a:schemeClr val="accent1"/>
-          </a:effectRef>
-          <a:fontRef idx="minor">
-            <a:schemeClr val="lt1"/>
-          </a:fontRef>
-        </p:style>
-        <p:txBody>
-          <a:bodyPr rtlCol="0" anchor="ctr"/>
-          <a:lstStyle/>
-          <a:p>
-            <a:pPr algn="ctr"/>
-          </a:p>
-        </p:txBody>
-      </p:sp>
-      <p:sp>
-        <p:nvSpPr>
-          <p:cNvPr id="39" name="TextBox 38"/>
-          <p:cNvSpPr txBox="1"/>
-          <p:nvPr/>
-        </p:nvSpPr>
-        <p:spPr>
-          <a:xfrm>
-            <a:off x="3300984" y="3931920"/>
-            <a:ext cx="566928" cy="219456"/>
-          </a:xfrm>
-          <a:prstGeom prst="rect">
-            <a:avLst/>
-          </a:prstGeom>
-          <a:noFill/>
-        </p:spPr>
-        <p:txBody>
-          <a:bodyPr wrap="square" anchor="ctr" lIns="25400" rIns="25400" tIns="12700" bIns="12700">
-            <a:spAutoFit/>
-          </a:bodyPr>
-          <a:lstStyle/>
-          <a:p>
-            <a:pPr algn="l">
-              <a:lnSpc>
-                <a:spcPct val="100000"/>
-              </a:lnSpc>
-            </a:pPr>
-            <a:r>
-              <a:rPr sz="900" b="1" i="0">
-                <a:solidFill>
-                  <a:srgbClr val="C98A1B"/>
-                </a:solidFill>
-                <a:latin typeface="Meiryo"/>
-              </a:rPr>
-              <a:t>Lv1</a:t>
-            </a:r>
-          </a:p>
-        </p:txBody>
-      </p:sp>
-      <p:sp>
-        <p:nvSpPr>
-          <p:cNvPr id="40" name="Chevron 39"/>
-          <p:cNvSpPr/>
-          <p:nvPr/>
-        </p:nvSpPr>
-        <p:spPr>
-          <a:xfrm>
-            <a:off x="2276856" y="4338828"/>
-            <a:ext cx="274320" cy="155448"/>
-          </a:xfrm>
-          <a:prstGeom prst="chevron">
-            <a:avLst/>
-          </a:prstGeom>
-          <a:solidFill>
-            <a:srgbClr val="C98A1B"/>
-          </a:solidFill>
-          <a:ln>
-            <a:noFill/>
-          </a:ln>
-          <a:effectLst/>
-        </p:spPr>
-        <p:style>
-          <a:lnRef idx="1">
-            <a:schemeClr val="accent1"/>
-          </a:lnRef>
-          <a:fillRef idx="3">
-            <a:schemeClr val="accent1"/>
-          </a:fillRef>
-          <a:effectRef idx="2">
-            <a:schemeClr val="accent1"/>
-          </a:effectRef>
-          <a:fontRef idx="minor">
-            <a:schemeClr val="lt1"/>
-          </a:fontRef>
-        </p:style>
-        <p:txBody>
-          <a:bodyPr rtlCol="0" anchor="ctr"/>
-          <a:lstStyle/>
-          <a:p>
-            <a:pPr algn="ctr"/>
-          </a:p>
-        </p:txBody>
-      </p:sp>
-      <p:sp>
-        <p:nvSpPr>
-          <p:cNvPr id="41" name="Chevron 40"/>
-          <p:cNvSpPr/>
-          <p:nvPr/>
-        </p:nvSpPr>
-        <p:spPr>
-          <a:xfrm>
-            <a:off x="2528316" y="4338828"/>
-            <a:ext cx="274320" cy="155448"/>
-          </a:xfrm>
-          <a:prstGeom prst="chevron">
-            <a:avLst/>
-          </a:prstGeom>
-          <a:solidFill>
-            <a:srgbClr val="DDE1E7"/>
-          </a:solidFill>
-          <a:ln>
-            <a:noFill/>
-          </a:ln>
-          <a:effectLst/>
-        </p:spPr>
-        <p:style>
-          <a:lnRef idx="1">
-            <a:schemeClr val="accent1"/>
-          </a:lnRef>
-          <a:fillRef idx="3">
-            <a:schemeClr val="accent1"/>
-          </a:fillRef>
-          <a:effectRef idx="2">
-            <a:schemeClr val="accent1"/>
-          </a:effectRef>
-          <a:fontRef idx="minor">
-            <a:schemeClr val="lt1"/>
-          </a:fontRef>
-        </p:style>
-        <p:txBody>
-          <a:bodyPr rtlCol="0" anchor="ctr"/>
-          <a:lstStyle/>
-          <a:p>
-            <a:pPr algn="ctr"/>
-          </a:p>
-        </p:txBody>
-      </p:sp>
-      <p:sp>
-        <p:nvSpPr>
-          <p:cNvPr id="42" name="Chevron 41"/>
-          <p:cNvSpPr/>
-          <p:nvPr/>
-        </p:nvSpPr>
-        <p:spPr>
-          <a:xfrm>
-            <a:off x="2779776" y="4338828"/>
-            <a:ext cx="274320" cy="155448"/>
-          </a:xfrm>
-          <a:prstGeom prst="chevron">
-            <a:avLst/>
-          </a:prstGeom>
-          <a:solidFill>
-            <a:srgbClr val="DDE1E7"/>
-          </a:solidFill>
-          <a:ln>
-            <a:noFill/>
-          </a:ln>
-          <a:effectLst/>
-        </p:spPr>
-        <p:style>
-          <a:lnRef idx="1">
-            <a:schemeClr val="accent1"/>
-          </a:lnRef>
-          <a:fillRef idx="3">
-            <a:schemeClr val="accent1"/>
-          </a:fillRef>
-          <a:effectRef idx="2">
-            <a:schemeClr val="accent1"/>
-          </a:effectRef>
-          <a:fontRef idx="minor">
-            <a:schemeClr val="lt1"/>
-          </a:fontRef>
-        </p:style>
-        <p:txBody>
-          <a:bodyPr rtlCol="0" anchor="ctr"/>
-          <a:lstStyle/>
-          <a:p>
-            <a:pPr algn="ctr"/>
-          </a:p>
-        </p:txBody>
-      </p:sp>
-      <p:sp>
-        <p:nvSpPr>
-          <p:cNvPr id="43" name="Chevron 42"/>
-          <p:cNvSpPr/>
-          <p:nvPr/>
-        </p:nvSpPr>
-        <p:spPr>
-          <a:xfrm>
-            <a:off x="3031236" y="4338828"/>
-            <a:ext cx="274320" cy="155448"/>
-          </a:xfrm>
-          <a:prstGeom prst="chevron">
-            <a:avLst/>
-          </a:prstGeom>
-          <a:solidFill>
-            <a:srgbClr val="DDE1E7"/>
-          </a:solidFill>
-          <a:ln>
-            <a:noFill/>
-          </a:ln>
-          <a:effectLst/>
-        </p:spPr>
-        <p:style>
-          <a:lnRef idx="1">
-            <a:schemeClr val="accent1"/>
-          </a:lnRef>
-          <a:fillRef idx="3">
-            <a:schemeClr val="accent1"/>
-          </a:fillRef>
-          <a:effectRef idx="2">
-            <a:schemeClr val="accent1"/>
-          </a:effectRef>
-          <a:fontRef idx="minor">
-            <a:schemeClr val="lt1"/>
-          </a:fontRef>
-        </p:style>
-        <p:txBody>
-          <a:bodyPr rtlCol="0" anchor="ctr"/>
-          <a:lstStyle/>
-          <a:p>
-            <a:pPr algn="ctr"/>
-          </a:p>
-        </p:txBody>
-      </p:sp>
-      <p:sp>
-        <p:nvSpPr>
-          <p:cNvPr id="44" name="TextBox 43"/>
-          <p:cNvSpPr txBox="1"/>
-          <p:nvPr/>
-        </p:nvSpPr>
-        <p:spPr>
-          <a:xfrm>
-            <a:off x="3300984" y="4315968"/>
-            <a:ext cx="566928" cy="219456"/>
-          </a:xfrm>
-          <a:prstGeom prst="rect">
-            <a:avLst/>
-          </a:prstGeom>
-          <a:noFill/>
-        </p:spPr>
-        <p:txBody>
-          <a:bodyPr wrap="square" anchor="ctr" lIns="25400" rIns="25400" tIns="12700" bIns="12700">
-            <a:spAutoFit/>
-          </a:bodyPr>
-          <a:lstStyle/>
-          <a:p>
-            <a:pPr algn="l">
-              <a:lnSpc>
-                <a:spcPct val="100000"/>
-              </a:lnSpc>
-            </a:pPr>
-            <a:r>
-              <a:rPr sz="900" b="1" i="0">
-                <a:solidFill>
-                  <a:srgbClr val="C98A1B"/>
-                </a:solidFill>
-                <a:latin typeface="Meiryo"/>
-              </a:rPr>
-              <a:t>Lv1</a:t>
-            </a:r>
-          </a:p>
-        </p:txBody>
-      </p:sp>
-      <p:sp>
-        <p:nvSpPr>
-          <p:cNvPr id="45" name="Chevron 44"/>
-          <p:cNvSpPr/>
-          <p:nvPr/>
-        </p:nvSpPr>
-        <p:spPr>
-          <a:xfrm>
-            <a:off x="2276856" y="4722876"/>
-            <a:ext cx="274320" cy="155448"/>
-          </a:xfrm>
-          <a:prstGeom prst="chevron">
-            <a:avLst/>
-          </a:prstGeom>
-          <a:solidFill>
-            <a:srgbClr val="3F8F5B"/>
-          </a:solidFill>
-          <a:ln>
-            <a:noFill/>
-          </a:ln>
-          <a:effectLst/>
-        </p:spPr>
-        <p:style>
-          <a:lnRef idx="1">
-            <a:schemeClr val="accent1"/>
-          </a:lnRef>
-          <a:fillRef idx="3">
-            <a:schemeClr val="accent1"/>
-          </a:fillRef>
-          <a:effectRef idx="2">
-            <a:schemeClr val="accent1"/>
-          </a:effectRef>
-          <a:fontRef idx="minor">
-            <a:schemeClr val="lt1"/>
-          </a:fontRef>
-        </p:style>
-        <p:txBody>
-          <a:bodyPr rtlCol="0" anchor="ctr"/>
-          <a:lstStyle/>
-          <a:p>
-            <a:pPr algn="ctr"/>
-          </a:p>
-        </p:txBody>
-      </p:sp>
-      <p:sp>
-        <p:nvSpPr>
-          <p:cNvPr id="46" name="Chevron 45"/>
-          <p:cNvSpPr/>
-          <p:nvPr/>
-        </p:nvSpPr>
-        <p:spPr>
-          <a:xfrm>
-            <a:off x="2528316" y="4722876"/>
-            <a:ext cx="274320" cy="155448"/>
-          </a:xfrm>
-          <a:prstGeom prst="chevron">
-            <a:avLst/>
-          </a:prstGeom>
-          <a:solidFill>
-            <a:srgbClr val="3F8F5B"/>
-          </a:solidFill>
-          <a:ln>
-            <a:noFill/>
-          </a:ln>
-          <a:effectLst/>
-        </p:spPr>
-        <p:style>
-          <a:lnRef idx="1">
-            <a:schemeClr val="accent1"/>
-          </a:lnRef>
-          <a:fillRef idx="3">
-            <a:schemeClr val="accent1"/>
-          </a:fillRef>
-          <a:effectRef idx="2">
-            <a:schemeClr val="accent1"/>
-          </a:effectRef>
-          <a:fontRef idx="minor">
-            <a:schemeClr val="lt1"/>
-          </a:fontRef>
-        </p:style>
-        <p:txBody>
-          <a:bodyPr rtlCol="0" anchor="ctr"/>
-          <a:lstStyle/>
-          <a:p>
-            <a:pPr algn="ctr"/>
-          </a:p>
-        </p:txBody>
-      </p:sp>
-      <p:sp>
-        <p:nvSpPr>
-          <p:cNvPr id="47" name="Chevron 46"/>
-          <p:cNvSpPr/>
-          <p:nvPr/>
-        </p:nvSpPr>
-        <p:spPr>
-          <a:xfrm>
-            <a:off x="2779776" y="4722876"/>
-            <a:ext cx="274320" cy="155448"/>
-          </a:xfrm>
-          <a:prstGeom prst="chevron">
-            <a:avLst/>
-          </a:prstGeom>
-          <a:solidFill>
-            <a:srgbClr val="3F8F5B"/>
-          </a:solidFill>
-          <a:ln>
-            <a:noFill/>
-          </a:ln>
-          <a:effectLst/>
-        </p:spPr>
-        <p:style>
-          <a:lnRef idx="1">
-            <a:schemeClr val="accent1"/>
-          </a:lnRef>
-          <a:fillRef idx="3">
-            <a:schemeClr val="accent1"/>
-          </a:fillRef>
-          <a:effectRef idx="2">
-            <a:schemeClr val="accent1"/>
-          </a:effectRef>
-          <a:fontRef idx="minor">
-            <a:schemeClr val="lt1"/>
-          </a:fontRef>
-        </p:style>
-        <p:txBody>
-          <a:bodyPr rtlCol="0" anchor="ctr"/>
-          <a:lstStyle/>
-          <a:p>
-            <a:pPr algn="ctr"/>
-          </a:p>
-        </p:txBody>
-      </p:sp>
-      <p:sp>
-        <p:nvSpPr>
-          <p:cNvPr id="48" name="Chevron 47"/>
-          <p:cNvSpPr/>
-          <p:nvPr/>
-        </p:nvSpPr>
-        <p:spPr>
-          <a:xfrm>
-            <a:off x="3031236" y="4722876"/>
-            <a:ext cx="274320" cy="155448"/>
-          </a:xfrm>
-          <a:prstGeom prst="chevron">
-            <a:avLst/>
-          </a:prstGeom>
-          <a:solidFill>
-            <a:srgbClr val="3F8F5B"/>
-          </a:solidFill>
-          <a:ln>
-            <a:noFill/>
-          </a:ln>
-          <a:effectLst/>
-        </p:spPr>
-        <p:style>
-          <a:lnRef idx="1">
-            <a:schemeClr val="accent1"/>
-          </a:lnRef>
-          <a:fillRef idx="3">
-            <a:schemeClr val="accent1"/>
-          </a:fillRef>
-          <a:effectRef idx="2">
-            <a:schemeClr val="accent1"/>
-          </a:effectRef>
-          <a:fontRef idx="minor">
-            <a:schemeClr val="lt1"/>
-          </a:fontRef>
-        </p:style>
-        <p:txBody>
-          <a:bodyPr rtlCol="0" anchor="ctr"/>
-          <a:lstStyle/>
-          <a:p>
-            <a:pPr algn="ctr"/>
-          </a:p>
-        </p:txBody>
-      </p:sp>
-      <p:sp>
-        <p:nvSpPr>
-          <p:cNvPr id="49" name="TextBox 48"/>
-          <p:cNvSpPr txBox="1"/>
-          <p:nvPr/>
-        </p:nvSpPr>
-        <p:spPr>
-          <a:xfrm>
-            <a:off x="3300984" y="4700016"/>
-            <a:ext cx="566928" cy="219456"/>
-          </a:xfrm>
-          <a:prstGeom prst="rect">
-            <a:avLst/>
-          </a:prstGeom>
-          <a:noFill/>
-        </p:spPr>
-        <p:txBody>
-          <a:bodyPr wrap="square" anchor="ctr" lIns="25400" rIns="25400" tIns="12700" bIns="12700">
-            <a:spAutoFit/>
-          </a:bodyPr>
-          <a:lstStyle/>
-          <a:p>
-            <a:pPr algn="l">
-              <a:lnSpc>
-                <a:spcPct val="100000"/>
-              </a:lnSpc>
-            </a:pPr>
-            <a:r>
-              <a:rPr sz="900" b="1" i="0">
-                <a:solidFill>
-                  <a:srgbClr val="3F8F5B"/>
-                </a:solidFill>
-                <a:latin typeface="Meiryo"/>
-              </a:rPr>
-              <a:t>Lv4</a:t>
-            </a:r>
-          </a:p>
-        </p:txBody>
-      </p:sp>
-      <p:sp>
-        <p:nvSpPr>
-          <p:cNvPr id="50" name="Chevron 49"/>
-          <p:cNvSpPr/>
-          <p:nvPr/>
-        </p:nvSpPr>
-        <p:spPr>
-          <a:xfrm>
-            <a:off x="2276856" y="5106924"/>
-            <a:ext cx="274320" cy="155448"/>
-          </a:xfrm>
-          <a:prstGeom prst="chevron">
-            <a:avLst/>
-          </a:prstGeom>
-          <a:solidFill>
-            <a:srgbClr val="C98A1B"/>
-          </a:solidFill>
-          <a:ln>
-            <a:noFill/>
-          </a:ln>
-          <a:effectLst/>
-        </p:spPr>
-        <p:style>
-          <a:lnRef idx="1">
-            <a:schemeClr val="accent1"/>
-          </a:lnRef>
-          <a:fillRef idx="3">
-            <a:schemeClr val="accent1"/>
-          </a:fillRef>
-          <a:effectRef idx="2">
-            <a:schemeClr val="accent1"/>
-          </a:effectRef>
-          <a:fontRef idx="minor">
-            <a:schemeClr val="lt1"/>
-          </a:fontRef>
-        </p:style>
-        <p:txBody>
-          <a:bodyPr rtlCol="0" anchor="ctr"/>
-          <a:lstStyle/>
-          <a:p>
-            <a:pPr algn="ctr"/>
-          </a:p>
-        </p:txBody>
-      </p:sp>
-      <p:sp>
-        <p:nvSpPr>
-          <p:cNvPr id="51" name="Chevron 50"/>
-          <p:cNvSpPr/>
-          <p:nvPr/>
-        </p:nvSpPr>
-        <p:spPr>
-          <a:xfrm>
-            <a:off x="2528316" y="5106924"/>
-            <a:ext cx="274320" cy="155448"/>
-          </a:xfrm>
-          <a:prstGeom prst="chevron">
-            <a:avLst/>
-          </a:prstGeom>
-          <a:solidFill>
-            <a:srgbClr val="DDE1E7"/>
-          </a:solidFill>
-          <a:ln>
-            <a:noFill/>
-          </a:ln>
-          <a:effectLst/>
-        </p:spPr>
-        <p:style>
-          <a:lnRef idx="1">
-            <a:schemeClr val="accent1"/>
-          </a:lnRef>
-          <a:fillRef idx="3">
-            <a:schemeClr val="accent1"/>
-          </a:fillRef>
-          <a:effectRef idx="2">
-            <a:schemeClr val="accent1"/>
-          </a:effectRef>
-          <a:fontRef idx="minor">
-            <a:schemeClr val="lt1"/>
-          </a:fontRef>
-        </p:style>
-        <p:txBody>
-          <a:bodyPr rtlCol="0" anchor="ctr"/>
-          <a:lstStyle/>
-          <a:p>
-            <a:pPr algn="ctr"/>
-          </a:p>
-        </p:txBody>
-      </p:sp>
-      <p:sp>
-        <p:nvSpPr>
-          <p:cNvPr id="52" name="Chevron 51"/>
-          <p:cNvSpPr/>
-          <p:nvPr/>
-        </p:nvSpPr>
-        <p:spPr>
-          <a:xfrm>
-            <a:off x="2779776" y="5106924"/>
-            <a:ext cx="274320" cy="155448"/>
-          </a:xfrm>
-          <a:prstGeom prst="chevron">
-            <a:avLst/>
-          </a:prstGeom>
-          <a:solidFill>
-            <a:srgbClr val="DDE1E7"/>
-          </a:solidFill>
-          <a:ln>
-            <a:noFill/>
-          </a:ln>
-          <a:effectLst/>
-        </p:spPr>
-        <p:style>
-          <a:lnRef idx="1">
-            <a:schemeClr val="accent1"/>
-          </a:lnRef>
-          <a:fillRef idx="3">
-            <a:schemeClr val="accent1"/>
-          </a:fillRef>
-          <a:effectRef idx="2">
-            <a:schemeClr val="accent1"/>
-          </a:effectRef>
-          <a:fontRef idx="minor">
-            <a:schemeClr val="lt1"/>
-          </a:fontRef>
-        </p:style>
-        <p:txBody>
-          <a:bodyPr rtlCol="0" anchor="ctr"/>
-          <a:lstStyle/>
-          <a:p>
-            <a:pPr algn="ctr"/>
-          </a:p>
-        </p:txBody>
-      </p:sp>
-      <p:sp>
-        <p:nvSpPr>
-          <p:cNvPr id="53" name="Chevron 52"/>
-          <p:cNvSpPr/>
-          <p:nvPr/>
-        </p:nvSpPr>
-        <p:spPr>
-          <a:xfrm>
-            <a:off x="3031236" y="5106924"/>
-            <a:ext cx="274320" cy="155448"/>
-          </a:xfrm>
-          <a:prstGeom prst="chevron">
-            <a:avLst/>
-          </a:prstGeom>
-          <a:solidFill>
-            <a:srgbClr val="DDE1E7"/>
-          </a:solidFill>
-          <a:ln>
-            <a:noFill/>
-          </a:ln>
-          <a:effectLst/>
-        </p:spPr>
-        <p:style>
-          <a:lnRef idx="1">
-            <a:schemeClr val="accent1"/>
-          </a:lnRef>
-          <a:fillRef idx="3">
-            <a:schemeClr val="accent1"/>
-          </a:fillRef>
-          <a:effectRef idx="2">
-            <a:schemeClr val="accent1"/>
-          </a:effectRef>
-          <a:fontRef idx="minor">
-            <a:schemeClr val="lt1"/>
-          </a:fontRef>
-        </p:style>
-        <p:txBody>
-          <a:bodyPr rtlCol="0" anchor="ctr"/>
-          <a:lstStyle/>
-          <a:p>
-            <a:pPr algn="ctr"/>
-          </a:p>
-        </p:txBody>
-      </p:sp>
-      <p:sp>
-        <p:nvSpPr>
-          <p:cNvPr id="54" name="TextBox 53"/>
-          <p:cNvSpPr txBox="1"/>
-          <p:nvPr/>
-        </p:nvSpPr>
-        <p:spPr>
-          <a:xfrm>
-            <a:off x="3300984" y="5084064"/>
-            <a:ext cx="566928" cy="219456"/>
-          </a:xfrm>
-          <a:prstGeom prst="rect">
-            <a:avLst/>
-          </a:prstGeom>
-          <a:noFill/>
-        </p:spPr>
-        <p:txBody>
-          <a:bodyPr wrap="square" anchor="ctr" lIns="25400" rIns="25400" tIns="12700" bIns="12700">
-            <a:spAutoFit/>
-          </a:bodyPr>
-          <a:lstStyle/>
-          <a:p>
-            <a:pPr algn="l">
-              <a:lnSpc>
-                <a:spcPct val="100000"/>
-              </a:lnSpc>
-            </a:pPr>
-            <a:r>
-              <a:rPr sz="900" b="1" i="0">
-                <a:solidFill>
-                  <a:srgbClr val="C98A1B"/>
-                </a:solidFill>
-                <a:latin typeface="Meiryo"/>
-              </a:rPr>
-              <a:t>Lv1</a:t>
-            </a:r>
-          </a:p>
-        </p:txBody>
-      </p:sp>
-      <p:sp>
-        <p:nvSpPr>
-          <p:cNvPr id="55" name="Chevron 54"/>
-          <p:cNvSpPr/>
-          <p:nvPr/>
-        </p:nvSpPr>
-        <p:spPr>
-          <a:xfrm>
-            <a:off x="2276856" y="5490972"/>
-            <a:ext cx="274320" cy="155448"/>
-          </a:xfrm>
-          <a:prstGeom prst="chevron">
-            <a:avLst/>
-          </a:prstGeom>
-          <a:solidFill>
-            <a:srgbClr val="C98A1B"/>
-          </a:solidFill>
-          <a:ln>
-            <a:noFill/>
-          </a:ln>
-          <a:effectLst/>
-        </p:spPr>
-        <p:style>
-          <a:lnRef idx="1">
-            <a:schemeClr val="accent1"/>
-          </a:lnRef>
-          <a:fillRef idx="3">
-            <a:schemeClr val="accent1"/>
-          </a:fillRef>
-          <a:effectRef idx="2">
-            <a:schemeClr val="accent1"/>
-          </a:effectRef>
-          <a:fontRef idx="minor">
-            <a:schemeClr val="lt1"/>
-          </a:fontRef>
-        </p:style>
-        <p:txBody>
-          <a:bodyPr rtlCol="0" anchor="ctr"/>
-          <a:lstStyle/>
-          <a:p>
-            <a:pPr algn="ctr"/>
-          </a:p>
-        </p:txBody>
-      </p:sp>
-      <p:sp>
-        <p:nvSpPr>
-          <p:cNvPr id="56" name="Chevron 55"/>
-          <p:cNvSpPr/>
-          <p:nvPr/>
-        </p:nvSpPr>
-        <p:spPr>
-          <a:xfrm>
-            <a:off x="2528316" y="5490972"/>
-            <a:ext cx="274320" cy="155448"/>
-          </a:xfrm>
-          <a:prstGeom prst="chevron">
-            <a:avLst/>
-          </a:prstGeom>
-          <a:solidFill>
-            <a:srgbClr val="DDE1E7"/>
-          </a:solidFill>
-          <a:ln>
-            <a:noFill/>
-          </a:ln>
-          <a:effectLst/>
-        </p:spPr>
-        <p:style>
-          <a:lnRef idx="1">
-            <a:schemeClr val="accent1"/>
-          </a:lnRef>
-          <a:fillRef idx="3">
-            <a:schemeClr val="accent1"/>
-          </a:fillRef>
-          <a:effectRef idx="2">
-            <a:schemeClr val="accent1"/>
-          </a:effectRef>
-          <a:fontRef idx="minor">
-            <a:schemeClr val="lt1"/>
-          </a:fontRef>
-        </p:style>
-        <p:txBody>
-          <a:bodyPr rtlCol="0" anchor="ctr"/>
-          <a:lstStyle/>
-          <a:p>
-            <a:pPr algn="ctr"/>
-          </a:p>
-        </p:txBody>
-      </p:sp>
-      <p:sp>
-        <p:nvSpPr>
-          <p:cNvPr id="57" name="Chevron 56"/>
-          <p:cNvSpPr/>
-          <p:nvPr/>
-        </p:nvSpPr>
-        <p:spPr>
-          <a:xfrm>
-            <a:off x="2779776" y="5490972"/>
-            <a:ext cx="274320" cy="155448"/>
-          </a:xfrm>
-          <a:prstGeom prst="chevron">
-            <a:avLst/>
-          </a:prstGeom>
-          <a:solidFill>
-            <a:srgbClr val="DDE1E7"/>
-          </a:solidFill>
-          <a:ln>
-            <a:noFill/>
-          </a:ln>
-          <a:effectLst/>
-        </p:spPr>
-        <p:style>
-          <a:lnRef idx="1">
-            <a:schemeClr val="accent1"/>
-          </a:lnRef>
-          <a:fillRef idx="3">
-            <a:schemeClr val="accent1"/>
-          </a:fillRef>
-          <a:effectRef idx="2">
-            <a:schemeClr val="accent1"/>
-          </a:effectRef>
-          <a:fontRef idx="minor">
-            <a:schemeClr val="lt1"/>
-          </a:fontRef>
-        </p:style>
-        <p:txBody>
-          <a:bodyPr rtlCol="0" anchor="ctr"/>
-          <a:lstStyle/>
-          <a:p>
-            <a:pPr algn="ctr"/>
-          </a:p>
-        </p:txBody>
-      </p:sp>
-      <p:sp>
-        <p:nvSpPr>
-          <p:cNvPr id="58" name="Chevron 57"/>
-          <p:cNvSpPr/>
-          <p:nvPr/>
-        </p:nvSpPr>
-        <p:spPr>
-          <a:xfrm>
-            <a:off x="3031236" y="5490972"/>
-            <a:ext cx="274320" cy="155448"/>
-          </a:xfrm>
-          <a:prstGeom prst="chevron">
-            <a:avLst/>
-          </a:prstGeom>
-          <a:solidFill>
-            <a:srgbClr val="DDE1E7"/>
-          </a:solidFill>
-          <a:ln>
-            <a:noFill/>
-          </a:ln>
-          <a:effectLst/>
-        </p:spPr>
-        <p:style>
-          <a:lnRef idx="1">
-            <a:schemeClr val="accent1"/>
-          </a:lnRef>
-          <a:fillRef idx="3">
-            <a:schemeClr val="accent1"/>
-          </a:fillRef>
-          <a:effectRef idx="2">
-            <a:schemeClr val="accent1"/>
-          </a:effectRef>
-          <a:fontRef idx="minor">
-            <a:schemeClr val="lt1"/>
-          </a:fontRef>
-        </p:style>
-        <p:txBody>
-          <a:bodyPr rtlCol="0" anchor="ctr"/>
-          <a:lstStyle/>
-          <a:p>
-            <a:pPr algn="ctr"/>
-          </a:p>
-        </p:txBody>
-      </p:sp>
-      <p:sp>
-        <p:nvSpPr>
-          <p:cNvPr id="59" name="TextBox 58"/>
-          <p:cNvSpPr txBox="1"/>
-          <p:nvPr/>
-        </p:nvSpPr>
-        <p:spPr>
-          <a:xfrm>
-            <a:off x="3300984" y="5468112"/>
-            <a:ext cx="566928" cy="219456"/>
-          </a:xfrm>
-          <a:prstGeom prst="rect">
-            <a:avLst/>
-          </a:prstGeom>
-          <a:noFill/>
-        </p:spPr>
-        <p:txBody>
-          <a:bodyPr wrap="square" anchor="ctr" lIns="25400" rIns="25400" tIns="12700" bIns="12700">
-            <a:spAutoFit/>
-          </a:bodyPr>
-          <a:lstStyle/>
-          <a:p>
-            <a:pPr algn="l">
-              <a:lnSpc>
-                <a:spcPct val="100000"/>
-              </a:lnSpc>
-            </a:pPr>
-            <a:r>
-              <a:rPr sz="900" b="1" i="0">
-                <a:solidFill>
-                  <a:srgbClr val="C98A1B"/>
-                </a:solidFill>
-                <a:latin typeface="Meiryo"/>
-              </a:rPr>
-              <a:t>Lv1</a:t>
-            </a:r>
-          </a:p>
-        </p:txBody>
-      </p:sp>
-      <p:sp>
-        <p:nvSpPr>
-          <p:cNvPr id="60" name="Chevron 59"/>
-          <p:cNvSpPr/>
-          <p:nvPr/>
-        </p:nvSpPr>
-        <p:spPr>
-          <a:xfrm>
-            <a:off x="2276856" y="5875020"/>
-            <a:ext cx="274320" cy="155448"/>
-          </a:xfrm>
-          <a:prstGeom prst="chevron">
-            <a:avLst/>
-          </a:prstGeom>
-          <a:solidFill>
-            <a:srgbClr val="2E8B9E"/>
-          </a:solidFill>
-          <a:ln>
-            <a:noFill/>
-          </a:ln>
-          <a:effectLst/>
-        </p:spPr>
-        <p:style>
-          <a:lnRef idx="1">
-            <a:schemeClr val="accent1"/>
-          </a:lnRef>
-          <a:fillRef idx="3">
-            <a:schemeClr val="accent1"/>
-          </a:fillRef>
-          <a:effectRef idx="2">
-            <a:schemeClr val="accent1"/>
-          </a:effectRef>
-          <a:fontRef idx="minor">
-            <a:schemeClr val="lt1"/>
-          </a:fontRef>
-        </p:style>
-        <p:txBody>
-          <a:bodyPr rtlCol="0" anchor="ctr"/>
-          <a:lstStyle/>
-          <a:p>
-            <a:pPr algn="ctr"/>
-          </a:p>
-        </p:txBody>
-      </p:sp>
-      <p:sp>
-        <p:nvSpPr>
-          <p:cNvPr id="61" name="Chevron 60"/>
-          <p:cNvSpPr/>
-          <p:nvPr/>
-        </p:nvSpPr>
-        <p:spPr>
-          <a:xfrm>
-            <a:off x="2528316" y="5875020"/>
-            <a:ext cx="274320" cy="155448"/>
-          </a:xfrm>
-          <a:prstGeom prst="chevron">
-            <a:avLst/>
-          </a:prstGeom>
-          <a:solidFill>
-            <a:srgbClr val="2E8B9E"/>
-          </a:solidFill>
-          <a:ln>
-            <a:noFill/>
-          </a:ln>
-          <a:effectLst/>
-        </p:spPr>
-        <p:style>
-          <a:lnRef idx="1">
-            <a:schemeClr val="accent1"/>
-          </a:lnRef>
-          <a:fillRef idx="3">
-            <a:schemeClr val="accent1"/>
-          </a:fillRef>
-          <a:effectRef idx="2">
-            <a:schemeClr val="accent1"/>
-          </a:effectRef>
-          <a:fontRef idx="minor">
-            <a:schemeClr val="lt1"/>
-          </a:fontRef>
-        </p:style>
-        <p:txBody>
-          <a:bodyPr rtlCol="0" anchor="ctr"/>
-          <a:lstStyle/>
-          <a:p>
-            <a:pPr algn="ctr"/>
-          </a:p>
-        </p:txBody>
-      </p:sp>
-      <p:sp>
-        <p:nvSpPr>
-          <p:cNvPr id="62" name="Chevron 61"/>
-          <p:cNvSpPr/>
-          <p:nvPr/>
-        </p:nvSpPr>
-        <p:spPr>
-          <a:xfrm>
-            <a:off x="2779776" y="5875020"/>
-            <a:ext cx="274320" cy="155448"/>
-          </a:xfrm>
-          <a:prstGeom prst="chevron">
-            <a:avLst/>
-          </a:prstGeom>
-          <a:solidFill>
-            <a:srgbClr val="2E8B9E"/>
-          </a:solidFill>
-          <a:ln>
-            <a:noFill/>
-          </a:ln>
-          <a:effectLst/>
-        </p:spPr>
-        <p:style>
-          <a:lnRef idx="1">
-            <a:schemeClr val="accent1"/>
-          </a:lnRef>
-          <a:fillRef idx="3">
-            <a:schemeClr val="accent1"/>
-          </a:fillRef>
-          <a:effectRef idx="2">
-            <a:schemeClr val="accent1"/>
-          </a:effectRef>
-          <a:fontRef idx="minor">
-            <a:schemeClr val="lt1"/>
-          </a:fontRef>
-        </p:style>
-        <p:txBody>
-          <a:bodyPr rtlCol="0" anchor="ctr"/>
-          <a:lstStyle/>
-          <a:p>
-            <a:pPr algn="ctr"/>
-          </a:p>
-        </p:txBody>
-      </p:sp>
-      <p:sp>
-        <p:nvSpPr>
-          <p:cNvPr id="63" name="Chevron 62"/>
-          <p:cNvSpPr/>
-          <p:nvPr/>
-        </p:nvSpPr>
-        <p:spPr>
-          <a:xfrm>
-            <a:off x="3031236" y="5875020"/>
-            <a:ext cx="274320" cy="155448"/>
-          </a:xfrm>
-          <a:prstGeom prst="chevron">
-            <a:avLst/>
-          </a:prstGeom>
-          <a:solidFill>
-            <a:srgbClr val="DDE1E7"/>
-          </a:solidFill>
-          <a:ln>
-            <a:noFill/>
-          </a:ln>
-          <a:effectLst/>
-        </p:spPr>
-        <p:style>
-          <a:lnRef idx="1">
-            <a:schemeClr val="accent1"/>
-          </a:lnRef>
-          <a:fillRef idx="3">
-            <a:schemeClr val="accent1"/>
-          </a:fillRef>
-          <a:effectRef idx="2">
-            <a:schemeClr val="accent1"/>
-          </a:effectRef>
-          <a:fontRef idx="minor">
-            <a:schemeClr val="lt1"/>
-          </a:fontRef>
-        </p:style>
-        <p:txBody>
-          <a:bodyPr rtlCol="0" anchor="ctr"/>
-          <a:lstStyle/>
-          <a:p>
-            <a:pPr algn="ctr"/>
-          </a:p>
-        </p:txBody>
-      </p:sp>
-      <p:sp>
-        <p:nvSpPr>
-          <p:cNvPr id="64" name="TextBox 63"/>
-          <p:cNvSpPr txBox="1"/>
-          <p:nvPr/>
-        </p:nvSpPr>
-        <p:spPr>
-          <a:xfrm>
-            <a:off x="3300984" y="5852160"/>
-            <a:ext cx="566928" cy="219456"/>
-          </a:xfrm>
-          <a:prstGeom prst="rect">
-            <a:avLst/>
-          </a:prstGeom>
-          <a:noFill/>
-        </p:spPr>
-        <p:txBody>
-          <a:bodyPr wrap="square" anchor="ctr" lIns="25400" rIns="25400" tIns="12700" bIns="12700">
-            <a:spAutoFit/>
-          </a:bodyPr>
-          <a:lstStyle/>
-          <a:p>
-            <a:pPr algn="l">
-              <a:lnSpc>
-                <a:spcPct val="100000"/>
-              </a:lnSpc>
-            </a:pPr>
-            <a:r>
-              <a:rPr sz="900" b="1" i="0">
-                <a:solidFill>
-                  <a:srgbClr val="2E8B9E"/>
-                </a:solidFill>
-                <a:latin typeface="Meiryo"/>
-              </a:rPr>
-              <a:t>Lv3</a:t>
-            </a:r>
-          </a:p>
-        </p:txBody>
-      </p:sp>
-      <p:sp>
-        <p:nvSpPr>
-          <p:cNvPr id="65" name="Chevron 64"/>
-          <p:cNvSpPr/>
-          <p:nvPr/>
-        </p:nvSpPr>
-        <p:spPr>
-          <a:xfrm>
-            <a:off x="2276856" y="6259068"/>
-            <a:ext cx="274320" cy="155448"/>
-          </a:xfrm>
-          <a:prstGeom prst="chevron">
-            <a:avLst/>
-          </a:prstGeom>
-          <a:solidFill>
-            <a:srgbClr val="C98A1B"/>
-          </a:solidFill>
-          <a:ln>
-            <a:noFill/>
-          </a:ln>
-          <a:effectLst/>
-        </p:spPr>
-        <p:style>
-          <a:lnRef idx="1">
-            <a:schemeClr val="accent1"/>
-          </a:lnRef>
-          <a:fillRef idx="3">
-            <a:schemeClr val="accent1"/>
-          </a:fillRef>
-          <a:effectRef idx="2">
-            <a:schemeClr val="accent1"/>
-          </a:effectRef>
-          <a:fontRef idx="minor">
-            <a:schemeClr val="lt1"/>
-          </a:fontRef>
-        </p:style>
-        <p:txBody>
-          <a:bodyPr rtlCol="0" anchor="ctr"/>
-          <a:lstStyle/>
-          <a:p>
-            <a:pPr algn="ctr"/>
-          </a:p>
-        </p:txBody>
-      </p:sp>
-      <p:sp>
-        <p:nvSpPr>
-          <p:cNvPr id="66" name="Chevron 65"/>
-          <p:cNvSpPr/>
-          <p:nvPr/>
-        </p:nvSpPr>
-        <p:spPr>
-          <a:xfrm>
-            <a:off x="2528316" y="6259068"/>
-            <a:ext cx="274320" cy="155448"/>
-          </a:xfrm>
-          <a:prstGeom prst="chevron">
-            <a:avLst/>
-          </a:prstGeom>
-          <a:solidFill>
-            <a:srgbClr val="DDE1E7"/>
-          </a:solidFill>
-          <a:ln>
-            <a:noFill/>
-          </a:ln>
-          <a:effectLst/>
-        </p:spPr>
-        <p:style>
-          <a:lnRef idx="1">
-            <a:schemeClr val="accent1"/>
-          </a:lnRef>
-          <a:fillRef idx="3">
-            <a:schemeClr val="accent1"/>
-          </a:fillRef>
-          <a:effectRef idx="2">
-            <a:schemeClr val="accent1"/>
-          </a:effectRef>
-          <a:fontRef idx="minor">
-            <a:schemeClr val="lt1"/>
-          </a:fontRef>
-        </p:style>
-        <p:txBody>
-          <a:bodyPr rtlCol="0" anchor="ctr"/>
-          <a:lstStyle/>
-          <a:p>
-            <a:pPr algn="ctr"/>
-          </a:p>
-        </p:txBody>
-      </p:sp>
-      <p:sp>
-        <p:nvSpPr>
-          <p:cNvPr id="67" name="Chevron 66"/>
-          <p:cNvSpPr/>
-          <p:nvPr/>
-        </p:nvSpPr>
-        <p:spPr>
-          <a:xfrm>
-            <a:off x="2779776" y="6259068"/>
-            <a:ext cx="274320" cy="155448"/>
-          </a:xfrm>
-          <a:prstGeom prst="chevron">
-            <a:avLst/>
-          </a:prstGeom>
-          <a:solidFill>
-            <a:srgbClr val="DDE1E7"/>
-          </a:solidFill>
-          <a:ln>
-            <a:noFill/>
-          </a:ln>
-          <a:effectLst/>
-        </p:spPr>
-        <p:style>
-          <a:lnRef idx="1">
-            <a:schemeClr val="accent1"/>
-          </a:lnRef>
-          <a:fillRef idx="3">
-            <a:schemeClr val="accent1"/>
-          </a:fillRef>
-          <a:effectRef idx="2">
-            <a:schemeClr val="accent1"/>
-          </a:effectRef>
-          <a:fontRef idx="minor">
-            <a:schemeClr val="lt1"/>
-          </a:fontRef>
-        </p:style>
-        <p:txBody>
-          <a:bodyPr rtlCol="0" anchor="ctr"/>
-          <a:lstStyle/>
-          <a:p>
-            <a:pPr algn="ctr"/>
-          </a:p>
-        </p:txBody>
-      </p:sp>
-      <p:sp>
-        <p:nvSpPr>
-          <p:cNvPr id="68" name="Chevron 67"/>
-          <p:cNvSpPr/>
-          <p:nvPr/>
-        </p:nvSpPr>
-        <p:spPr>
-          <a:xfrm>
-            <a:off x="3031236" y="6259068"/>
-            <a:ext cx="274320" cy="155448"/>
-          </a:xfrm>
-          <a:prstGeom prst="chevron">
-            <a:avLst/>
-          </a:prstGeom>
-          <a:solidFill>
-            <a:srgbClr val="DDE1E7"/>
-          </a:solidFill>
-          <a:ln>
-            <a:noFill/>
-          </a:ln>
-          <a:effectLst/>
-        </p:spPr>
-        <p:style>
-          <a:lnRef idx="1">
-            <a:schemeClr val="accent1"/>
-          </a:lnRef>
-          <a:fillRef idx="3">
-            <a:schemeClr val="accent1"/>
-          </a:fillRef>
-          <a:effectRef idx="2">
-            <a:schemeClr val="accent1"/>
-          </a:effectRef>
-          <a:fontRef idx="minor">
-            <a:schemeClr val="lt1"/>
-          </a:fontRef>
-        </p:style>
-        <p:txBody>
-          <a:bodyPr rtlCol="0" anchor="ctr"/>
-          <a:lstStyle/>
-          <a:p>
-            <a:pPr algn="ctr"/>
-          </a:p>
-        </p:txBody>
-      </p:sp>
-      <p:sp>
-        <p:nvSpPr>
-          <p:cNvPr id="69" name="TextBox 68"/>
-          <p:cNvSpPr txBox="1"/>
-          <p:nvPr/>
-        </p:nvSpPr>
-        <p:spPr>
-          <a:xfrm>
-            <a:off x="3300984" y="6236208"/>
-            <a:ext cx="566928" cy="219456"/>
-          </a:xfrm>
-          <a:prstGeom prst="rect">
-            <a:avLst/>
-          </a:prstGeom>
-          <a:noFill/>
-        </p:spPr>
-        <p:txBody>
-          <a:bodyPr wrap="square" anchor="ctr" lIns="25400" rIns="25400" tIns="12700" bIns="12700">
-            <a:spAutoFit/>
-          </a:bodyPr>
-          <a:lstStyle/>
-          <a:p>
-            <a:pPr algn="l">
-              <a:lnSpc>
-                <a:spcPct val="100000"/>
-              </a:lnSpc>
-            </a:pPr>
-            <a:r>
-              <a:rPr sz="900" b="1" i="0">
-                <a:solidFill>
-                  <a:srgbClr val="C98A1B"/>
-                </a:solidFill>
-                <a:latin typeface="Meiryo"/>
-              </a:rPr>
-              <a:t>Lv1</a:t>
             </a:r>
           </a:p>
         </p:txBody>
@@ -11411,7 +11895,7 @@
                 </a:solidFill>
                 <a:latin typeface="Meiryo"/>
               </a:rPr>
-              <a:t>チーム9は各自の案を持ち寄った段階で、1案への集約が未了。</a:t>
+              <a:t>チーム9は各自の案を持ち寄った段階で、1案への集約が未了（Lv1）。</a:t>
             </a:r>
           </a:p>
         </p:txBody>
@@ -11494,7 +11978,7 @@
                 </a:solidFill>
                 <a:latin typeface="Meiryo"/>
               </a:rPr>
-              <a:t>チーム1・6・8・11は案・スコープの整理や機能理解が途上。</a:t>
+              <a:t>チーム1・8・11は2案から1案への選定が必要な段階（Lv2）。</a:t>
             </a:r>
           </a:p>
         </p:txBody>

--- a/reports/CopilotStudio_ハッカソン_事前相談会報告.pptx
+++ b/reports/CopilotStudio_ハッカソン_事前相談会報告.pptx
@@ -4925,7 +4925,7 @@
         </p:nvGraphicFramePr>
         <p:xfrm>
           <a:off x="502920" y="1956816"/>
-          <a:ext cx="11201400" cy="4590288"/>
+          <a:ext cx="11201400" cy="4370832"/>
         </p:xfrm>
         <a:graphic>
           <a:graphicData uri="http://schemas.openxmlformats.org/drawingml/2006/table">
@@ -4940,7 +4940,7 @@
                 <a:gridCol w="3703320"/>
                 <a:gridCol w="3758184"/>
               </a:tblGrid>
-              <a:tr h="365760">
+              <a:tr h="347472">
                 <a:tc>
                   <a:txBody>
                     <a:bodyPr wrap="square"/>
@@ -5077,7 +5077,7 @@
                   </a:tcPr>
                 </a:tc>
               </a:tr>
-              <a:tr h="384048">
+              <a:tr h="365760">
                 <a:tc>
                   <a:txBody>
                     <a:bodyPr wrap="square"/>
@@ -5214,7 +5214,7 @@
                   </a:tcPr>
                 </a:tc>
               </a:tr>
-              <a:tr h="384048">
+              <a:tr h="365760">
                 <a:tc>
                   <a:txBody>
                     <a:bodyPr wrap="square"/>
@@ -5351,7 +5351,7 @@
                   </a:tcPr>
                 </a:tc>
               </a:tr>
-              <a:tr h="384048">
+              <a:tr h="365760">
                 <a:tc>
                   <a:txBody>
                     <a:bodyPr wrap="square"/>
@@ -5488,7 +5488,7 @@
                   </a:tcPr>
                 </a:tc>
               </a:tr>
-              <a:tr h="384048">
+              <a:tr h="365760">
                 <a:tc>
                   <a:txBody>
                     <a:bodyPr wrap="square"/>
@@ -5625,7 +5625,7 @@
                   </a:tcPr>
                 </a:tc>
               </a:tr>
-              <a:tr h="384048">
+              <a:tr h="365760">
                 <a:tc>
                   <a:txBody>
                     <a:bodyPr wrap="square"/>
@@ -5762,7 +5762,7 @@
                   </a:tcPr>
                 </a:tc>
               </a:tr>
-              <a:tr h="384048">
+              <a:tr h="365760">
                 <a:tc>
                   <a:txBody>
                     <a:bodyPr wrap="square"/>
@@ -5899,7 +5899,7 @@
                   </a:tcPr>
                 </a:tc>
               </a:tr>
-              <a:tr h="384048">
+              <a:tr h="365760">
                 <a:tc>
                   <a:txBody>
                     <a:bodyPr wrap="square"/>
@@ -6036,7 +6036,7 @@
                   </a:tcPr>
                 </a:tc>
               </a:tr>
-              <a:tr h="384048">
+              <a:tr h="365760">
                 <a:tc>
                   <a:txBody>
                     <a:bodyPr wrap="square"/>
@@ -6173,7 +6173,7 @@
                   </a:tcPr>
                 </a:tc>
               </a:tr>
-              <a:tr h="384048">
+              <a:tr h="365760">
                 <a:tc>
                   <a:txBody>
                     <a:bodyPr wrap="square"/>
@@ -6310,7 +6310,7 @@
                   </a:tcPr>
                 </a:tc>
               </a:tr>
-              <a:tr h="384048">
+              <a:tr h="365760">
                 <a:tc>
                   <a:txBody>
                     <a:bodyPr wrap="square"/>
@@ -6447,7 +6447,7 @@
                   </a:tcPr>
                 </a:tc>
               </a:tr>
-              <a:tr h="384048">
+              <a:tr h="365760">
                 <a:tc>
                   <a:txBody>
                     <a:bodyPr wrap="square"/>
@@ -6596,7 +6596,7 @@
         </p:nvSpPr>
         <p:spPr>
           <a:xfrm>
-            <a:off x="2203704" y="2436876"/>
+            <a:off x="2203704" y="2409444"/>
             <a:ext cx="256032" cy="155448"/>
           </a:xfrm>
           <a:prstGeom prst="chevron">
@@ -6640,7 +6640,7 @@
         </p:nvSpPr>
         <p:spPr>
           <a:xfrm>
-            <a:off x="2427732" y="2436876"/>
+            <a:off x="2427732" y="2409444"/>
             <a:ext cx="256032" cy="155448"/>
           </a:xfrm>
           <a:prstGeom prst="chevron">
@@ -6684,7 +6684,7 @@
         </p:nvSpPr>
         <p:spPr>
           <a:xfrm>
-            <a:off x="2651760" y="2436876"/>
+            <a:off x="2651760" y="2409444"/>
             <a:ext cx="256032" cy="155448"/>
           </a:xfrm>
           <a:prstGeom prst="chevron">
@@ -6728,7 +6728,7 @@
         </p:nvSpPr>
         <p:spPr>
           <a:xfrm>
-            <a:off x="2875788" y="2436876"/>
+            <a:off x="2875788" y="2409444"/>
             <a:ext cx="256032" cy="155448"/>
           </a:xfrm>
           <a:prstGeom prst="chevron">
@@ -6772,7 +6772,7 @@
         </p:nvSpPr>
         <p:spPr>
           <a:xfrm>
-            <a:off x="3099816" y="2436876"/>
+            <a:off x="3099816" y="2409444"/>
             <a:ext cx="256032" cy="155448"/>
           </a:xfrm>
           <a:prstGeom prst="chevron">
@@ -6816,7 +6816,7 @@
         </p:nvSpPr>
         <p:spPr>
           <a:xfrm>
-            <a:off x="3351276" y="2414016"/>
+            <a:off x="3351276" y="2386584"/>
             <a:ext cx="502920" cy="219456"/>
           </a:xfrm>
           <a:prstGeom prst="rect">
@@ -6855,7 +6855,7 @@
         </p:nvSpPr>
         <p:spPr>
           <a:xfrm>
-            <a:off x="2203704" y="2820924"/>
+            <a:off x="2203704" y="2775204"/>
             <a:ext cx="256032" cy="155448"/>
           </a:xfrm>
           <a:prstGeom prst="chevron">
@@ -6899,7 +6899,7 @@
         </p:nvSpPr>
         <p:spPr>
           <a:xfrm>
-            <a:off x="2427732" y="2820924"/>
+            <a:off x="2427732" y="2775204"/>
             <a:ext cx="256032" cy="155448"/>
           </a:xfrm>
           <a:prstGeom prst="chevron">
@@ -6943,7 +6943,7 @@
         </p:nvSpPr>
         <p:spPr>
           <a:xfrm>
-            <a:off x="2651760" y="2820924"/>
+            <a:off x="2651760" y="2775204"/>
             <a:ext cx="256032" cy="155448"/>
           </a:xfrm>
           <a:prstGeom prst="chevron">
@@ -6987,7 +6987,7 @@
         </p:nvSpPr>
         <p:spPr>
           <a:xfrm>
-            <a:off x="2875788" y="2820924"/>
+            <a:off x="2875788" y="2775204"/>
             <a:ext cx="256032" cy="155448"/>
           </a:xfrm>
           <a:prstGeom prst="chevron">
@@ -7031,7 +7031,7 @@
         </p:nvSpPr>
         <p:spPr>
           <a:xfrm>
-            <a:off x="3099816" y="2820924"/>
+            <a:off x="3099816" y="2775204"/>
             <a:ext cx="256032" cy="155448"/>
           </a:xfrm>
           <a:prstGeom prst="chevron">
@@ -7075,7 +7075,7 @@
         </p:nvSpPr>
         <p:spPr>
           <a:xfrm>
-            <a:off x="3351276" y="2798064"/>
+            <a:off x="3351276" y="2752344"/>
             <a:ext cx="502920" cy="219456"/>
           </a:xfrm>
           <a:prstGeom prst="rect">
@@ -7114,7 +7114,7 @@
         </p:nvSpPr>
         <p:spPr>
           <a:xfrm>
-            <a:off x="2203704" y="3204972"/>
+            <a:off x="2203704" y="3140964"/>
             <a:ext cx="256032" cy="155448"/>
           </a:xfrm>
           <a:prstGeom prst="chevron">
@@ -7158,7 +7158,7 @@
         </p:nvSpPr>
         <p:spPr>
           <a:xfrm>
-            <a:off x="2427732" y="3204972"/>
+            <a:off x="2427732" y="3140964"/>
             <a:ext cx="256032" cy="155448"/>
           </a:xfrm>
           <a:prstGeom prst="chevron">
@@ -7202,7 +7202,7 @@
         </p:nvSpPr>
         <p:spPr>
           <a:xfrm>
-            <a:off x="2651760" y="3204972"/>
+            <a:off x="2651760" y="3140964"/>
             <a:ext cx="256032" cy="155448"/>
           </a:xfrm>
           <a:prstGeom prst="chevron">
@@ -7246,7 +7246,7 @@
         </p:nvSpPr>
         <p:spPr>
           <a:xfrm>
-            <a:off x="2875788" y="3204972"/>
+            <a:off x="2875788" y="3140964"/>
             <a:ext cx="256032" cy="155448"/>
           </a:xfrm>
           <a:prstGeom prst="chevron">
@@ -7290,7 +7290,7 @@
         </p:nvSpPr>
         <p:spPr>
           <a:xfrm>
-            <a:off x="3099816" y="3204972"/>
+            <a:off x="3099816" y="3140964"/>
             <a:ext cx="256032" cy="155448"/>
           </a:xfrm>
           <a:prstGeom prst="chevron">
@@ -7334,7 +7334,7 @@
         </p:nvSpPr>
         <p:spPr>
           <a:xfrm>
-            <a:off x="3351276" y="3182112"/>
+            <a:off x="3351276" y="3118104"/>
             <a:ext cx="502920" cy="219456"/>
           </a:xfrm>
           <a:prstGeom prst="rect">
@@ -7373,7 +7373,7 @@
         </p:nvSpPr>
         <p:spPr>
           <a:xfrm>
-            <a:off x="2203704" y="3589020"/>
+            <a:off x="2203704" y="3506724"/>
             <a:ext cx="256032" cy="155448"/>
           </a:xfrm>
           <a:prstGeom prst="chevron">
@@ -7417,7 +7417,7 @@
         </p:nvSpPr>
         <p:spPr>
           <a:xfrm>
-            <a:off x="2427732" y="3589020"/>
+            <a:off x="2427732" y="3506724"/>
             <a:ext cx="256032" cy="155448"/>
           </a:xfrm>
           <a:prstGeom prst="chevron">
@@ -7461,7 +7461,7 @@
         </p:nvSpPr>
         <p:spPr>
           <a:xfrm>
-            <a:off x="2651760" y="3589020"/>
+            <a:off x="2651760" y="3506724"/>
             <a:ext cx="256032" cy="155448"/>
           </a:xfrm>
           <a:prstGeom prst="chevron">
@@ -7505,7 +7505,7 @@
         </p:nvSpPr>
         <p:spPr>
           <a:xfrm>
-            <a:off x="2875788" y="3589020"/>
+            <a:off x="2875788" y="3506724"/>
             <a:ext cx="256032" cy="155448"/>
           </a:xfrm>
           <a:prstGeom prst="chevron">
@@ -7549,7 +7549,7 @@
         </p:nvSpPr>
         <p:spPr>
           <a:xfrm>
-            <a:off x="3099816" y="3589020"/>
+            <a:off x="3099816" y="3506724"/>
             <a:ext cx="256032" cy="155448"/>
           </a:xfrm>
           <a:prstGeom prst="chevron">
@@ -7593,7 +7593,7 @@
         </p:nvSpPr>
         <p:spPr>
           <a:xfrm>
-            <a:off x="3351276" y="3566160"/>
+            <a:off x="3351276" y="3483864"/>
             <a:ext cx="502920" cy="219456"/>
           </a:xfrm>
           <a:prstGeom prst="rect">
@@ -7632,7 +7632,7 @@
         </p:nvSpPr>
         <p:spPr>
           <a:xfrm>
-            <a:off x="2203704" y="3973068"/>
+            <a:off x="2203704" y="3872484"/>
             <a:ext cx="256032" cy="155448"/>
           </a:xfrm>
           <a:prstGeom prst="chevron">
@@ -7676,7 +7676,7 @@
         </p:nvSpPr>
         <p:spPr>
           <a:xfrm>
-            <a:off x="2427732" y="3973068"/>
+            <a:off x="2427732" y="3872484"/>
             <a:ext cx="256032" cy="155448"/>
           </a:xfrm>
           <a:prstGeom prst="chevron">
@@ -7720,7 +7720,7 @@
         </p:nvSpPr>
         <p:spPr>
           <a:xfrm>
-            <a:off x="2651760" y="3973068"/>
+            <a:off x="2651760" y="3872484"/>
             <a:ext cx="256032" cy="155448"/>
           </a:xfrm>
           <a:prstGeom prst="chevron">
@@ -7764,7 +7764,7 @@
         </p:nvSpPr>
         <p:spPr>
           <a:xfrm>
-            <a:off x="2875788" y="3973068"/>
+            <a:off x="2875788" y="3872484"/>
             <a:ext cx="256032" cy="155448"/>
           </a:xfrm>
           <a:prstGeom prst="chevron">
@@ -7808,7 +7808,7 @@
         </p:nvSpPr>
         <p:spPr>
           <a:xfrm>
-            <a:off x="3099816" y="3973068"/>
+            <a:off x="3099816" y="3872484"/>
             <a:ext cx="256032" cy="155448"/>
           </a:xfrm>
           <a:prstGeom prst="chevron">
@@ -7852,7 +7852,7 @@
         </p:nvSpPr>
         <p:spPr>
           <a:xfrm>
-            <a:off x="3351276" y="3950208"/>
+            <a:off x="3351276" y="3849624"/>
             <a:ext cx="502920" cy="219456"/>
           </a:xfrm>
           <a:prstGeom prst="rect">
@@ -7891,7 +7891,7 @@
         </p:nvSpPr>
         <p:spPr>
           <a:xfrm>
-            <a:off x="2203704" y="4357116"/>
+            <a:off x="2203704" y="4238244"/>
             <a:ext cx="256032" cy="155448"/>
           </a:xfrm>
           <a:prstGeom prst="chevron">
@@ -7935,7 +7935,7 @@
         </p:nvSpPr>
         <p:spPr>
           <a:xfrm>
-            <a:off x="2427732" y="4357116"/>
+            <a:off x="2427732" y="4238244"/>
             <a:ext cx="256032" cy="155448"/>
           </a:xfrm>
           <a:prstGeom prst="chevron">
@@ -7979,7 +7979,7 @@
         </p:nvSpPr>
         <p:spPr>
           <a:xfrm>
-            <a:off x="2651760" y="4357116"/>
+            <a:off x="2651760" y="4238244"/>
             <a:ext cx="256032" cy="155448"/>
           </a:xfrm>
           <a:prstGeom prst="chevron">
@@ -8023,7 +8023,7 @@
         </p:nvSpPr>
         <p:spPr>
           <a:xfrm>
-            <a:off x="2875788" y="4357116"/>
+            <a:off x="2875788" y="4238244"/>
             <a:ext cx="256032" cy="155448"/>
           </a:xfrm>
           <a:prstGeom prst="chevron">
@@ -8067,7 +8067,7 @@
         </p:nvSpPr>
         <p:spPr>
           <a:xfrm>
-            <a:off x="3099816" y="4357116"/>
+            <a:off x="3099816" y="4238244"/>
             <a:ext cx="256032" cy="155448"/>
           </a:xfrm>
           <a:prstGeom prst="chevron">
@@ -8111,7 +8111,7 @@
         </p:nvSpPr>
         <p:spPr>
           <a:xfrm>
-            <a:off x="3351276" y="4334256"/>
+            <a:off x="3351276" y="4215384"/>
             <a:ext cx="502920" cy="219456"/>
           </a:xfrm>
           <a:prstGeom prst="rect">
@@ -8150,7 +8150,7 @@
         </p:nvSpPr>
         <p:spPr>
           <a:xfrm>
-            <a:off x="2203704" y="4741164"/>
+            <a:off x="2203704" y="4604004"/>
             <a:ext cx="256032" cy="155448"/>
           </a:xfrm>
           <a:prstGeom prst="chevron">
@@ -8194,7 +8194,7 @@
         </p:nvSpPr>
         <p:spPr>
           <a:xfrm>
-            <a:off x="2427732" y="4741164"/>
+            <a:off x="2427732" y="4604004"/>
             <a:ext cx="256032" cy="155448"/>
           </a:xfrm>
           <a:prstGeom prst="chevron">
@@ -8238,7 +8238,7 @@
         </p:nvSpPr>
         <p:spPr>
           <a:xfrm>
-            <a:off x="2651760" y="4741164"/>
+            <a:off x="2651760" y="4604004"/>
             <a:ext cx="256032" cy="155448"/>
           </a:xfrm>
           <a:prstGeom prst="chevron">
@@ -8282,7 +8282,7 @@
         </p:nvSpPr>
         <p:spPr>
           <a:xfrm>
-            <a:off x="2875788" y="4741164"/>
+            <a:off x="2875788" y="4604004"/>
             <a:ext cx="256032" cy="155448"/>
           </a:xfrm>
           <a:prstGeom prst="chevron">
@@ -8326,7 +8326,7 @@
         </p:nvSpPr>
         <p:spPr>
           <a:xfrm>
-            <a:off x="3099816" y="4741164"/>
+            <a:off x="3099816" y="4604004"/>
             <a:ext cx="256032" cy="155448"/>
           </a:xfrm>
           <a:prstGeom prst="chevron">
@@ -8370,7 +8370,7 @@
         </p:nvSpPr>
         <p:spPr>
           <a:xfrm>
-            <a:off x="3351276" y="4718304"/>
+            <a:off x="3351276" y="4581144"/>
             <a:ext cx="502920" cy="219456"/>
           </a:xfrm>
           <a:prstGeom prst="rect">
@@ -8409,7 +8409,7 @@
         </p:nvSpPr>
         <p:spPr>
           <a:xfrm>
-            <a:off x="2203704" y="5125212"/>
+            <a:off x="2203704" y="4969764"/>
             <a:ext cx="256032" cy="155448"/>
           </a:xfrm>
           <a:prstGeom prst="chevron">
@@ -8453,7 +8453,7 @@
         </p:nvSpPr>
         <p:spPr>
           <a:xfrm>
-            <a:off x="2427732" y="5125212"/>
+            <a:off x="2427732" y="4969764"/>
             <a:ext cx="256032" cy="155448"/>
           </a:xfrm>
           <a:prstGeom prst="chevron">
@@ -8497,7 +8497,7 @@
         </p:nvSpPr>
         <p:spPr>
           <a:xfrm>
-            <a:off x="2651760" y="5125212"/>
+            <a:off x="2651760" y="4969764"/>
             <a:ext cx="256032" cy="155448"/>
           </a:xfrm>
           <a:prstGeom prst="chevron">
@@ -8541,7 +8541,7 @@
         </p:nvSpPr>
         <p:spPr>
           <a:xfrm>
-            <a:off x="2875788" y="5125212"/>
+            <a:off x="2875788" y="4969764"/>
             <a:ext cx="256032" cy="155448"/>
           </a:xfrm>
           <a:prstGeom prst="chevron">
@@ -8585,7 +8585,7 @@
         </p:nvSpPr>
         <p:spPr>
           <a:xfrm>
-            <a:off x="3099816" y="5125212"/>
+            <a:off x="3099816" y="4969764"/>
             <a:ext cx="256032" cy="155448"/>
           </a:xfrm>
           <a:prstGeom prst="chevron">
@@ -8629,7 +8629,7 @@
         </p:nvSpPr>
         <p:spPr>
           <a:xfrm>
-            <a:off x="3351276" y="5102352"/>
+            <a:off x="3351276" y="4946904"/>
             <a:ext cx="502920" cy="219456"/>
           </a:xfrm>
           <a:prstGeom prst="rect">
@@ -8668,7 +8668,7 @@
         </p:nvSpPr>
         <p:spPr>
           <a:xfrm>
-            <a:off x="2203704" y="5509260"/>
+            <a:off x="2203704" y="5335524"/>
             <a:ext cx="256032" cy="155448"/>
           </a:xfrm>
           <a:prstGeom prst="chevron">
@@ -8712,7 +8712,7 @@
         </p:nvSpPr>
         <p:spPr>
           <a:xfrm>
-            <a:off x="2427732" y="5509260"/>
+            <a:off x="2427732" y="5335524"/>
             <a:ext cx="256032" cy="155448"/>
           </a:xfrm>
           <a:prstGeom prst="chevron">
@@ -8756,7 +8756,7 @@
         </p:nvSpPr>
         <p:spPr>
           <a:xfrm>
-            <a:off x="2651760" y="5509260"/>
+            <a:off x="2651760" y="5335524"/>
             <a:ext cx="256032" cy="155448"/>
           </a:xfrm>
           <a:prstGeom prst="chevron">
@@ -8800,7 +8800,7 @@
         </p:nvSpPr>
         <p:spPr>
           <a:xfrm>
-            <a:off x="2875788" y="5509260"/>
+            <a:off x="2875788" y="5335524"/>
             <a:ext cx="256032" cy="155448"/>
           </a:xfrm>
           <a:prstGeom prst="chevron">
@@ -8844,7 +8844,7 @@
         </p:nvSpPr>
         <p:spPr>
           <a:xfrm>
-            <a:off x="3099816" y="5509260"/>
+            <a:off x="3099816" y="5335524"/>
             <a:ext cx="256032" cy="155448"/>
           </a:xfrm>
           <a:prstGeom prst="chevron">
@@ -8888,7 +8888,7 @@
         </p:nvSpPr>
         <p:spPr>
           <a:xfrm>
-            <a:off x="3351276" y="5486400"/>
+            <a:off x="3351276" y="5312664"/>
             <a:ext cx="502920" cy="219456"/>
           </a:xfrm>
           <a:prstGeom prst="rect">
@@ -8927,7 +8927,7 @@
         </p:nvSpPr>
         <p:spPr>
           <a:xfrm>
-            <a:off x="2203704" y="5893308"/>
+            <a:off x="2203704" y="5701284"/>
             <a:ext cx="256032" cy="155448"/>
           </a:xfrm>
           <a:prstGeom prst="chevron">
@@ -8971,7 +8971,7 @@
         </p:nvSpPr>
         <p:spPr>
           <a:xfrm>
-            <a:off x="2427732" y="5893308"/>
+            <a:off x="2427732" y="5701284"/>
             <a:ext cx="256032" cy="155448"/>
           </a:xfrm>
           <a:prstGeom prst="chevron">
@@ -9015,7 +9015,7 @@
         </p:nvSpPr>
         <p:spPr>
           <a:xfrm>
-            <a:off x="2651760" y="5893308"/>
+            <a:off x="2651760" y="5701284"/>
             <a:ext cx="256032" cy="155448"/>
           </a:xfrm>
           <a:prstGeom prst="chevron">
@@ -9059,7 +9059,7 @@
         </p:nvSpPr>
         <p:spPr>
           <a:xfrm>
-            <a:off x="2875788" y="5893308"/>
+            <a:off x="2875788" y="5701284"/>
             <a:ext cx="256032" cy="155448"/>
           </a:xfrm>
           <a:prstGeom prst="chevron">
@@ -9103,7 +9103,7 @@
         </p:nvSpPr>
         <p:spPr>
           <a:xfrm>
-            <a:off x="3099816" y="5893308"/>
+            <a:off x="3099816" y="5701284"/>
             <a:ext cx="256032" cy="155448"/>
           </a:xfrm>
           <a:prstGeom prst="chevron">
@@ -9147,7 +9147,7 @@
         </p:nvSpPr>
         <p:spPr>
           <a:xfrm>
-            <a:off x="3351276" y="5870448"/>
+            <a:off x="3351276" y="5678424"/>
             <a:ext cx="502920" cy="219456"/>
           </a:xfrm>
           <a:prstGeom prst="rect">
@@ -9186,7 +9186,7 @@
         </p:nvSpPr>
         <p:spPr>
           <a:xfrm>
-            <a:off x="2203704" y="6277356"/>
+            <a:off x="2203704" y="6067044"/>
             <a:ext cx="256032" cy="155448"/>
           </a:xfrm>
           <a:prstGeom prst="chevron">
@@ -9230,7 +9230,7 @@
         </p:nvSpPr>
         <p:spPr>
           <a:xfrm>
-            <a:off x="2427732" y="6277356"/>
+            <a:off x="2427732" y="6067044"/>
             <a:ext cx="256032" cy="155448"/>
           </a:xfrm>
           <a:prstGeom prst="chevron">
@@ -9274,7 +9274,7 @@
         </p:nvSpPr>
         <p:spPr>
           <a:xfrm>
-            <a:off x="2651760" y="6277356"/>
+            <a:off x="2651760" y="6067044"/>
             <a:ext cx="256032" cy="155448"/>
           </a:xfrm>
           <a:prstGeom prst="chevron">
@@ -9318,7 +9318,7 @@
         </p:nvSpPr>
         <p:spPr>
           <a:xfrm>
-            <a:off x="2875788" y="6277356"/>
+            <a:off x="2875788" y="6067044"/>
             <a:ext cx="256032" cy="155448"/>
           </a:xfrm>
           <a:prstGeom prst="chevron">
@@ -9362,7 +9362,7 @@
         </p:nvSpPr>
         <p:spPr>
           <a:xfrm>
-            <a:off x="3099816" y="6277356"/>
+            <a:off x="3099816" y="6067044"/>
             <a:ext cx="256032" cy="155448"/>
           </a:xfrm>
           <a:prstGeom prst="chevron">
@@ -9406,7 +9406,7 @@
         </p:nvSpPr>
         <p:spPr>
           <a:xfrm>
-            <a:off x="3351276" y="6254496"/>
+            <a:off x="3351276" y="6044184"/>
             <a:ext cx="502920" cy="219456"/>
           </a:xfrm>
           <a:prstGeom prst="rect">
@@ -9433,6 +9433,133 @@
                 <a:latin typeface="Meiryo"/>
               </a:rPr>
               <a:t>Lv2</a:t>
+            </a:r>
+          </a:p>
+        </p:txBody>
+      </p:sp>
+      <p:sp>
+        <p:nvSpPr>
+          <p:cNvPr id="81" name="Rectangle 80"/>
+          <p:cNvSpPr/>
+          <p:nvPr/>
+        </p:nvSpPr>
+        <p:spPr>
+          <a:xfrm>
+            <a:off x="502920" y="6364224"/>
+            <a:ext cx="11201400" cy="192024"/>
+          </a:xfrm>
+          <a:prstGeom prst="rect">
+            <a:avLst/>
+          </a:prstGeom>
+          <a:solidFill>
+            <a:srgbClr val="E1F0F2"/>
+          </a:solidFill>
+          <a:ln>
+            <a:noFill/>
+          </a:ln>
+          <a:effectLst/>
+        </p:spPr>
+        <p:style>
+          <a:lnRef idx="1">
+            <a:schemeClr val="accent1"/>
+          </a:lnRef>
+          <a:fillRef idx="3">
+            <a:schemeClr val="accent1"/>
+          </a:fillRef>
+          <a:effectRef idx="2">
+            <a:schemeClr val="accent1"/>
+          </a:effectRef>
+          <a:fontRef idx="minor">
+            <a:schemeClr val="lt1"/>
+          </a:fontRef>
+        </p:style>
+        <p:txBody>
+          <a:bodyPr rtlCol="0" anchor="ctr"/>
+          <a:lstStyle/>
+          <a:p>
+            <a:pPr algn="ctr"/>
+          </a:p>
+        </p:txBody>
+      </p:sp>
+      <p:sp>
+        <p:nvSpPr>
+          <p:cNvPr id="82" name="Rectangle 81"/>
+          <p:cNvSpPr/>
+          <p:nvPr/>
+        </p:nvSpPr>
+        <p:spPr>
+          <a:xfrm>
+            <a:off x="502920" y="6364224"/>
+            <a:ext cx="109728" cy="192024"/>
+          </a:xfrm>
+          <a:prstGeom prst="rect">
+            <a:avLst/>
+          </a:prstGeom>
+          <a:solidFill>
+            <a:srgbClr val="2E8B9E"/>
+          </a:solidFill>
+          <a:ln>
+            <a:noFill/>
+          </a:ln>
+          <a:effectLst/>
+        </p:spPr>
+        <p:style>
+          <a:lnRef idx="1">
+            <a:schemeClr val="accent1"/>
+          </a:lnRef>
+          <a:fillRef idx="3">
+            <a:schemeClr val="accent1"/>
+          </a:fillRef>
+          <a:effectRef idx="2">
+            <a:schemeClr val="accent1"/>
+          </a:effectRef>
+          <a:fontRef idx="minor">
+            <a:schemeClr val="lt1"/>
+          </a:fontRef>
+        </p:style>
+        <p:txBody>
+          <a:bodyPr rtlCol="0" anchor="ctr"/>
+          <a:lstStyle/>
+          <a:p>
+            <a:pPr algn="ctr"/>
+          </a:p>
+        </p:txBody>
+      </p:sp>
+      <p:sp>
+        <p:nvSpPr>
+          <p:cNvPr id="83" name="TextBox 82"/>
+          <p:cNvSpPr txBox="1"/>
+          <p:nvPr/>
+        </p:nvSpPr>
+        <p:spPr>
+          <a:xfrm>
+            <a:off x="740664" y="6345936"/>
+            <a:ext cx="10881360" cy="228600"/>
+          </a:xfrm>
+          <a:prstGeom prst="rect">
+            <a:avLst/>
+          </a:prstGeom>
+          <a:noFill/>
+        </p:spPr>
+        <p:txBody>
+          <a:bodyPr wrap="square" anchor="ctr" lIns="25400" rIns="25400" tIns="12700" bIns="12700">
+            <a:spAutoFit/>
+          </a:bodyPr>
+          <a:lstStyle/>
+          <a:p>
+            <a:pPr algn="l">
+              <a:lnSpc>
+                <a:spcPct val="100000"/>
+              </a:lnSpc>
+            </a:pPr>
+            <a:r>
+              <a:rPr sz="950" b="1" i="0">
+                <a:solidFill>
+                  <a:srgbClr val="1D5A66"/>
+                </a:solidFill>
+                <a:latin typeface="Meiryo"/>
+              </a:rPr>
+              <a:t>「2案」のチームは、1案に絞り込んだ上で7/17に事務局へ提出し、最終発表も1案とする。他案は発表対象外だが、並行して進めることは可。</a:t>
             </a:r>
           </a:p>
         </p:txBody>

--- a/reports/CopilotStudio_ハッカソン_事前相談会報告.pptx
+++ b/reports/CopilotStudio_ハッカソン_事前相談会報告.pptx
@@ -4934,11 +4934,12 @@
                 <a:tableStyleId>{5C22544A-7EE6-4342-B048-85BDC9FD1C3A}</a:tableStyleId>
               </a:tblPr>
               <a:tblGrid>
-                <a:gridCol w="658368"/>
-                <a:gridCol w="932688"/>
-                <a:gridCol w="2148840"/>
-                <a:gridCol w="3703320"/>
-                <a:gridCol w="3758184"/>
+                <a:gridCol w="548640"/>
+                <a:gridCol w="731520"/>
+                <a:gridCol w="1920240"/>
+                <a:gridCol w="2606040"/>
+                <a:gridCol w="2468880"/>
+                <a:gridCol w="2926080"/>
               </a:tblGrid>
               <a:tr h="347472">
                 <a:tc>
@@ -4952,7 +4953,7 @@
                         </a:lnSpc>
                       </a:pPr>
                       <a:r>
-                        <a:rPr sz="1050" b="1">
+                        <a:rPr sz="950" b="1">
                           <a:solidFill>
                             <a:srgbClr val="FFFFFF"/>
                           </a:solidFill>
@@ -4979,7 +4980,7 @@
                         </a:lnSpc>
                       </a:pPr>
                       <a:r>
-                        <a:rPr sz="1050" b="1">
+                        <a:rPr sz="950" b="1">
                           <a:solidFill>
                             <a:srgbClr val="FFFFFF"/>
                           </a:solidFill>
@@ -5006,7 +5007,7 @@
                         </a:lnSpc>
                       </a:pPr>
                       <a:r>
-                        <a:rPr sz="1050" b="1">
+                        <a:rPr sz="950" b="1">
                           <a:solidFill>
                             <a:srgbClr val="FFFFFF"/>
                           </a:solidFill>
@@ -5033,7 +5034,34 @@
                         </a:lnSpc>
                       </a:pPr>
                       <a:r>
-                        <a:rPr sz="1050" b="1">
+                        <a:rPr sz="950" b="1">
+                          <a:solidFill>
+                            <a:srgbClr val="FFFFFF"/>
+                          </a:solidFill>
+                          <a:latin typeface="Meiryo"/>
+                        </a:rPr>
+                        <a:t>案概要（エージェント名）</a:t>
+                      </a:r>
+                    </a:p>
+                  </a:txBody>
+                  <a:tcPr marL="63500" marR="63500" marT="25400" marB="25400" anchor="ctr">
+                    <a:solidFill>
+                      <a:srgbClr val="1F385C"/>
+                    </a:solidFill>
+                  </a:tcPr>
+                </a:tc>
+                <a:tc>
+                  <a:txBody>
+                    <a:bodyPr wrap="square"/>
+                    <a:lstStyle/>
+                    <a:p>
+                      <a:pPr algn="ctr">
+                        <a:lnSpc>
+                          <a:spcPct val="98000"/>
+                        </a:lnSpc>
+                      </a:pPr>
+                      <a:r>
+                        <a:rPr sz="950" b="1">
                           <a:solidFill>
                             <a:srgbClr val="FFFFFF"/>
                           </a:solidFill>
@@ -5060,7 +5088,7 @@
                         </a:lnSpc>
                       </a:pPr>
                       <a:r>
-                        <a:rPr sz="1050" b="1">
+                        <a:rPr sz="950" b="1">
                           <a:solidFill>
                             <a:srgbClr val="FFFFFF"/>
                           </a:solidFill>
@@ -5089,7 +5117,7 @@
                         </a:lnSpc>
                       </a:pPr>
                       <a:r>
-                        <a:rPr sz="1050" b="1">
+                        <a:rPr sz="1000" b="1">
                           <a:solidFill>
                             <a:srgbClr val="1F385C"/>
                           </a:solidFill>
@@ -5116,7 +5144,7 @@
                         </a:lnSpc>
                       </a:pPr>
                       <a:r>
-                        <a:rPr sz="1050" b="1">
+                        <a:rPr sz="1000" b="1">
                           <a:solidFill>
                             <a:srgbClr val="2E8B9E"/>
                           </a:solidFill>
@@ -5170,7 +5198,34 @@
                         </a:lnSpc>
                       </a:pPr>
                       <a:r>
-                        <a:rPr sz="919" b="0">
+                        <a:rPr sz="860" b="0">
+                          <a:solidFill>
+                            <a:srgbClr val="9A772E"/>
+                          </a:solidFill>
+                          <a:latin typeface="Meiryo"/>
+                        </a:rPr>
+                        <a:t>（2案：内容を要確認）</a:t>
+                      </a:r>
+                    </a:p>
+                  </a:txBody>
+                  <a:tcPr marL="63500" marR="63500" marT="25400" marB="25400" anchor="ctr">
+                    <a:solidFill>
+                      <a:srgbClr val="FFFFFF"/>
+                    </a:solidFill>
+                  </a:tcPr>
+                </a:tc>
+                <a:tc>
+                  <a:txBody>
+                    <a:bodyPr wrap="square"/>
+                    <a:lstStyle/>
+                    <a:p>
+                      <a:pPr algn="l">
+                        <a:lnSpc>
+                          <a:spcPct val="98000"/>
+                        </a:lnSpc>
+                      </a:pPr>
+                      <a:r>
+                        <a:rPr sz="860" b="0">
                           <a:solidFill>
                             <a:srgbClr val="252A31"/>
                           </a:solidFill>
@@ -5197,7 +5252,7 @@
                         </a:lnSpc>
                       </a:pPr>
                       <a:r>
-                        <a:rPr sz="919" b="0">
+                        <a:rPr sz="860" b="0">
                           <a:solidFill>
                             <a:srgbClr val="252A31"/>
                           </a:solidFill>
@@ -5226,7 +5281,7 @@
                         </a:lnSpc>
                       </a:pPr>
                       <a:r>
-                        <a:rPr sz="1050" b="1">
+                        <a:rPr sz="1000" b="1">
                           <a:solidFill>
                             <a:srgbClr val="1F385C"/>
                           </a:solidFill>
@@ -5253,7 +5308,7 @@
                         </a:lnSpc>
                       </a:pPr>
                       <a:r>
-                        <a:rPr sz="1050" b="1">
+                        <a:rPr sz="1000" b="1">
                           <a:solidFill>
                             <a:srgbClr val="3F8F5B"/>
                           </a:solidFill>
@@ -5307,7 +5362,34 @@
                         </a:lnSpc>
                       </a:pPr>
                       <a:r>
-                        <a:rPr sz="919" b="0">
+                        <a:rPr sz="860" b="1">
+                          <a:solidFill>
+                            <a:srgbClr val="252A31"/>
+                          </a:solidFill>
+                          <a:latin typeface="Meiryo"/>
+                        </a:rPr>
+                        <a:t>加盟店問い合わせ対応支援エージェント</a:t>
+                      </a:r>
+                    </a:p>
+                  </a:txBody>
+                  <a:tcPr marL="63500" marR="63500" marT="25400" marB="25400" anchor="ctr">
+                    <a:solidFill>
+                      <a:srgbClr val="F2F4F7"/>
+                    </a:solidFill>
+                  </a:tcPr>
+                </a:tc>
+                <a:tc>
+                  <a:txBody>
+                    <a:bodyPr wrap="square"/>
+                    <a:lstStyle/>
+                    <a:p>
+                      <a:pPr algn="l">
+                        <a:lnSpc>
+                          <a:spcPct val="98000"/>
+                        </a:lnSpc>
+                      </a:pPr>
+                      <a:r>
+                        <a:rPr sz="860" b="0">
                           <a:solidFill>
                             <a:srgbClr val="252A31"/>
                           </a:solidFill>
@@ -5334,7 +5416,7 @@
                         </a:lnSpc>
                       </a:pPr>
                       <a:r>
-                        <a:rPr sz="919" b="0">
+                        <a:rPr sz="860" b="0">
                           <a:solidFill>
                             <a:srgbClr val="252A31"/>
                           </a:solidFill>
@@ -5363,7 +5445,7 @@
                         </a:lnSpc>
                       </a:pPr>
                       <a:r>
-                        <a:rPr sz="1050" b="1">
+                        <a:rPr sz="1000" b="1">
                           <a:solidFill>
                             <a:srgbClr val="1F385C"/>
                           </a:solidFill>
@@ -5390,7 +5472,7 @@
                         </a:lnSpc>
                       </a:pPr>
                       <a:r>
-                        <a:rPr sz="1050" b="1">
+                        <a:rPr sz="1000" b="1">
                           <a:solidFill>
                             <a:srgbClr val="3F8F5B"/>
                           </a:solidFill>
@@ -5444,7 +5526,34 @@
                         </a:lnSpc>
                       </a:pPr>
                       <a:r>
-                        <a:rPr sz="919" b="0">
+                        <a:rPr sz="860" b="0">
+                          <a:solidFill>
+                            <a:srgbClr val="9A772E"/>
+                          </a:solidFill>
+                          <a:latin typeface="Meiryo"/>
+                        </a:rPr>
+                        <a:t>（内容を要確認）</a:t>
+                      </a:r>
+                    </a:p>
+                  </a:txBody>
+                  <a:tcPr marL="63500" marR="63500" marT="25400" marB="25400" anchor="ctr">
+                    <a:solidFill>
+                      <a:srgbClr val="FFFFFF"/>
+                    </a:solidFill>
+                  </a:tcPr>
+                </a:tc>
+                <a:tc>
+                  <a:txBody>
+                    <a:bodyPr wrap="square"/>
+                    <a:lstStyle/>
+                    <a:p>
+                      <a:pPr algn="l">
+                        <a:lnSpc>
+                          <a:spcPct val="98000"/>
+                        </a:lnSpc>
+                      </a:pPr>
+                      <a:r>
+                        <a:rPr sz="860" b="0">
                           <a:solidFill>
                             <a:srgbClr val="252A31"/>
                           </a:solidFill>
@@ -5471,7 +5580,7 @@
                         </a:lnSpc>
                       </a:pPr>
                       <a:r>
-                        <a:rPr sz="919" b="0">
+                        <a:rPr sz="860" b="0">
                           <a:solidFill>
                             <a:srgbClr val="252A31"/>
                           </a:solidFill>
@@ -5500,7 +5609,7 @@
                         </a:lnSpc>
                       </a:pPr>
                       <a:r>
-                        <a:rPr sz="1050" b="1">
+                        <a:rPr sz="1000" b="1">
                           <a:solidFill>
                             <a:srgbClr val="1F385C"/>
                           </a:solidFill>
@@ -5527,7 +5636,7 @@
                         </a:lnSpc>
                       </a:pPr>
                       <a:r>
-                        <a:rPr sz="1050" b="1">
+                        <a:rPr sz="1000" b="1">
                           <a:solidFill>
                             <a:srgbClr val="3F8F5B"/>
                           </a:solidFill>
@@ -5581,7 +5690,34 @@
                         </a:lnSpc>
                       </a:pPr>
                       <a:r>
-                        <a:rPr sz="919" b="0">
+                        <a:rPr sz="860" b="0">
+                          <a:solidFill>
+                            <a:srgbClr val="9A772E"/>
+                          </a:solidFill>
+                          <a:latin typeface="Meiryo"/>
+                        </a:rPr>
+                        <a:t>（Salesforce活用案：要確認）</a:t>
+                      </a:r>
+                    </a:p>
+                  </a:txBody>
+                  <a:tcPr marL="63500" marR="63500" marT="25400" marB="25400" anchor="ctr">
+                    <a:solidFill>
+                      <a:srgbClr val="F2F4F7"/>
+                    </a:solidFill>
+                  </a:tcPr>
+                </a:tc>
+                <a:tc>
+                  <a:txBody>
+                    <a:bodyPr wrap="square"/>
+                    <a:lstStyle/>
+                    <a:p>
+                      <a:pPr algn="l">
+                        <a:lnSpc>
+                          <a:spcPct val="98000"/>
+                        </a:lnSpc>
+                      </a:pPr>
+                      <a:r>
+                        <a:rPr sz="860" b="0">
                           <a:solidFill>
                             <a:srgbClr val="252A31"/>
                           </a:solidFill>
@@ -5608,7 +5744,7 @@
                         </a:lnSpc>
                       </a:pPr>
                       <a:r>
-                        <a:rPr sz="919" b="0">
+                        <a:rPr sz="860" b="0">
                           <a:solidFill>
                             <a:srgbClr val="252A31"/>
                           </a:solidFill>
@@ -5637,7 +5773,7 @@
                         </a:lnSpc>
                       </a:pPr>
                       <a:r>
-                        <a:rPr sz="1050" b="1">
+                        <a:rPr sz="1000" b="1">
                           <a:solidFill>
                             <a:srgbClr val="1F385C"/>
                           </a:solidFill>
@@ -5664,7 +5800,7 @@
                         </a:lnSpc>
                       </a:pPr>
                       <a:r>
-                        <a:rPr sz="1050" b="1">
+                        <a:rPr sz="1000" b="1">
                           <a:solidFill>
                             <a:srgbClr val="3F8F5B"/>
                           </a:solidFill>
@@ -5718,7 +5854,34 @@
                         </a:lnSpc>
                       </a:pPr>
                       <a:r>
-                        <a:rPr sz="919" b="0">
+                        <a:rPr sz="860" b="1">
+                          <a:solidFill>
+                            <a:srgbClr val="252A31"/>
+                          </a:solidFill>
+                          <a:latin typeface="Meiryo"/>
+                        </a:rPr>
+                        <a:t>依頼メール処理・ファイル読込エージェント</a:t>
+                      </a:r>
+                    </a:p>
+                  </a:txBody>
+                  <a:tcPr marL="63500" marR="63500" marT="25400" marB="25400" anchor="ctr">
+                    <a:solidFill>
+                      <a:srgbClr val="FFFFFF"/>
+                    </a:solidFill>
+                  </a:tcPr>
+                </a:tc>
+                <a:tc>
+                  <a:txBody>
+                    <a:bodyPr wrap="square"/>
+                    <a:lstStyle/>
+                    <a:p>
+                      <a:pPr algn="l">
+                        <a:lnSpc>
+                          <a:spcPct val="98000"/>
+                        </a:lnSpc>
+                      </a:pPr>
+                      <a:r>
+                        <a:rPr sz="860" b="0">
                           <a:solidFill>
                             <a:srgbClr val="252A31"/>
                           </a:solidFill>
@@ -5745,7 +5908,7 @@
                         </a:lnSpc>
                       </a:pPr>
                       <a:r>
-                        <a:rPr sz="919" b="0">
+                        <a:rPr sz="860" b="0">
                           <a:solidFill>
                             <a:srgbClr val="252A31"/>
                           </a:solidFill>
@@ -5774,7 +5937,7 @@
                         </a:lnSpc>
                       </a:pPr>
                       <a:r>
-                        <a:rPr sz="1050" b="1">
+                        <a:rPr sz="1000" b="1">
                           <a:solidFill>
                             <a:srgbClr val="1F385C"/>
                           </a:solidFill>
@@ -5801,7 +5964,7 @@
                         </a:lnSpc>
                       </a:pPr>
                       <a:r>
-                        <a:rPr sz="1050" b="1">
+                        <a:rPr sz="1000" b="1">
                           <a:solidFill>
                             <a:srgbClr val="3F8F5B"/>
                           </a:solidFill>
@@ -5855,7 +6018,34 @@
                         </a:lnSpc>
                       </a:pPr>
                       <a:r>
-                        <a:rPr sz="919" b="0">
+                        <a:rPr sz="860" b="0">
+                          <a:solidFill>
+                            <a:srgbClr val="9A772E"/>
+                          </a:solidFill>
+                          <a:latin typeface="Meiryo"/>
+                        </a:rPr>
+                        <a:t>（内容を要確認）</a:t>
+                      </a:r>
+                    </a:p>
+                  </a:txBody>
+                  <a:tcPr marL="63500" marR="63500" marT="25400" marB="25400" anchor="ctr">
+                    <a:solidFill>
+                      <a:srgbClr val="F2F4F7"/>
+                    </a:solidFill>
+                  </a:tcPr>
+                </a:tc>
+                <a:tc>
+                  <a:txBody>
+                    <a:bodyPr wrap="square"/>
+                    <a:lstStyle/>
+                    <a:p>
+                      <a:pPr algn="l">
+                        <a:lnSpc>
+                          <a:spcPct val="98000"/>
+                        </a:lnSpc>
+                      </a:pPr>
+                      <a:r>
+                        <a:rPr sz="860" b="0">
                           <a:solidFill>
                             <a:srgbClr val="252A31"/>
                           </a:solidFill>
@@ -5882,7 +6072,7 @@
                         </a:lnSpc>
                       </a:pPr>
                       <a:r>
-                        <a:rPr sz="919" b="0">
+                        <a:rPr sz="860" b="0">
                           <a:solidFill>
                             <a:srgbClr val="252A31"/>
                           </a:solidFill>
@@ -5911,7 +6101,7 @@
                         </a:lnSpc>
                       </a:pPr>
                       <a:r>
-                        <a:rPr sz="1050" b="1">
+                        <a:rPr sz="1000" b="1">
                           <a:solidFill>
                             <a:srgbClr val="1F385C"/>
                           </a:solidFill>
@@ -5938,7 +6128,7 @@
                         </a:lnSpc>
                       </a:pPr>
                       <a:r>
-                        <a:rPr sz="1050" b="1">
+                        <a:rPr sz="1000" b="1">
                           <a:solidFill>
                             <a:srgbClr val="3F8F5B"/>
                           </a:solidFill>
@@ -5992,7 +6182,34 @@
                         </a:lnSpc>
                       </a:pPr>
                       <a:r>
-                        <a:rPr sz="919" b="0">
+                        <a:rPr sz="860" b="1">
+                          <a:solidFill>
+                            <a:srgbClr val="252A31"/>
+                          </a:solidFill>
+                          <a:latin typeface="Meiryo"/>
+                        </a:rPr>
+                        <a:t>入力ファイル自動チェック・修正エージェント</a:t>
+                      </a:r>
+                    </a:p>
+                  </a:txBody>
+                  <a:tcPr marL="63500" marR="63500" marT="25400" marB="25400" anchor="ctr">
+                    <a:solidFill>
+                      <a:srgbClr val="FFFFFF"/>
+                    </a:solidFill>
+                  </a:tcPr>
+                </a:tc>
+                <a:tc>
+                  <a:txBody>
+                    <a:bodyPr wrap="square"/>
+                    <a:lstStyle/>
+                    <a:p>
+                      <a:pPr algn="l">
+                        <a:lnSpc>
+                          <a:spcPct val="98000"/>
+                        </a:lnSpc>
+                      </a:pPr>
+                      <a:r>
+                        <a:rPr sz="860" b="0">
                           <a:solidFill>
                             <a:srgbClr val="252A31"/>
                           </a:solidFill>
@@ -6019,7 +6236,7 @@
                         </a:lnSpc>
                       </a:pPr>
                       <a:r>
-                        <a:rPr sz="919" b="0">
+                        <a:rPr sz="860" b="0">
                           <a:solidFill>
                             <a:srgbClr val="252A31"/>
                           </a:solidFill>
@@ -6048,7 +6265,7 @@
                         </a:lnSpc>
                       </a:pPr>
                       <a:r>
-                        <a:rPr sz="1050" b="1">
+                        <a:rPr sz="1000" b="1">
                           <a:solidFill>
                             <a:srgbClr val="1F385C"/>
                           </a:solidFill>
@@ -6075,7 +6292,7 @@
                         </a:lnSpc>
                       </a:pPr>
                       <a:r>
-                        <a:rPr sz="1050" b="1">
+                        <a:rPr sz="1000" b="1">
                           <a:solidFill>
                             <a:srgbClr val="2E8B9E"/>
                           </a:solidFill>
@@ -6129,7 +6346,34 @@
                         </a:lnSpc>
                       </a:pPr>
                       <a:r>
-                        <a:rPr sz="919" b="0">
+                        <a:rPr sz="860" b="0">
+                          <a:solidFill>
+                            <a:srgbClr val="9A772E"/>
+                          </a:solidFill>
+                          <a:latin typeface="Meiryo"/>
+                        </a:rPr>
+                        <a:t>（2案：内容を要確認）</a:t>
+                      </a:r>
+                    </a:p>
+                  </a:txBody>
+                  <a:tcPr marL="63500" marR="63500" marT="25400" marB="25400" anchor="ctr">
+                    <a:solidFill>
+                      <a:srgbClr val="F2F4F7"/>
+                    </a:solidFill>
+                  </a:tcPr>
+                </a:tc>
+                <a:tc>
+                  <a:txBody>
+                    <a:bodyPr wrap="square"/>
+                    <a:lstStyle/>
+                    <a:p>
+                      <a:pPr algn="l">
+                        <a:lnSpc>
+                          <a:spcPct val="98000"/>
+                        </a:lnSpc>
+                      </a:pPr>
+                      <a:r>
+                        <a:rPr sz="860" b="0">
                           <a:solidFill>
                             <a:srgbClr val="252A31"/>
                           </a:solidFill>
@@ -6156,7 +6400,7 @@
                         </a:lnSpc>
                       </a:pPr>
                       <a:r>
-                        <a:rPr sz="919" b="0">
+                        <a:rPr sz="860" b="0">
                           <a:solidFill>
                             <a:srgbClr val="252A31"/>
                           </a:solidFill>
@@ -6185,7 +6429,7 @@
                         </a:lnSpc>
                       </a:pPr>
                       <a:r>
-                        <a:rPr sz="1050" b="1">
+                        <a:rPr sz="1000" b="1">
                           <a:solidFill>
                             <a:srgbClr val="1F385C"/>
                           </a:solidFill>
@@ -6212,7 +6456,7 @@
                         </a:lnSpc>
                       </a:pPr>
                       <a:r>
-                        <a:rPr sz="1050" b="1">
+                        <a:rPr sz="1000" b="1">
                           <a:solidFill>
                             <a:srgbClr val="C98A1B"/>
                           </a:solidFill>
@@ -6266,7 +6510,34 @@
                         </a:lnSpc>
                       </a:pPr>
                       <a:r>
-                        <a:rPr sz="919" b="0">
+                        <a:rPr sz="860" b="1">
+                          <a:solidFill>
+                            <a:srgbClr val="252A31"/>
+                          </a:solidFill>
+                          <a:latin typeface="Meiryo"/>
+                        </a:rPr>
+                        <a:t/>
+                      </a:r>
+                    </a:p>
+                  </a:txBody>
+                  <a:tcPr marL="63500" marR="63500" marT="25400" marB="25400" anchor="ctr">
+                    <a:solidFill>
+                      <a:srgbClr val="FFFFFF"/>
+                    </a:solidFill>
+                  </a:tcPr>
+                </a:tc>
+                <a:tc>
+                  <a:txBody>
+                    <a:bodyPr wrap="square"/>
+                    <a:lstStyle/>
+                    <a:p>
+                      <a:pPr algn="l">
+                        <a:lnSpc>
+                          <a:spcPct val="98000"/>
+                        </a:lnSpc>
+                      </a:pPr>
+                      <a:r>
+                        <a:rPr sz="860" b="0">
                           <a:solidFill>
                             <a:srgbClr val="252A31"/>
                           </a:solidFill>
@@ -6293,7 +6564,7 @@
                         </a:lnSpc>
                       </a:pPr>
                       <a:r>
-                        <a:rPr sz="919" b="0">
+                        <a:rPr sz="860" b="0">
                           <a:solidFill>
                             <a:srgbClr val="252A31"/>
                           </a:solidFill>
@@ -6322,7 +6593,7 @@
                         </a:lnSpc>
                       </a:pPr>
                       <a:r>
-                        <a:rPr sz="1050" b="1">
+                        <a:rPr sz="1000" b="1">
                           <a:solidFill>
                             <a:srgbClr val="1F385C"/>
                           </a:solidFill>
@@ -6349,7 +6620,7 @@
                         </a:lnSpc>
                       </a:pPr>
                       <a:r>
-                        <a:rPr sz="1050" b="1">
+                        <a:rPr sz="1000" b="1">
                           <a:solidFill>
                             <a:srgbClr val="3F8F5B"/>
                           </a:solidFill>
@@ -6403,7 +6674,34 @@
                         </a:lnSpc>
                       </a:pPr>
                       <a:r>
-                        <a:rPr sz="919" b="0">
+                        <a:rPr sz="860" b="1">
+                          <a:solidFill>
+                            <a:srgbClr val="252A31"/>
+                          </a:solidFill>
+                          <a:latin typeface="Meiryo"/>
+                        </a:rPr>
+                        <a:t>対面クライテリア議事録ドラフト生成エージェント</a:t>
+                      </a:r>
+                    </a:p>
+                  </a:txBody>
+                  <a:tcPr marL="63500" marR="63500" marT="25400" marB="25400" anchor="ctr">
+                    <a:solidFill>
+                      <a:srgbClr val="F2F4F7"/>
+                    </a:solidFill>
+                  </a:tcPr>
+                </a:tc>
+                <a:tc>
+                  <a:txBody>
+                    <a:bodyPr wrap="square"/>
+                    <a:lstStyle/>
+                    <a:p>
+                      <a:pPr algn="l">
+                        <a:lnSpc>
+                          <a:spcPct val="98000"/>
+                        </a:lnSpc>
+                      </a:pPr>
+                      <a:r>
+                        <a:rPr sz="860" b="0">
                           <a:solidFill>
                             <a:srgbClr val="252A31"/>
                           </a:solidFill>
@@ -6430,7 +6728,7 @@
                         </a:lnSpc>
                       </a:pPr>
                       <a:r>
-                        <a:rPr sz="919" b="0">
+                        <a:rPr sz="860" b="0">
                           <a:solidFill>
                             <a:srgbClr val="252A31"/>
                           </a:solidFill>
@@ -6459,7 +6757,7 @@
                         </a:lnSpc>
                       </a:pPr>
                       <a:r>
-                        <a:rPr sz="1050" b="1">
+                        <a:rPr sz="1000" b="1">
                           <a:solidFill>
                             <a:srgbClr val="1F385C"/>
                           </a:solidFill>
@@ -6486,7 +6784,7 @@
                         </a:lnSpc>
                       </a:pPr>
                       <a:r>
-                        <a:rPr sz="1050" b="1">
+                        <a:rPr sz="1000" b="1">
                           <a:solidFill>
                             <a:srgbClr val="2E8B9E"/>
                           </a:solidFill>
@@ -6540,7 +6838,34 @@
                         </a:lnSpc>
                       </a:pPr>
                       <a:r>
-                        <a:rPr sz="919" b="0">
+                        <a:rPr sz="860" b="1">
+                          <a:solidFill>
+                            <a:srgbClr val="252A31"/>
+                          </a:solidFill>
+                          <a:latin typeface="Meiryo"/>
+                        </a:rPr>
+                        <a:t>稟議書チェックエージェント／社内LAN問い合わせチャットボット</a:t>
+                      </a:r>
+                    </a:p>
+                  </a:txBody>
+                  <a:tcPr marL="63500" marR="63500" marT="25400" marB="25400" anchor="ctr">
+                    <a:solidFill>
+                      <a:srgbClr val="FFFFFF"/>
+                    </a:solidFill>
+                  </a:tcPr>
+                </a:tc>
+                <a:tc>
+                  <a:txBody>
+                    <a:bodyPr wrap="square"/>
+                    <a:lstStyle/>
+                    <a:p>
+                      <a:pPr algn="l">
+                        <a:lnSpc>
+                          <a:spcPct val="98000"/>
+                        </a:lnSpc>
+                      </a:pPr>
+                      <a:r>
+                        <a:rPr sz="860" b="0">
                           <a:solidFill>
                             <a:srgbClr val="252A31"/>
                           </a:solidFill>
@@ -6567,7 +6892,7 @@
                         </a:lnSpc>
                       </a:pPr>
                       <a:r>
-                        <a:rPr sz="919" b="0">
+                        <a:rPr sz="860" b="0">
                           <a:solidFill>
                             <a:srgbClr val="252A31"/>
                           </a:solidFill>
@@ -6596,8 +6921,8 @@
         </p:nvSpPr>
         <p:spPr>
           <a:xfrm>
-            <a:off x="2203704" y="2409444"/>
-            <a:ext cx="256032" cy="155448"/>
+            <a:off x="1874520" y="2414016"/>
+            <a:ext cx="219456" cy="146304"/>
           </a:xfrm>
           <a:prstGeom prst="chevron">
             <a:avLst/>
@@ -6640,8 +6965,8 @@
         </p:nvSpPr>
         <p:spPr>
           <a:xfrm>
-            <a:off x="2427732" y="2409444"/>
-            <a:ext cx="256032" cy="155448"/>
+            <a:off x="2066544" y="2414016"/>
+            <a:ext cx="219456" cy="146304"/>
           </a:xfrm>
           <a:prstGeom prst="chevron">
             <a:avLst/>
@@ -6684,8 +7009,8 @@
         </p:nvSpPr>
         <p:spPr>
           <a:xfrm>
-            <a:off x="2651760" y="2409444"/>
-            <a:ext cx="256032" cy="155448"/>
+            <a:off x="2258568" y="2414016"/>
+            <a:ext cx="219456" cy="146304"/>
           </a:xfrm>
           <a:prstGeom prst="chevron">
             <a:avLst/>
@@ -6728,8 +7053,8 @@
         </p:nvSpPr>
         <p:spPr>
           <a:xfrm>
-            <a:off x="2875788" y="2409444"/>
-            <a:ext cx="256032" cy="155448"/>
+            <a:off x="2450592" y="2414016"/>
+            <a:ext cx="219456" cy="146304"/>
           </a:xfrm>
           <a:prstGeom prst="chevron">
             <a:avLst/>
@@ -6772,8 +7097,8 @@
         </p:nvSpPr>
         <p:spPr>
           <a:xfrm>
-            <a:off x="3099816" y="2409444"/>
-            <a:ext cx="256032" cy="155448"/>
+            <a:off x="2642616" y="2414016"/>
+            <a:ext cx="219456" cy="146304"/>
           </a:xfrm>
           <a:prstGeom prst="chevron">
             <a:avLst/>
@@ -6816,8 +7141,8 @@
         </p:nvSpPr>
         <p:spPr>
           <a:xfrm>
-            <a:off x="3351276" y="2386584"/>
-            <a:ext cx="502920" cy="219456"/>
+            <a:off x="2862072" y="2386584"/>
+            <a:ext cx="457200" cy="219456"/>
           </a:xfrm>
           <a:prstGeom prst="rect">
             <a:avLst/>
@@ -6836,7 +7161,7 @@
               </a:lnSpc>
             </a:pPr>
             <a:r>
-              <a:rPr sz="900" b="1" i="0">
+              <a:rPr sz="850" b="1" i="0">
                 <a:solidFill>
                   <a:srgbClr val="C98A1B"/>
                 </a:solidFill>
@@ -6855,8 +7180,8 @@
         </p:nvSpPr>
         <p:spPr>
           <a:xfrm>
-            <a:off x="2203704" y="2775204"/>
-            <a:ext cx="256032" cy="155448"/>
+            <a:off x="1874520" y="2779776"/>
+            <a:ext cx="219456" cy="146304"/>
           </a:xfrm>
           <a:prstGeom prst="chevron">
             <a:avLst/>
@@ -6899,8 +7224,8 @@
         </p:nvSpPr>
         <p:spPr>
           <a:xfrm>
-            <a:off x="2427732" y="2775204"/>
-            <a:ext cx="256032" cy="155448"/>
+            <a:off x="2066544" y="2779776"/>
+            <a:ext cx="219456" cy="146304"/>
           </a:xfrm>
           <a:prstGeom prst="chevron">
             <a:avLst/>
@@ -6943,8 +7268,8 @@
         </p:nvSpPr>
         <p:spPr>
           <a:xfrm>
-            <a:off x="2651760" y="2775204"/>
-            <a:ext cx="256032" cy="155448"/>
+            <a:off x="2258568" y="2779776"/>
+            <a:ext cx="219456" cy="146304"/>
           </a:xfrm>
           <a:prstGeom prst="chevron">
             <a:avLst/>
@@ -6987,8 +7312,8 @@
         </p:nvSpPr>
         <p:spPr>
           <a:xfrm>
-            <a:off x="2875788" y="2775204"/>
-            <a:ext cx="256032" cy="155448"/>
+            <a:off x="2450592" y="2779776"/>
+            <a:ext cx="219456" cy="146304"/>
           </a:xfrm>
           <a:prstGeom prst="chevron">
             <a:avLst/>
@@ -7031,8 +7356,8 @@
         </p:nvSpPr>
         <p:spPr>
           <a:xfrm>
-            <a:off x="3099816" y="2775204"/>
-            <a:ext cx="256032" cy="155448"/>
+            <a:off x="2642616" y="2779776"/>
+            <a:ext cx="219456" cy="146304"/>
           </a:xfrm>
           <a:prstGeom prst="chevron">
             <a:avLst/>
@@ -7075,8 +7400,8 @@
         </p:nvSpPr>
         <p:spPr>
           <a:xfrm>
-            <a:off x="3351276" y="2752344"/>
-            <a:ext cx="502920" cy="219456"/>
+            <a:off x="2862072" y="2752344"/>
+            <a:ext cx="457200" cy="219456"/>
           </a:xfrm>
           <a:prstGeom prst="rect">
             <a:avLst/>
@@ -7095,7 +7420,7 @@
               </a:lnSpc>
             </a:pPr>
             <a:r>
-              <a:rPr sz="900" b="1" i="0">
+              <a:rPr sz="850" b="1" i="0">
                 <a:solidFill>
                   <a:srgbClr val="2E8B9E"/>
                 </a:solidFill>
@@ -7114,8 +7439,8 @@
         </p:nvSpPr>
         <p:spPr>
           <a:xfrm>
-            <a:off x="2203704" y="3140964"/>
-            <a:ext cx="256032" cy="155448"/>
+            <a:off x="1874520" y="3145536"/>
+            <a:ext cx="219456" cy="146304"/>
           </a:xfrm>
           <a:prstGeom prst="chevron">
             <a:avLst/>
@@ -7158,8 +7483,8 @@
         </p:nvSpPr>
         <p:spPr>
           <a:xfrm>
-            <a:off x="2427732" y="3140964"/>
-            <a:ext cx="256032" cy="155448"/>
+            <a:off x="2066544" y="3145536"/>
+            <a:ext cx="219456" cy="146304"/>
           </a:xfrm>
           <a:prstGeom prst="chevron">
             <a:avLst/>
@@ -7202,8 +7527,8 @@
         </p:nvSpPr>
         <p:spPr>
           <a:xfrm>
-            <a:off x="2651760" y="3140964"/>
-            <a:ext cx="256032" cy="155448"/>
+            <a:off x="2258568" y="3145536"/>
+            <a:ext cx="219456" cy="146304"/>
           </a:xfrm>
           <a:prstGeom prst="chevron">
             <a:avLst/>
@@ -7246,8 +7571,8 @@
         </p:nvSpPr>
         <p:spPr>
           <a:xfrm>
-            <a:off x="2875788" y="3140964"/>
-            <a:ext cx="256032" cy="155448"/>
+            <a:off x="2450592" y="3145536"/>
+            <a:ext cx="219456" cy="146304"/>
           </a:xfrm>
           <a:prstGeom prst="chevron">
             <a:avLst/>
@@ -7290,8 +7615,8 @@
         </p:nvSpPr>
         <p:spPr>
           <a:xfrm>
-            <a:off x="3099816" y="3140964"/>
-            <a:ext cx="256032" cy="155448"/>
+            <a:off x="2642616" y="3145536"/>
+            <a:ext cx="219456" cy="146304"/>
           </a:xfrm>
           <a:prstGeom prst="chevron">
             <a:avLst/>
@@ -7334,8 +7659,8 @@
         </p:nvSpPr>
         <p:spPr>
           <a:xfrm>
-            <a:off x="3351276" y="3118104"/>
-            <a:ext cx="502920" cy="219456"/>
+            <a:off x="2862072" y="3118104"/>
+            <a:ext cx="457200" cy="219456"/>
           </a:xfrm>
           <a:prstGeom prst="rect">
             <a:avLst/>
@@ -7354,7 +7679,7 @@
               </a:lnSpc>
             </a:pPr>
             <a:r>
-              <a:rPr sz="900" b="1" i="0">
+              <a:rPr sz="850" b="1" i="0">
                 <a:solidFill>
                   <a:srgbClr val="2E8B9E"/>
                 </a:solidFill>
@@ -7373,8 +7698,8 @@
         </p:nvSpPr>
         <p:spPr>
           <a:xfrm>
-            <a:off x="2203704" y="3506724"/>
-            <a:ext cx="256032" cy="155448"/>
+            <a:off x="1874520" y="3511296"/>
+            <a:ext cx="219456" cy="146304"/>
           </a:xfrm>
           <a:prstGeom prst="chevron">
             <a:avLst/>
@@ -7417,8 +7742,8 @@
         </p:nvSpPr>
         <p:spPr>
           <a:xfrm>
-            <a:off x="2427732" y="3506724"/>
-            <a:ext cx="256032" cy="155448"/>
+            <a:off x="2066544" y="3511296"/>
+            <a:ext cx="219456" cy="146304"/>
           </a:xfrm>
           <a:prstGeom prst="chevron">
             <a:avLst/>
@@ -7461,8 +7786,8 @@
         </p:nvSpPr>
         <p:spPr>
           <a:xfrm>
-            <a:off x="2651760" y="3506724"/>
-            <a:ext cx="256032" cy="155448"/>
+            <a:off x="2258568" y="3511296"/>
+            <a:ext cx="219456" cy="146304"/>
           </a:xfrm>
           <a:prstGeom prst="chevron">
             <a:avLst/>
@@ -7505,8 +7830,8 @@
         </p:nvSpPr>
         <p:spPr>
           <a:xfrm>
-            <a:off x="2875788" y="3506724"/>
-            <a:ext cx="256032" cy="155448"/>
+            <a:off x="2450592" y="3511296"/>
+            <a:ext cx="219456" cy="146304"/>
           </a:xfrm>
           <a:prstGeom prst="chevron">
             <a:avLst/>
@@ -7549,8 +7874,8 @@
         </p:nvSpPr>
         <p:spPr>
           <a:xfrm>
-            <a:off x="3099816" y="3506724"/>
-            <a:ext cx="256032" cy="155448"/>
+            <a:off x="2642616" y="3511296"/>
+            <a:ext cx="219456" cy="146304"/>
           </a:xfrm>
           <a:prstGeom prst="chevron">
             <a:avLst/>
@@ -7593,8 +7918,8 @@
         </p:nvSpPr>
         <p:spPr>
           <a:xfrm>
-            <a:off x="3351276" y="3483864"/>
-            <a:ext cx="502920" cy="219456"/>
+            <a:off x="2862072" y="3483864"/>
+            <a:ext cx="457200" cy="219456"/>
           </a:xfrm>
           <a:prstGeom prst="rect">
             <a:avLst/>
@@ -7613,7 +7938,7 @@
               </a:lnSpc>
             </a:pPr>
             <a:r>
-              <a:rPr sz="900" b="1" i="0">
+              <a:rPr sz="850" b="1" i="0">
                 <a:solidFill>
                   <a:srgbClr val="2E8B9E"/>
                 </a:solidFill>
@@ -7632,8 +7957,8 @@
         </p:nvSpPr>
         <p:spPr>
           <a:xfrm>
-            <a:off x="2203704" y="3872484"/>
-            <a:ext cx="256032" cy="155448"/>
+            <a:off x="1874520" y="3877056"/>
+            <a:ext cx="219456" cy="146304"/>
           </a:xfrm>
           <a:prstGeom prst="chevron">
             <a:avLst/>
@@ -7676,8 +8001,8 @@
         </p:nvSpPr>
         <p:spPr>
           <a:xfrm>
-            <a:off x="2427732" y="3872484"/>
-            <a:ext cx="256032" cy="155448"/>
+            <a:off x="2066544" y="3877056"/>
+            <a:ext cx="219456" cy="146304"/>
           </a:xfrm>
           <a:prstGeom prst="chevron">
             <a:avLst/>
@@ -7720,8 +8045,8 @@
         </p:nvSpPr>
         <p:spPr>
           <a:xfrm>
-            <a:off x="2651760" y="3872484"/>
-            <a:ext cx="256032" cy="155448"/>
+            <a:off x="2258568" y="3877056"/>
+            <a:ext cx="219456" cy="146304"/>
           </a:xfrm>
           <a:prstGeom prst="chevron">
             <a:avLst/>
@@ -7764,8 +8089,8 @@
         </p:nvSpPr>
         <p:spPr>
           <a:xfrm>
-            <a:off x="2875788" y="3872484"/>
-            <a:ext cx="256032" cy="155448"/>
+            <a:off x="2450592" y="3877056"/>
+            <a:ext cx="219456" cy="146304"/>
           </a:xfrm>
           <a:prstGeom prst="chevron">
             <a:avLst/>
@@ -7808,8 +8133,8 @@
         </p:nvSpPr>
         <p:spPr>
           <a:xfrm>
-            <a:off x="3099816" y="3872484"/>
-            <a:ext cx="256032" cy="155448"/>
+            <a:off x="2642616" y="3877056"/>
+            <a:ext cx="219456" cy="146304"/>
           </a:xfrm>
           <a:prstGeom prst="chevron">
             <a:avLst/>
@@ -7852,8 +8177,8 @@
         </p:nvSpPr>
         <p:spPr>
           <a:xfrm>
-            <a:off x="3351276" y="3849624"/>
-            <a:ext cx="502920" cy="219456"/>
+            <a:off x="2862072" y="3849624"/>
+            <a:ext cx="457200" cy="219456"/>
           </a:xfrm>
           <a:prstGeom prst="rect">
             <a:avLst/>
@@ -7872,7 +8197,7 @@
               </a:lnSpc>
             </a:pPr>
             <a:r>
-              <a:rPr sz="900" b="1" i="0">
+              <a:rPr sz="850" b="1" i="0">
                 <a:solidFill>
                   <a:srgbClr val="2E8B9E"/>
                 </a:solidFill>
@@ -7891,8 +8216,8 @@
         </p:nvSpPr>
         <p:spPr>
           <a:xfrm>
-            <a:off x="2203704" y="4238244"/>
-            <a:ext cx="256032" cy="155448"/>
+            <a:off x="1874520" y="4242816"/>
+            <a:ext cx="219456" cy="146304"/>
           </a:xfrm>
           <a:prstGeom prst="chevron">
             <a:avLst/>
@@ -7935,8 +8260,8 @@
         </p:nvSpPr>
         <p:spPr>
           <a:xfrm>
-            <a:off x="2427732" y="4238244"/>
-            <a:ext cx="256032" cy="155448"/>
+            <a:off x="2066544" y="4242816"/>
+            <a:ext cx="219456" cy="146304"/>
           </a:xfrm>
           <a:prstGeom prst="chevron">
             <a:avLst/>
@@ -7979,8 +8304,8 @@
         </p:nvSpPr>
         <p:spPr>
           <a:xfrm>
-            <a:off x="2651760" y="4238244"/>
-            <a:ext cx="256032" cy="155448"/>
+            <a:off x="2258568" y="4242816"/>
+            <a:ext cx="219456" cy="146304"/>
           </a:xfrm>
           <a:prstGeom prst="chevron">
             <a:avLst/>
@@ -8023,8 +8348,8 @@
         </p:nvSpPr>
         <p:spPr>
           <a:xfrm>
-            <a:off x="2875788" y="4238244"/>
-            <a:ext cx="256032" cy="155448"/>
+            <a:off x="2450592" y="4242816"/>
+            <a:ext cx="219456" cy="146304"/>
           </a:xfrm>
           <a:prstGeom prst="chevron">
             <a:avLst/>
@@ -8067,8 +8392,8 @@
         </p:nvSpPr>
         <p:spPr>
           <a:xfrm>
-            <a:off x="3099816" y="4238244"/>
-            <a:ext cx="256032" cy="155448"/>
+            <a:off x="2642616" y="4242816"/>
+            <a:ext cx="219456" cy="146304"/>
           </a:xfrm>
           <a:prstGeom prst="chevron">
             <a:avLst/>
@@ -8111,8 +8436,8 @@
         </p:nvSpPr>
         <p:spPr>
           <a:xfrm>
-            <a:off x="3351276" y="4215384"/>
-            <a:ext cx="502920" cy="219456"/>
+            <a:off x="2862072" y="4215384"/>
+            <a:ext cx="457200" cy="219456"/>
           </a:xfrm>
           <a:prstGeom prst="rect">
             <a:avLst/>
@@ -8131,7 +8456,7 @@
               </a:lnSpc>
             </a:pPr>
             <a:r>
-              <a:rPr sz="900" b="1" i="0">
+              <a:rPr sz="850" b="1" i="0">
                 <a:solidFill>
                   <a:srgbClr val="2E8B9E"/>
                 </a:solidFill>
@@ -8150,8 +8475,8 @@
         </p:nvSpPr>
         <p:spPr>
           <a:xfrm>
-            <a:off x="2203704" y="4604004"/>
-            <a:ext cx="256032" cy="155448"/>
+            <a:off x="1874520" y="4608576"/>
+            <a:ext cx="219456" cy="146304"/>
           </a:xfrm>
           <a:prstGeom prst="chevron">
             <a:avLst/>
@@ -8194,8 +8519,8 @@
         </p:nvSpPr>
         <p:spPr>
           <a:xfrm>
-            <a:off x="2427732" y="4604004"/>
-            <a:ext cx="256032" cy="155448"/>
+            <a:off x="2066544" y="4608576"/>
+            <a:ext cx="219456" cy="146304"/>
           </a:xfrm>
           <a:prstGeom prst="chevron">
             <a:avLst/>
@@ -8238,8 +8563,8 @@
         </p:nvSpPr>
         <p:spPr>
           <a:xfrm>
-            <a:off x="2651760" y="4604004"/>
-            <a:ext cx="256032" cy="155448"/>
+            <a:off x="2258568" y="4608576"/>
+            <a:ext cx="219456" cy="146304"/>
           </a:xfrm>
           <a:prstGeom prst="chevron">
             <a:avLst/>
@@ -8282,8 +8607,8 @@
         </p:nvSpPr>
         <p:spPr>
           <a:xfrm>
-            <a:off x="2875788" y="4604004"/>
-            <a:ext cx="256032" cy="155448"/>
+            <a:off x="2450592" y="4608576"/>
+            <a:ext cx="219456" cy="146304"/>
           </a:xfrm>
           <a:prstGeom prst="chevron">
             <a:avLst/>
@@ -8326,8 +8651,8 @@
         </p:nvSpPr>
         <p:spPr>
           <a:xfrm>
-            <a:off x="3099816" y="4604004"/>
-            <a:ext cx="256032" cy="155448"/>
+            <a:off x="2642616" y="4608576"/>
+            <a:ext cx="219456" cy="146304"/>
           </a:xfrm>
           <a:prstGeom prst="chevron">
             <a:avLst/>
@@ -8370,8 +8695,8 @@
         </p:nvSpPr>
         <p:spPr>
           <a:xfrm>
-            <a:off x="3351276" y="4581144"/>
-            <a:ext cx="502920" cy="219456"/>
+            <a:off x="2862072" y="4581144"/>
+            <a:ext cx="457200" cy="219456"/>
           </a:xfrm>
           <a:prstGeom prst="rect">
             <a:avLst/>
@@ -8390,7 +8715,7 @@
               </a:lnSpc>
             </a:pPr>
             <a:r>
-              <a:rPr sz="900" b="1" i="0">
+              <a:rPr sz="850" b="1" i="0">
                 <a:solidFill>
                   <a:srgbClr val="3F8F5B"/>
                 </a:solidFill>
@@ -8409,8 +8734,8 @@
         </p:nvSpPr>
         <p:spPr>
           <a:xfrm>
-            <a:off x="2203704" y="4969764"/>
-            <a:ext cx="256032" cy="155448"/>
+            <a:off x="1874520" y="4974336"/>
+            <a:ext cx="219456" cy="146304"/>
           </a:xfrm>
           <a:prstGeom prst="chevron">
             <a:avLst/>
@@ -8453,8 +8778,8 @@
         </p:nvSpPr>
         <p:spPr>
           <a:xfrm>
-            <a:off x="2427732" y="4969764"/>
-            <a:ext cx="256032" cy="155448"/>
+            <a:off x="2066544" y="4974336"/>
+            <a:ext cx="219456" cy="146304"/>
           </a:xfrm>
           <a:prstGeom prst="chevron">
             <a:avLst/>
@@ -8497,8 +8822,8 @@
         </p:nvSpPr>
         <p:spPr>
           <a:xfrm>
-            <a:off x="2651760" y="4969764"/>
-            <a:ext cx="256032" cy="155448"/>
+            <a:off x="2258568" y="4974336"/>
+            <a:ext cx="219456" cy="146304"/>
           </a:xfrm>
           <a:prstGeom prst="chevron">
             <a:avLst/>
@@ -8541,8 +8866,8 @@
         </p:nvSpPr>
         <p:spPr>
           <a:xfrm>
-            <a:off x="2875788" y="4969764"/>
-            <a:ext cx="256032" cy="155448"/>
+            <a:off x="2450592" y="4974336"/>
+            <a:ext cx="219456" cy="146304"/>
           </a:xfrm>
           <a:prstGeom prst="chevron">
             <a:avLst/>
@@ -8585,8 +8910,8 @@
         </p:nvSpPr>
         <p:spPr>
           <a:xfrm>
-            <a:off x="3099816" y="4969764"/>
-            <a:ext cx="256032" cy="155448"/>
+            <a:off x="2642616" y="4974336"/>
+            <a:ext cx="219456" cy="146304"/>
           </a:xfrm>
           <a:prstGeom prst="chevron">
             <a:avLst/>
@@ -8629,8 +8954,8 @@
         </p:nvSpPr>
         <p:spPr>
           <a:xfrm>
-            <a:off x="3351276" y="4946904"/>
-            <a:ext cx="502920" cy="219456"/>
+            <a:off x="2862072" y="4946904"/>
+            <a:ext cx="457200" cy="219456"/>
           </a:xfrm>
           <a:prstGeom prst="rect">
             <a:avLst/>
@@ -8649,7 +8974,7 @@
               </a:lnSpc>
             </a:pPr>
             <a:r>
-              <a:rPr sz="900" b="1" i="0">
+              <a:rPr sz="850" b="1" i="0">
                 <a:solidFill>
                   <a:srgbClr val="C98A1B"/>
                 </a:solidFill>
@@ -8668,8 +8993,8 @@
         </p:nvSpPr>
         <p:spPr>
           <a:xfrm>
-            <a:off x="2203704" y="5335524"/>
-            <a:ext cx="256032" cy="155448"/>
+            <a:off x="1874520" y="5340096"/>
+            <a:ext cx="219456" cy="146304"/>
           </a:xfrm>
           <a:prstGeom prst="chevron">
             <a:avLst/>
@@ -8712,8 +9037,8 @@
         </p:nvSpPr>
         <p:spPr>
           <a:xfrm>
-            <a:off x="2427732" y="5335524"/>
-            <a:ext cx="256032" cy="155448"/>
+            <a:off x="2066544" y="5340096"/>
+            <a:ext cx="219456" cy="146304"/>
           </a:xfrm>
           <a:prstGeom prst="chevron">
             <a:avLst/>
@@ -8756,8 +9081,8 @@
         </p:nvSpPr>
         <p:spPr>
           <a:xfrm>
-            <a:off x="2651760" y="5335524"/>
-            <a:ext cx="256032" cy="155448"/>
+            <a:off x="2258568" y="5340096"/>
+            <a:ext cx="219456" cy="146304"/>
           </a:xfrm>
           <a:prstGeom prst="chevron">
             <a:avLst/>
@@ -8800,8 +9125,8 @@
         </p:nvSpPr>
         <p:spPr>
           <a:xfrm>
-            <a:off x="2875788" y="5335524"/>
-            <a:ext cx="256032" cy="155448"/>
+            <a:off x="2450592" y="5340096"/>
+            <a:ext cx="219456" cy="146304"/>
           </a:xfrm>
           <a:prstGeom prst="chevron">
             <a:avLst/>
@@ -8844,8 +9169,8 @@
         </p:nvSpPr>
         <p:spPr>
           <a:xfrm>
-            <a:off x="3099816" y="5335524"/>
-            <a:ext cx="256032" cy="155448"/>
+            <a:off x="2642616" y="5340096"/>
+            <a:ext cx="219456" cy="146304"/>
           </a:xfrm>
           <a:prstGeom prst="chevron">
             <a:avLst/>
@@ -8888,8 +9213,8 @@
         </p:nvSpPr>
         <p:spPr>
           <a:xfrm>
-            <a:off x="3351276" y="5312664"/>
-            <a:ext cx="502920" cy="219456"/>
+            <a:off x="2862072" y="5312664"/>
+            <a:ext cx="457200" cy="219456"/>
           </a:xfrm>
           <a:prstGeom prst="rect">
             <a:avLst/>
@@ -8908,7 +9233,7 @@
               </a:lnSpc>
             </a:pPr>
             <a:r>
-              <a:rPr sz="900" b="1" i="0">
+              <a:rPr sz="850" b="1" i="0">
                 <a:solidFill>
                   <a:srgbClr val="C98A1B"/>
                 </a:solidFill>
@@ -8927,8 +9252,8 @@
         </p:nvSpPr>
         <p:spPr>
           <a:xfrm>
-            <a:off x="2203704" y="5701284"/>
-            <a:ext cx="256032" cy="155448"/>
+            <a:off x="1874520" y="5705856"/>
+            <a:ext cx="219456" cy="146304"/>
           </a:xfrm>
           <a:prstGeom prst="chevron">
             <a:avLst/>
@@ -8971,8 +9296,8 @@
         </p:nvSpPr>
         <p:spPr>
           <a:xfrm>
-            <a:off x="2427732" y="5701284"/>
-            <a:ext cx="256032" cy="155448"/>
+            <a:off x="2066544" y="5705856"/>
+            <a:ext cx="219456" cy="146304"/>
           </a:xfrm>
           <a:prstGeom prst="chevron">
             <a:avLst/>
@@ -9015,8 +9340,8 @@
         </p:nvSpPr>
         <p:spPr>
           <a:xfrm>
-            <a:off x="2651760" y="5701284"/>
-            <a:ext cx="256032" cy="155448"/>
+            <a:off x="2258568" y="5705856"/>
+            <a:ext cx="219456" cy="146304"/>
           </a:xfrm>
           <a:prstGeom prst="chevron">
             <a:avLst/>
@@ -9059,8 +9384,8 @@
         </p:nvSpPr>
         <p:spPr>
           <a:xfrm>
-            <a:off x="2875788" y="5701284"/>
-            <a:ext cx="256032" cy="155448"/>
+            <a:off x="2450592" y="5705856"/>
+            <a:ext cx="219456" cy="146304"/>
           </a:xfrm>
           <a:prstGeom prst="chevron">
             <a:avLst/>
@@ -9103,8 +9428,8 @@
         </p:nvSpPr>
         <p:spPr>
           <a:xfrm>
-            <a:off x="3099816" y="5701284"/>
-            <a:ext cx="256032" cy="155448"/>
+            <a:off x="2642616" y="5705856"/>
+            <a:ext cx="219456" cy="146304"/>
           </a:xfrm>
           <a:prstGeom prst="chevron">
             <a:avLst/>
@@ -9147,8 +9472,8 @@
         </p:nvSpPr>
         <p:spPr>
           <a:xfrm>
-            <a:off x="3351276" y="5678424"/>
-            <a:ext cx="502920" cy="219456"/>
+            <a:off x="2862072" y="5678424"/>
+            <a:ext cx="457200" cy="219456"/>
           </a:xfrm>
           <a:prstGeom prst="rect">
             <a:avLst/>
@@ -9167,7 +9492,7 @@
               </a:lnSpc>
             </a:pPr>
             <a:r>
-              <a:rPr sz="900" b="1" i="0">
+              <a:rPr sz="850" b="1" i="0">
                 <a:solidFill>
                   <a:srgbClr val="2E8B9E"/>
                 </a:solidFill>
@@ -9186,8 +9511,8 @@
         </p:nvSpPr>
         <p:spPr>
           <a:xfrm>
-            <a:off x="2203704" y="6067044"/>
-            <a:ext cx="256032" cy="155448"/>
+            <a:off x="1874520" y="6071616"/>
+            <a:ext cx="219456" cy="146304"/>
           </a:xfrm>
           <a:prstGeom prst="chevron">
             <a:avLst/>
@@ -9230,8 +9555,8 @@
         </p:nvSpPr>
         <p:spPr>
           <a:xfrm>
-            <a:off x="2427732" y="6067044"/>
-            <a:ext cx="256032" cy="155448"/>
+            <a:off x="2066544" y="6071616"/>
+            <a:ext cx="219456" cy="146304"/>
           </a:xfrm>
           <a:prstGeom prst="chevron">
             <a:avLst/>
@@ -9274,8 +9599,8 @@
         </p:nvSpPr>
         <p:spPr>
           <a:xfrm>
-            <a:off x="2651760" y="6067044"/>
-            <a:ext cx="256032" cy="155448"/>
+            <a:off x="2258568" y="6071616"/>
+            <a:ext cx="219456" cy="146304"/>
           </a:xfrm>
           <a:prstGeom prst="chevron">
             <a:avLst/>
@@ -9318,8 +9643,8 @@
         </p:nvSpPr>
         <p:spPr>
           <a:xfrm>
-            <a:off x="2875788" y="6067044"/>
-            <a:ext cx="256032" cy="155448"/>
+            <a:off x="2450592" y="6071616"/>
+            <a:ext cx="219456" cy="146304"/>
           </a:xfrm>
           <a:prstGeom prst="chevron">
             <a:avLst/>
@@ -9362,8 +9687,8 @@
         </p:nvSpPr>
         <p:spPr>
           <a:xfrm>
-            <a:off x="3099816" y="6067044"/>
-            <a:ext cx="256032" cy="155448"/>
+            <a:off x="2642616" y="6071616"/>
+            <a:ext cx="219456" cy="146304"/>
           </a:xfrm>
           <a:prstGeom prst="chevron">
             <a:avLst/>
@@ -9406,8 +9731,8 @@
         </p:nvSpPr>
         <p:spPr>
           <a:xfrm>
-            <a:off x="3351276" y="6044184"/>
-            <a:ext cx="502920" cy="219456"/>
+            <a:off x="2862072" y="6044184"/>
+            <a:ext cx="457200" cy="219456"/>
           </a:xfrm>
           <a:prstGeom prst="rect">
             <a:avLst/>
@@ -9426,7 +9751,7 @@
               </a:lnSpc>
             </a:pPr>
             <a:r>
-              <a:rPr sz="900" b="1" i="0">
+              <a:rPr sz="850" b="1" i="0">
                 <a:solidFill>
                   <a:srgbClr val="C98A1B"/>
                 </a:solidFill>

--- a/reports/CopilotStudio_ハッカソン_事前相談会報告.pptx
+++ b/reports/CopilotStudio_ハッカソン_事前相談会報告.pptx
@@ -5198,13 +5198,13 @@
                         </a:lnSpc>
                       </a:pPr>
                       <a:r>
-                        <a:rPr sz="860" b="0">
+                        <a:rPr sz="860" b="1">
                           <a:solidFill>
-                            <a:srgbClr val="9A772E"/>
+                            <a:srgbClr val="252A31"/>
                           </a:solidFill>
                           <a:latin typeface="Meiryo"/>
                         </a:rPr>
-                        <a:t>（2案：内容を要確認）</a:t>
+                        <a:t>加盟店提出様式自動チェック／課題対応の仕様検討・タスク出し支援</a:t>
                       </a:r>
                     </a:p>
                   </a:txBody>
@@ -5368,7 +5368,7 @@
                           </a:solidFill>
                           <a:latin typeface="Meiryo"/>
                         </a:rPr>
-                        <a:t>加盟店問い合わせ対応支援エージェント</a:t>
+                        <a:t>加盟店問い合わせ対応支援</a:t>
                       </a:r>
                     </a:p>
                   </a:txBody>
@@ -5526,13 +5526,13 @@
                         </a:lnSpc>
                       </a:pPr>
                       <a:r>
-                        <a:rPr sz="860" b="0">
+                        <a:rPr sz="860" b="1">
                           <a:solidFill>
-                            <a:srgbClr val="9A772E"/>
+                            <a:srgbClr val="252A31"/>
                           </a:solidFill>
                           <a:latin typeface="Meiryo"/>
                         </a:rPr>
-                        <a:t>（内容を要確認）</a:t>
+                        <a:t>加盟店防衛マネジメント支援</a:t>
                       </a:r>
                     </a:p>
                   </a:txBody>
@@ -5690,13 +5690,13 @@
                         </a:lnSpc>
                       </a:pPr>
                       <a:r>
-                        <a:rPr sz="860" b="0">
+                        <a:rPr sz="860" b="1">
                           <a:solidFill>
-                            <a:srgbClr val="9A772E"/>
+                            <a:srgbClr val="252A31"/>
                           </a:solidFill>
                           <a:latin typeface="Meiryo"/>
                         </a:rPr>
-                        <a:t>（Salesforce活用案：要確認）</a:t>
+                        <a:t>市場・企業分析エージェント</a:t>
                       </a:r>
                     </a:p>
                   </a:txBody>
@@ -5860,7 +5860,7 @@
                           </a:solidFill>
                           <a:latin typeface="Meiryo"/>
                         </a:rPr>
-                        <a:t>依頼メール処理・ファイル読込エージェント</a:t>
+                        <a:t>依頼メール処理・ファイル読込</a:t>
                       </a:r>
                     </a:p>
                   </a:txBody>
@@ -6018,13 +6018,13 @@
                         </a:lnSpc>
                       </a:pPr>
                       <a:r>
-                        <a:rPr sz="860" b="0">
+                        <a:rPr sz="860" b="1">
                           <a:solidFill>
-                            <a:srgbClr val="9A772E"/>
+                            <a:srgbClr val="252A31"/>
                           </a:solidFill>
                           <a:latin typeface="Meiryo"/>
                         </a:rPr>
-                        <a:t>（内容を要確認）</a:t>
+                        <a:t>PowerPoint資料作成と会議招集自動化</a:t>
                       </a:r>
                     </a:p>
                   </a:txBody>
@@ -6188,7 +6188,7 @@
                           </a:solidFill>
                           <a:latin typeface="Meiryo"/>
                         </a:rPr>
-                        <a:t>入力ファイル自動チェック・修正エージェント</a:t>
+                        <a:t>入力ファイル自動チェック・修正</a:t>
                       </a:r>
                     </a:p>
                   </a:txBody>
@@ -6294,17 +6294,17 @@
                       <a:r>
                         <a:rPr sz="1000" b="1">
                           <a:solidFill>
-                            <a:srgbClr val="2E8B9E"/>
+                            <a:srgbClr val="C98A1B"/>
                           </a:solidFill>
                           <a:latin typeface="Meiryo"/>
                         </a:rPr>
-                        <a:t>2案</a:t>
+                        <a:t>未</a:t>
                       </a:r>
                     </a:p>
                   </a:txBody>
                   <a:tcPr marL="63500" marR="63500" marT="25400" marB="25400" anchor="ctr">
                     <a:solidFill>
-                      <a:srgbClr val="E1F0F2"/>
+                      <a:srgbClr val="FBF0DA"/>
                     </a:solidFill>
                   </a:tcPr>
                 </a:tc>
@@ -6340,19 +6340,19 @@
                     <a:bodyPr wrap="square"/>
                     <a:lstStyle/>
                     <a:p>
-                      <a:pPr algn="l">
+                      <a:pPr algn="ctr">
                         <a:lnSpc>
                           <a:spcPct val="98000"/>
                         </a:lnSpc>
                       </a:pPr>
                       <a:r>
-                        <a:rPr sz="860" b="0">
+                        <a:rPr sz="900" b="0">
                           <a:solidFill>
-                            <a:srgbClr val="9A772E"/>
+                            <a:srgbClr val="A6ADB5"/>
                           </a:solidFill>
                           <a:latin typeface="Meiryo"/>
                         </a:rPr>
-                        <a:t>（2案：内容を要確認）</a:t>
+                        <a:t>ー</a:t>
                       </a:r>
                     </a:p>
                   </a:txBody>
@@ -6504,19 +6504,19 @@
                     <a:bodyPr wrap="square"/>
                     <a:lstStyle/>
                     <a:p>
-                      <a:pPr algn="l">
+                      <a:pPr algn="ctr">
                         <a:lnSpc>
                           <a:spcPct val="98000"/>
                         </a:lnSpc>
                       </a:pPr>
                       <a:r>
-                        <a:rPr sz="860" b="1">
+                        <a:rPr sz="900" b="0">
                           <a:solidFill>
-                            <a:srgbClr val="252A31"/>
+                            <a:srgbClr val="A6ADB5"/>
                           </a:solidFill>
                           <a:latin typeface="Meiryo"/>
                         </a:rPr>
-                        <a:t/>
+                        <a:t>ー</a:t>
                       </a:r>
                     </a:p>
                   </a:txBody>
@@ -6680,7 +6680,7 @@
                           </a:solidFill>
                           <a:latin typeface="Meiryo"/>
                         </a:rPr>
-                        <a:t>対面クライテリア議事録ドラフト生成エージェント</a:t>
+                        <a:t>対面クライテリア議事録ドラフト生成</a:t>
                       </a:r>
                     </a:p>
                   </a:txBody>
@@ -6844,7 +6844,7 @@
                           </a:solidFill>
                           <a:latin typeface="Meiryo"/>
                         </a:rPr>
-                        <a:t>稟議書チェックエージェント／社内LAN問い合わせチャットボット</a:t>
+                        <a:t>稟議書チェック／社内LAN問い合わせチャットボット</a:t>
                       </a:r>
                     </a:p>
                   </a:txBody>
@@ -8785,7 +8785,7 @@
             <a:avLst/>
           </a:prstGeom>
           <a:solidFill>
-            <a:srgbClr val="C98A1B"/>
+            <a:srgbClr val="DDE1E7"/>
           </a:solidFill>
           <a:ln>
             <a:noFill/>
@@ -8980,7 +8980,7 @@
                 </a:solidFill>
                 <a:latin typeface="Meiryo"/>
               </a:rPr>
-              <a:t>Lv2</a:t>
+              <a:t>Lv1</a:t>
             </a:r>
           </a:p>
         </p:txBody>
@@ -11010,7 +11010,7 @@
                           </a:solidFill>
                           <a:latin typeface="Meiryo"/>
                         </a:rPr>
-                        <a:t>1案が未確定、業務への落とし込みや削減効果の定量化が未着手のチームが存在。</a:t>
+                        <a:t>1案が未確定（8・9＝未集約、1・11＝2案）。業務への落とし込みや削減効果の定量化も要着手。</a:t>
                       </a:r>
                     </a:p>
                   </a:txBody>
@@ -11037,7 +11037,7 @@
                           </a:solidFill>
                           <a:latin typeface="Meiryo"/>
                         </a:rPr>
-                        <a:t>9, 6, 1, 11, 8</a:t>
+                        <a:t>8, 9, 1, 11</a:t>
                       </a:r>
                     </a:p>
                   </a:txBody>
@@ -12347,7 +12347,7 @@
                 </a:solidFill>
                 <a:latin typeface="Meiryo"/>
               </a:rPr>
-              <a:t>チーム9は各自の案を持ち寄った段階で、1案への集約が未了（Lv1）。</a:t>
+              <a:t>チーム8・9は1案への集約が未了（Lv1）。特に9は各自案の持ち寄り段階。</a:t>
             </a:r>
           </a:p>
         </p:txBody>
@@ -12430,7 +12430,7 @@
                 </a:solidFill>
                 <a:latin typeface="Meiryo"/>
               </a:rPr>
-              <a:t>チーム1・8・11は2案から1案への選定が必要な段階（Lv2）。</a:t>
+              <a:t>チーム1・11は2案から1案への選定が必要な段階（Lv2）。</a:t>
             </a:r>
           </a:p>
         </p:txBody>
@@ -12890,6 +12890,305 @@
                 <a:latin typeface="Meiryo"/>
               </a:rPr>
               <a:t>7/17提出→8〜9月構築→10月発表に向け、差の縮小を伴走支援する。</a:t>
+            </a:r>
+          </a:p>
+        </p:txBody>
+      </p:sp>
+      <p:sp>
+        <p:nvSpPr>
+          <p:cNvPr id="41" name="TextBox 40"/>
+          <p:cNvSpPr txBox="1"/>
+          <p:nvPr/>
+        </p:nvSpPr>
+        <p:spPr>
+          <a:xfrm>
+            <a:off x="502920" y="5650992"/>
+            <a:ext cx="5486400" cy="274320"/>
+          </a:xfrm>
+          <a:prstGeom prst="rect">
+            <a:avLst/>
+          </a:prstGeom>
+          <a:noFill/>
+        </p:spPr>
+        <p:txBody>
+          <a:bodyPr wrap="square" anchor="t" lIns="25400" rIns="25400" tIns="12700" bIns="12700">
+            <a:spAutoFit/>
+          </a:bodyPr>
+          <a:lstStyle/>
+          <a:p>
+            <a:pPr algn="l">
+              <a:lnSpc>
+                <a:spcPct val="100000"/>
+              </a:lnSpc>
+            </a:pPr>
+            <a:r>
+              <a:rPr sz="1200" b="1" i="0">
+                <a:solidFill>
+                  <a:srgbClr val="1F385C"/>
+                </a:solidFill>
+                <a:latin typeface="Meiryo"/>
+              </a:rPr>
+              <a:t>全体スケジュール</a:t>
+            </a:r>
+          </a:p>
+        </p:txBody>
+      </p:sp>
+      <p:sp>
+        <p:nvSpPr>
+          <p:cNvPr id="42" name="Chevron 41"/>
+          <p:cNvSpPr/>
+          <p:nvPr/>
+        </p:nvSpPr>
+        <p:spPr>
+          <a:xfrm>
+            <a:off x="502920" y="5989320"/>
+            <a:ext cx="2907792" cy="548640"/>
+          </a:xfrm>
+          <a:prstGeom prst="chevron">
+            <a:avLst/>
+          </a:prstGeom>
+          <a:solidFill>
+            <a:srgbClr val="2E8B9E"/>
+          </a:solidFill>
+          <a:ln>
+            <a:noFill/>
+          </a:ln>
+          <a:effectLst/>
+        </p:spPr>
+        <p:style>
+          <a:lnRef idx="1">
+            <a:schemeClr val="accent1"/>
+          </a:lnRef>
+          <a:fillRef idx="3">
+            <a:schemeClr val="accent1"/>
+          </a:fillRef>
+          <a:effectRef idx="2">
+            <a:schemeClr val="accent1"/>
+          </a:effectRef>
+          <a:fontRef idx="minor">
+            <a:schemeClr val="lt1"/>
+          </a:fontRef>
+        </p:style>
+        <p:txBody>
+          <a:bodyPr rtlCol="0" anchor="ctr" wrap="square" lIns="177800" rIns="127000" tIns="25400" bIns="25400"/>
+          <a:lstStyle/>
+          <a:p>
+            <a:pPr algn="ctr"/>
+            <a:r>
+              <a:rPr sz="1100" b="1">
+                <a:solidFill>
+                  <a:srgbClr val="FFFFFF"/>
+                </a:solidFill>
+                <a:latin typeface="Meiryo"/>
+              </a:rPr>
+              <a:t>7/9〜13</a:t>
+            </a:r>
+          </a:p>
+          <a:p>
+            <a:pPr algn="ctr"/>
+            <a:r>
+              <a:rPr sz="850">
+                <a:solidFill>
+                  <a:srgbClr val="FFFFFF"/>
+                </a:solidFill>
+                <a:latin typeface="Meiryo"/>
+              </a:rPr>
+              <a:t>事前相談会（今回）</a:t>
+            </a:r>
+          </a:p>
+        </p:txBody>
+      </p:sp>
+      <p:sp>
+        <p:nvSpPr>
+          <p:cNvPr id="43" name="Chevron 42"/>
+          <p:cNvSpPr/>
+          <p:nvPr/>
+        </p:nvSpPr>
+        <p:spPr>
+          <a:xfrm>
+            <a:off x="3246120" y="5989320"/>
+            <a:ext cx="2907792" cy="548640"/>
+          </a:xfrm>
+          <a:prstGeom prst="chevron">
+            <a:avLst/>
+          </a:prstGeom>
+          <a:solidFill>
+            <a:srgbClr val="1F385C"/>
+          </a:solidFill>
+          <a:ln>
+            <a:noFill/>
+          </a:ln>
+          <a:effectLst/>
+        </p:spPr>
+        <p:style>
+          <a:lnRef idx="1">
+            <a:schemeClr val="accent1"/>
+          </a:lnRef>
+          <a:fillRef idx="3">
+            <a:schemeClr val="accent1"/>
+          </a:fillRef>
+          <a:effectRef idx="2">
+            <a:schemeClr val="accent1"/>
+          </a:effectRef>
+          <a:fontRef idx="minor">
+            <a:schemeClr val="lt1"/>
+          </a:fontRef>
+        </p:style>
+        <p:txBody>
+          <a:bodyPr rtlCol="0" anchor="ctr" wrap="square" lIns="177800" rIns="127000" tIns="25400" bIns="25400"/>
+          <a:lstStyle/>
+          <a:p>
+            <a:pPr algn="ctr"/>
+            <a:r>
+              <a:rPr sz="1100" b="1">
+                <a:solidFill>
+                  <a:srgbClr val="FFFFFF"/>
+                </a:solidFill>
+                <a:latin typeface="Meiryo"/>
+              </a:rPr>
+              <a:t>〜7/17</a:t>
+            </a:r>
+          </a:p>
+          <a:p>
+            <a:pPr algn="ctr"/>
+            <a:r>
+              <a:rPr sz="850">
+                <a:solidFill>
+                  <a:srgbClr val="FFFFFF"/>
+                </a:solidFill>
+                <a:latin typeface="Meiryo"/>
+              </a:rPr>
+              <a:t>企画書を事務局へ提出</a:t>
+            </a:r>
+          </a:p>
+        </p:txBody>
+      </p:sp>
+      <p:sp>
+        <p:nvSpPr>
+          <p:cNvPr id="44" name="Chevron 43"/>
+          <p:cNvSpPr/>
+          <p:nvPr/>
+        </p:nvSpPr>
+        <p:spPr>
+          <a:xfrm>
+            <a:off x="5989320" y="5989320"/>
+            <a:ext cx="2907792" cy="548640"/>
+          </a:xfrm>
+          <a:prstGeom prst="chevron">
+            <a:avLst/>
+          </a:prstGeom>
+          <a:solidFill>
+            <a:srgbClr val="1F385C"/>
+          </a:solidFill>
+          <a:ln>
+            <a:noFill/>
+          </a:ln>
+          <a:effectLst/>
+        </p:spPr>
+        <p:style>
+          <a:lnRef idx="1">
+            <a:schemeClr val="accent1"/>
+          </a:lnRef>
+          <a:fillRef idx="3">
+            <a:schemeClr val="accent1"/>
+          </a:fillRef>
+          <a:effectRef idx="2">
+            <a:schemeClr val="accent1"/>
+          </a:effectRef>
+          <a:fontRef idx="minor">
+            <a:schemeClr val="lt1"/>
+          </a:fontRef>
+        </p:style>
+        <p:txBody>
+          <a:bodyPr rtlCol="0" anchor="ctr" wrap="square" lIns="177800" rIns="127000" tIns="25400" bIns="25400"/>
+          <a:lstStyle/>
+          <a:p>
+            <a:pPr algn="ctr"/>
+            <a:r>
+              <a:rPr sz="1100" b="1">
+                <a:solidFill>
+                  <a:srgbClr val="FFFFFF"/>
+                </a:solidFill>
+                <a:latin typeface="Meiryo"/>
+              </a:rPr>
+              <a:t>8〜9月</a:t>
+            </a:r>
+          </a:p>
+          <a:p>
+            <a:pPr algn="ctr"/>
+            <a:r>
+              <a:rPr sz="850">
+                <a:solidFill>
+                  <a:srgbClr val="FFFFFF"/>
+                </a:solidFill>
+                <a:latin typeface="Meiryo"/>
+              </a:rPr>
+              <a:t>構築フェーズ（適宜相談可）</a:t>
+            </a:r>
+          </a:p>
+        </p:txBody>
+      </p:sp>
+      <p:sp>
+        <p:nvSpPr>
+          <p:cNvPr id="45" name="Chevron 44"/>
+          <p:cNvSpPr/>
+          <p:nvPr/>
+        </p:nvSpPr>
+        <p:spPr>
+          <a:xfrm>
+            <a:off x="8732520" y="5989320"/>
+            <a:ext cx="2907792" cy="548640"/>
+          </a:xfrm>
+          <a:prstGeom prst="chevron">
+            <a:avLst/>
+          </a:prstGeom>
+          <a:solidFill>
+            <a:srgbClr val="162842"/>
+          </a:solidFill>
+          <a:ln>
+            <a:noFill/>
+          </a:ln>
+          <a:effectLst/>
+        </p:spPr>
+        <p:style>
+          <a:lnRef idx="1">
+            <a:schemeClr val="accent1"/>
+          </a:lnRef>
+          <a:fillRef idx="3">
+            <a:schemeClr val="accent1"/>
+          </a:fillRef>
+          <a:effectRef idx="2">
+            <a:schemeClr val="accent1"/>
+          </a:effectRef>
+          <a:fontRef idx="minor">
+            <a:schemeClr val="lt1"/>
+          </a:fontRef>
+        </p:style>
+        <p:txBody>
+          <a:bodyPr rtlCol="0" anchor="ctr" wrap="square" lIns="177800" rIns="127000" tIns="25400" bIns="25400"/>
+          <a:lstStyle/>
+          <a:p>
+            <a:pPr algn="ctr"/>
+            <a:r>
+              <a:rPr sz="1100" b="1">
+                <a:solidFill>
+                  <a:srgbClr val="FFFFFF"/>
+                </a:solidFill>
+                <a:latin typeface="Meiryo"/>
+              </a:rPr>
+              <a:t>10月</a:t>
+            </a:r>
+          </a:p>
+          <a:p>
+            <a:pPr algn="ctr"/>
+            <a:r>
+              <a:rPr sz="850">
+                <a:solidFill>
+                  <a:srgbClr val="FFFFFF"/>
+                </a:solidFill>
+                <a:latin typeface="Meiryo"/>
+              </a:rPr>
+              <a:t>最終発表（役職者向け）</a:t>
             </a:r>
           </a:p>
         </p:txBody>
